--- a/docs/team-brief/청도해커톤_팀브리프.pptx
+++ b/docs/team-brief/청도해커톤_팀브리프.pptx
@@ -28,9 +28,10 @@
     <p:sldId id="276" r:id="rId22"/>
     <p:sldId id="277" r:id="rId23"/>
     <p:sldId id="278" r:id="rId24"/>
+    <p:sldId id="279" r:id="rId25"/>
   </p:sldIdLst>
   <p:notesMasterIdLst>
-    <p:notesMasterId r:id="rId25"/>
+    <p:notesMasterId r:id="rId26"/>
   </p:notesMasterIdLst>
   <p:sldSz cx="12192000" cy="6858000"/>
   <p:notesSz cx="6858000" cy="12192000"/>
@@ -129,12 +130,12 @@
   <p:extLst>
     <p:ext uri="{521415D9-36F7-43E2-AB2F-B90AF26B5E84}">
       <p14:sectionLst xmlns:p14="http://schemas.microsoft.com/office/powerpoint/2010/main">
-        <p14:section name="표지" id="{dfa80608-a42a-edbb-e636-69d661980984}">
+        <p14:section name="표지" id="{006f2056-27bc-9965-a9dc-632122e34cd0}">
           <p14:sldIdLst>
             <p14:sldId id="256"/>
           </p14:sldIdLst>
         </p14:section>
-        <p14:section name="팀 운영" id="{e3582c86-3d26-e1e0-70e6-c99ac8eb6daf}">
+        <p14:section name="팀 운영" id="{387652fc-3489-022d-b20f-089804add306}">
           <p14:sldIdLst>
             <p14:sldId id="257"/>
             <p14:sldId id="258"/>
@@ -144,7 +145,7 @@
             <p14:sldId id="262"/>
           </p14:sldIdLst>
         </p14:section>
-        <p14:section name="아이디어 준비" id="{11d4d3d8-d133-2da9-8b7d-a4b36f2398c5}">
+        <p14:section name="아이디어 준비" id="{354fb772-85f7-45d5-f3d3-c0c2bd5a75a4}">
           <p14:sldIdLst>
             <p14:sldId id="263"/>
             <p14:sldId id="264"/>
@@ -159,17 +160,18 @@
             <p14:sldId id="273"/>
           </p14:sldIdLst>
         </p14:section>
-        <p14:section name="부록" id="{26489f53-65f1-5eb4-9451-4f25df49c15f}">
+        <p14:section name="부록" id="{f460d0f9-cd8c-ed86-7fdc-b3f3736e93f7}">
           <p14:sldIdLst>
             <p14:sldId id="274"/>
             <p14:sldId id="275"/>
             <p14:sldId id="276"/>
             <p14:sldId id="277"/>
+            <p14:sldId id="278"/>
           </p14:sldIdLst>
         </p14:section>
-        <p14:section name="마무리" id="{4fca061e-3de0-246a-74d0-d658355cd9ad}">
+        <p14:section name="마무리" id="{83237bdc-ce84-a4c2-041b-1a1c3cb46f57}">
           <p14:sldIdLst>
-            <p14:sldId id="278"/>
+            <p14:sldId id="279"/>
           </p14:sldIdLst>
         </p14:section>
       </p14:sectionLst>
@@ -4374,6 +4376,94 @@
 </p:notes>
 </file>
 
+<file path=ppt/notesSlides/notesSlide24.xml><?xml version="1.0" encoding="utf-8"?>
+<p:notes xmlns:a="http://schemas.openxmlformats.org/drawingml/2006/main" xmlns:r="http://schemas.openxmlformats.org/officeDocument/2006/relationships" xmlns:p="http://schemas.openxmlformats.org/presentationml/2006/main">
+  <p:cSld>
+    <p:spTree>
+      <p:nvGrpSpPr>
+        <p:cNvPr id="1" name=""/>
+        <p:cNvGrpSpPr/>
+        <p:nvPr/>
+      </p:nvGrpSpPr>
+      <p:grpSpPr>
+        <a:xfrm>
+          <a:off x="0" y="0"/>
+          <a:ext cx="0" cy="0"/>
+          <a:chOff x="0" y="0"/>
+          <a:chExt cx="0" cy="0"/>
+        </a:xfrm>
+      </p:grpSpPr>
+      <p:sp>
+        <p:nvSpPr>
+          <p:cNvPr id="2" name="Slide Image Placeholder 1"/>
+          <p:cNvSpPr>
+            <a:spLocks noGrp="1" noRot="1" noChangeAspect="1"/>
+          </p:cNvSpPr>
+          <p:nvPr>
+            <p:ph type="sldImg"/>
+          </p:nvPr>
+        </p:nvSpPr>
+        <p:spPr/>
+      </p:sp>
+      <p:sp>
+        <p:nvSpPr>
+          <p:cNvPr id="3" name="Notes Placeholder 2"/>
+          <p:cNvSpPr>
+            <a:spLocks noGrp="1"/>
+          </p:cNvSpPr>
+          <p:nvPr>
+            <p:ph type="body" idx="1"/>
+          </p:nvPr>
+        </p:nvSpPr>
+        <p:spPr/>
+        <p:txBody>
+          <a:bodyPr/>
+          <a:lstStyle/>
+          <a:p>
+            <a:r>
+              <a:rPr lang="en-US" dirty="0"/>
+              <a:t/>
+            </a:r>
+            <a:endParaRPr lang="en-US" dirty="0"/>
+          </a:p>
+        </p:txBody>
+      </p:sp>
+      <p:sp>
+        <p:nvSpPr>
+          <p:cNvPr id="4" name="Slide Number Placeholder 3"/>
+          <p:cNvSpPr>
+            <a:spLocks noGrp="1"/>
+          </p:cNvSpPr>
+          <p:nvPr>
+            <p:ph type="sldNum" sz="quarter" idx="10"/>
+          </p:nvPr>
+        </p:nvSpPr>
+        <p:spPr/>
+        <p:txBody>
+          <a:bodyPr/>
+          <a:lstStyle/>
+          <a:p>
+            <a:fld id="{F7021451-1387-4CA6-816F-3879F97B5CBC}" type="slidenum">
+              <a:rPr lang="en-US"/>
+              <a:t>24</a:t>
+            </a:fld>
+            <a:endParaRPr lang="en-US"/>
+          </a:p>
+        </p:txBody>
+      </p:sp>
+    </p:spTree>
+    <p:extLst>
+      <p:ext uri="{BB962C8B-B14F-4D97-AF65-F5344CB8AC3E}">
+        <p14:creationId xmlns:p14="http://schemas.microsoft.com/office/powerpoint/2010/main" val="1024086991"/>
+      </p:ext>
+    </p:extLst>
+  </p:cSld>
+  <p:clrMapOvr>
+    <a:masterClrMapping/>
+  </p:clrMapOvr>
+</p:notes>
+</file>
+
 <file path=ppt/notesSlides/notesSlide3.xml><?xml version="1.0" encoding="utf-8"?>
 <p:notes xmlns:a="http://schemas.openxmlformats.org/drawingml/2006/main" xmlns:r="http://schemas.openxmlformats.org/officeDocument/2006/relationships" xmlns:p="http://schemas.openxmlformats.org/presentationml/2006/main">
   <p:cSld>
@@ -27521,7 +27611,7 @@
                   <a:srgbClr val="222222"/>
                 </a:solidFill>
               </a:rPr>
-              <a:t>[부록 3] </a:t>
+              <a:t>[부록 2-2] </a:t>
             </a:r>
             <a:pPr algn="l" indent="0" marL="0">
               <a:buNone/>
@@ -27532,9 +27622,292 @@
                   <a:srgbClr val="222222"/>
                 </a:solidFill>
               </a:rPr>
-              <a:t>출처</a:t>
+              <a:t>청도 농어촌버스 노선 구성 — 운수사 1곳, 주요 노선 6개</a:t>
             </a:r>
             <a:endParaRPr lang="en-US" sz="2400" dirty="0"/>
+          </a:p>
+        </p:txBody>
+      </p:sp>
+      <p:sp>
+        <p:nvSpPr>
+          <p:cNvPr id="3" name="Text 1"/>
+          <p:cNvSpPr txBox="1"/>
+          <p:nvPr/>
+        </p:nvSpPr>
+        <p:spPr>
+          <a:xfrm>
+            <a:off x="457200" y="1143000"/>
+            <a:ext cx="2514600" cy="1325880"/>
+          </a:xfrm>
+          <a:prstGeom prst="rect">
+            <a:avLst/>
+          </a:prstGeom>
+          <a:noFill/>
+          <a:ln/>
+        </p:spPr>
+        <p:txBody>
+          <a:bodyPr wrap="square" lIns="0" tIns="0" rIns="0" bIns="0" rtlCol="0" anchor="t"/>
+          <a:lstStyle/>
+          <a:p>
+            <a:pPr indent="0" marL="0">
+              <a:lnSpc>
+                <a:spcPct val="115000"/>
+              </a:lnSpc>
+              <a:buNone/>
+            </a:pPr>
+            <a:r>
+              <a:rPr lang="en-US" sz="1600" b="1" dirty="0">
+                <a:solidFill>
+                  <a:srgbClr val="00358F"/>
+                </a:solidFill>
+                <a:latin typeface="Pretendard" pitchFamily="34" charset="0"/>
+                <a:ea typeface="Pretendard" pitchFamily="34" charset="-122"/>
+                <a:cs typeface="Pretendard" pitchFamily="34" charset="-120"/>
+              </a:rPr>
+              <a:t>노선이 적어</a:t>
+            </a:r>
+            <a:endParaRPr lang="en-US" sz="1600" dirty="0"/>
+          </a:p>
+          <a:p>
+            <a:pPr indent="0" marL="0">
+              <a:lnSpc>
+                <a:spcPct val="115000"/>
+              </a:lnSpc>
+              <a:buNone/>
+            </a:pPr>
+            <a:r>
+              <a:rPr lang="en-US" sz="1600" b="1" dirty="0">
+                <a:solidFill>
+                  <a:srgbClr val="00358F"/>
+                </a:solidFill>
+                <a:latin typeface="Pretendard" pitchFamily="34" charset="0"/>
+                <a:ea typeface="Pretendard" pitchFamily="34" charset="-122"/>
+                <a:cs typeface="Pretendard" pitchFamily="34" charset="-120"/>
+              </a:rPr>
+              <a:t>'고를 경로'가 적음</a:t>
+            </a:r>
+            <a:endParaRPr lang="en-US" sz="1600" dirty="0"/>
+          </a:p>
+        </p:txBody>
+      </p:sp>
+      <p:sp>
+        <p:nvSpPr>
+          <p:cNvPr id="4" name="Text 2"/>
+          <p:cNvSpPr txBox="1"/>
+          <p:nvPr/>
+        </p:nvSpPr>
+        <p:spPr>
+          <a:xfrm>
+            <a:off x="3154680" y="1143000"/>
+            <a:ext cx="8577072" cy="1325880"/>
+          </a:xfrm>
+          <a:prstGeom prst="rect">
+            <a:avLst/>
+          </a:prstGeom>
+          <a:noFill/>
+          <a:ln/>
+        </p:spPr>
+        <p:txBody>
+          <a:bodyPr wrap="square" lIns="0" tIns="0" rIns="0" bIns="0" rtlCol="0" anchor="t"/>
+          <a:lstStyle/>
+          <a:p>
+            <a:pPr marL="342900" indent="-342900">
+              <a:lnSpc>
+                <a:spcPct val="110000"/>
+              </a:lnSpc>
+              <a:spcAft>
+                <a:spcPts val="400"/>
+              </a:spcAft>
+              <a:buSzPct val="100000"/>
+              <a:buChar char="•"/>
+            </a:pPr>
+            <a:r>
+              <a:rPr lang="en-US" sz="1250" dirty="0">
+                <a:solidFill>
+                  <a:srgbClr val="222222"/>
+                </a:solidFill>
+                <a:latin typeface="Pretendard" pitchFamily="34" charset="0"/>
+                <a:ea typeface="Pretendard" pitchFamily="34" charset="-122"/>
+                <a:cs typeface="Pretendard" pitchFamily="34" charset="-120"/>
+              </a:rPr>
+              <a:t>운수사는 청도버스 1곳, 모든 노선이 청도공용버스터미널에서 출발</a:t>
+            </a:r>
+            <a:endParaRPr lang="en-US" sz="1250" dirty="0"/>
+          </a:p>
+          <a:p>
+            <a:pPr marL="342900" indent="-342900">
+              <a:lnSpc>
+                <a:spcPct val="110000"/>
+              </a:lnSpc>
+              <a:spcAft>
+                <a:spcPts val="400"/>
+              </a:spcAft>
+              <a:buSzPct val="100000"/>
+              <a:buChar char="•"/>
+            </a:pPr>
+            <a:r>
+              <a:rPr lang="en-US" sz="1250" dirty="0">
+                <a:solidFill>
+                  <a:srgbClr val="222222"/>
+                </a:solidFill>
+                <a:latin typeface="Pretendard" pitchFamily="34" charset="0"/>
+                <a:ea typeface="Pretendard" pitchFamily="34" charset="-122"/>
+                <a:cs typeface="Pretendard" pitchFamily="34" charset="-120"/>
+              </a:rPr>
+              <a:t>주요 노선 6개(0·1·2·3·5·7번)가 방면별로 나뉨 → 목적지가 정해지면 탈 버스도 거의 정해짐</a:t>
+            </a:r>
+            <a:endParaRPr lang="en-US" sz="1250" dirty="0"/>
+          </a:p>
+          <a:p>
+            <a:pPr marL="342900" indent="-342900">
+              <a:lnSpc>
+                <a:spcPct val="110000"/>
+              </a:lnSpc>
+              <a:spcAft>
+                <a:spcPts val="400"/>
+              </a:spcAft>
+              <a:buSzPct val="100000"/>
+              <a:buChar char="•"/>
+            </a:pPr>
+            <a:r>
+              <a:rPr lang="en-US" sz="1250" dirty="0">
+                <a:solidFill>
+                  <a:srgbClr val="222222"/>
+                </a:solidFill>
+                <a:latin typeface="Pretendard" pitchFamily="34" charset="0"/>
+                <a:ea typeface="Pretendard" pitchFamily="34" charset="-122"/>
+                <a:cs typeface="Pretendard" pitchFamily="34" charset="-120"/>
+              </a:rPr>
+              <a:t>일부 노선은 2~4시간 간격(팀 수집 자료, 공식 시간표로 확인 필요)</a:t>
+            </a:r>
+            <a:endParaRPr lang="en-US" sz="1250" dirty="0"/>
+          </a:p>
+          <a:p>
+            <a:pPr marL="342900" indent="-342900">
+              <a:lnSpc>
+                <a:spcPct val="110000"/>
+              </a:lnSpc>
+              <a:spcAft>
+                <a:spcPts val="400"/>
+              </a:spcAft>
+              <a:buSzPct val="100000"/>
+              <a:buChar char="•"/>
+            </a:pPr>
+            <a:r>
+              <a:rPr lang="en-US" sz="1250" dirty="0">
+                <a:solidFill>
+                  <a:srgbClr val="222222"/>
+                </a:solidFill>
+                <a:latin typeface="Pretendard" pitchFamily="34" charset="0"/>
+                <a:ea typeface="Pretendard" pitchFamily="34" charset="-122"/>
+                <a:cs typeface="Pretendard" pitchFamily="34" charset="-120"/>
+              </a:rPr>
+              <a:t>네이버·카카오 지도에서 청도 버스 실시간 조회 가능하다는 정보 → 사실이면 길찾기 앱 차별점은 더 약해짐(확인 필요)</a:t>
+            </a:r>
+            <a:endParaRPr lang="en-US" sz="1250" dirty="0"/>
+          </a:p>
+        </p:txBody>
+      </p:sp>
+      <p:sp>
+        <p:nvSpPr>
+          <p:cNvPr id="5" name="panel bar 주요 노선 (청도공용버스터미널 기점)"/>
+          <p:cNvSpPr/>
+          <p:nvPr/>
+        </p:nvSpPr>
+        <p:spPr>
+          <a:xfrm>
+            <a:off x="457200" y="2697480"/>
+            <a:ext cx="11274552" cy="310896"/>
+          </a:xfrm>
+          <a:prstGeom prst="rect">
+            <a:avLst/>
+          </a:prstGeom>
+          <a:solidFill>
+            <a:srgbClr val="EEF1F6"/>
+          </a:solidFill>
+          <a:ln w="12700">
+            <a:solidFill>
+              <a:srgbClr val="EEF1F6"/>
+            </a:solidFill>
+            <a:prstDash val="solid"/>
+          </a:ln>
+        </p:spPr>
+      </p:sp>
+      <p:sp>
+        <p:nvSpPr>
+          <p:cNvPr id="6" name="Text 4"/>
+          <p:cNvSpPr txBox="1"/>
+          <p:nvPr/>
+        </p:nvSpPr>
+        <p:spPr>
+          <a:xfrm>
+            <a:off x="566928" y="2697480"/>
+            <a:ext cx="11055096" cy="310896"/>
+          </a:xfrm>
+          <a:prstGeom prst="rect">
+            <a:avLst/>
+          </a:prstGeom>
+          <a:noFill/>
+          <a:ln/>
+        </p:spPr>
+        <p:txBody>
+          <a:bodyPr wrap="square" lIns="0" tIns="0" rIns="0" bIns="0" rtlCol="0" anchor="ctr"/>
+          <a:lstStyle/>
+          <a:p>
+            <a:pPr indent="0" marL="0">
+              <a:buNone/>
+            </a:pPr>
+            <a:r>
+              <a:rPr lang="en-US" sz="1150" b="1" dirty="0">
+                <a:solidFill>
+                  <a:srgbClr val="0B1F4D"/>
+                </a:solidFill>
+                <a:latin typeface="Pretendard" pitchFamily="34" charset="0"/>
+                <a:ea typeface="Pretendard" pitchFamily="34" charset="-122"/>
+                <a:cs typeface="Pretendard" pitchFamily="34" charset="-120"/>
+              </a:rPr>
+              <a:t>주요 노선 (청도공용버스터미널 기점)</a:t>
+            </a:r>
+            <a:endParaRPr lang="en-US" sz="1150" dirty="0"/>
+          </a:p>
+        </p:txBody>
+      </p:sp>
+      <p:sp>
+        <p:nvSpPr>
+          <p:cNvPr id="7" name="Text 5"/>
+          <p:cNvSpPr txBox="1"/>
+          <p:nvPr/>
+        </p:nvSpPr>
+        <p:spPr>
+          <a:xfrm>
+            <a:off x="457200" y="6035040"/>
+            <a:ext cx="11274552" cy="219456"/>
+          </a:xfrm>
+          <a:prstGeom prst="rect">
+            <a:avLst/>
+          </a:prstGeom>
+          <a:noFill/>
+          <a:ln/>
+        </p:spPr>
+        <p:txBody>
+          <a:bodyPr wrap="square" lIns="0" tIns="0" rIns="0" bIns="0" rtlCol="0" anchor="ctr"/>
+          <a:lstStyle/>
+          <a:p>
+            <a:pPr indent="0" marL="0">
+              <a:buNone/>
+            </a:pPr>
+            <a:r>
+              <a:rPr lang="en-US" sz="750" dirty="0">
+                <a:solidFill>
+                  <a:srgbClr val="A0A6AF"/>
+                </a:solidFill>
+                <a:latin typeface="Pretendard" pitchFamily="34" charset="0"/>
+                <a:ea typeface="Pretendard" pitchFamily="34" charset="-122"/>
+                <a:cs typeface="Pretendard" pitchFamily="34" charset="-120"/>
+              </a:rPr>
+              <a:t>자료: HS 수집 자료(2026.10.26, 원 출처 미기재), 나무위키 청도 버스 1·7번, 노선 정보 사이트(3·5번) — 청도군 공식 버스 시간표로 재확인 필요</a:t>
+            </a:r>
+            <a:endParaRPr lang="en-US" sz="750" dirty="0"/>
           </a:p>
         </p:txBody>
       </p:sp>
@@ -27553,7 +27926,7 @@
           </p:nvPr>
         </p:nvGraphicFramePr>
         <p:xfrm>
-          <a:off x="457200" y="1097280"/>
+          <a:off x="457200" y="3090672"/>
           <a:ext cx="11274552" cy="914400"/>
         </p:xfrm>
         <a:graphic>
@@ -27561,11 +27934,12 @@
             <a:tbl>
               <a:tblPr/>
               <a:tblGrid>
-                <a:gridCol w="1188720"/>
-                <a:gridCol w="6675120"/>
-                <a:gridCol w="3410712"/>
+                <a:gridCol w="822960"/>
+                <a:gridCol w="4572000"/>
+                <a:gridCol w="2011680"/>
+                <a:gridCol w="3867912"/>
               </a:tblGrid>
-              <a:tr h="347472">
+              <a:tr h="411480">
                 <a:tc>
                   <a:txBody>
                     <a:bodyPr/>
@@ -27583,7 +27957,7 @@
                           <a:ea typeface="Pretendard" pitchFamily="34" charset="-122"/>
                           <a:cs typeface="Pretendard" pitchFamily="34" charset="-120"/>
                         </a:rPr>
-                        <a:t>구분</a:t>
+                        <a:t>노선</a:t>
                       </a:r>
                       <a:endParaRPr lang="en-US" sz="1100" dirty="0">
                         <a:latin typeface="Pretendard" charset="0"/>
@@ -27651,7 +28025,7 @@
                           <a:ea typeface="Pretendard" pitchFamily="34" charset="-122"/>
                           <a:cs typeface="Pretendard" pitchFamily="34" charset="-120"/>
                         </a:rPr>
-                        <a:t>자료</a:t>
+                        <a:t>주요 경유지</a:t>
                       </a:r>
                       <a:endParaRPr lang="en-US" sz="1100" dirty="0">
                         <a:latin typeface="Pretendard" charset="0"/>
@@ -27719,7 +28093,7 @@
                           <a:ea typeface="Pretendard" pitchFamily="34" charset="-122"/>
                           <a:cs typeface="Pretendard" pitchFamily="34" charset="-120"/>
                         </a:rPr>
-                        <a:t>쓰인 곳</a:t>
+                        <a:t>특징</a:t>
                       </a:r>
                       <a:endParaRPr lang="en-US" sz="1100" dirty="0">
                         <a:latin typeface="Pretendard" charset="0"/>
@@ -27770,8 +28144,76 @@
                     </a:solidFill>
                   </a:tcPr>
                 </a:tc>
+                <a:tc>
+                  <a:txBody>
+                    <a:bodyPr/>
+                    <a:lstStyle/>
+                    <a:p>
+                      <a:pPr algn="ctr" indent="0" marL="0">
+                        <a:buNone/>
+                      </a:pPr>
+                      <a:r>
+                        <a:rPr lang="en-US" sz="1100" b="1" dirty="0">
+                          <a:solidFill>
+                            <a:srgbClr val="FFFFFF"/>
+                          </a:solidFill>
+                          <a:latin typeface="Pretendard" pitchFamily="34" charset="0"/>
+                          <a:ea typeface="Pretendard" pitchFamily="34" charset="-122"/>
+                          <a:cs typeface="Pretendard" pitchFamily="34" charset="-120"/>
+                        </a:rPr>
+                        <a:t>확인 상태</a:t>
+                      </a:r>
+                      <a:endParaRPr lang="en-US" sz="1100" dirty="0">
+                        <a:latin typeface="Pretendard" charset="0"/>
+                        <a:ea typeface="Pretendard" charset="0"/>
+                        <a:cs typeface="Pretendard" charset="0"/>
+                      </a:endParaRPr>
+                    </a:p>
+                  </a:txBody>
+                  <a:tcPr marL="73152" marR="73152" marT="36576" marB="36576" anchor="ctr">
+                    <a:lnL w="9525" cap="flat" cmpd="sng" algn="ctr">
+                      <a:solidFill>
+                        <a:srgbClr val="D9D9D9"/>
+                      </a:solidFill>
+                      <a:prstDash val="solid"/>
+                      <a:round/>
+                      <a:headEnd type="none" w="med" len="med"/>
+                      <a:tailEnd type="none" w="med" len="med"/>
+                    </a:lnL>
+                    <a:lnR w="9525" cap="flat" cmpd="sng" algn="ctr">
+                      <a:solidFill>
+                        <a:srgbClr val="D9D9D9"/>
+                      </a:solidFill>
+                      <a:prstDash val="solid"/>
+                      <a:round/>
+                      <a:headEnd type="none" w="med" len="med"/>
+                      <a:tailEnd type="none" w="med" len="med"/>
+                    </a:lnR>
+                    <a:lnT w="9525" cap="flat" cmpd="sng" algn="ctr">
+                      <a:solidFill>
+                        <a:srgbClr val="D9D9D9"/>
+                      </a:solidFill>
+                      <a:prstDash val="solid"/>
+                      <a:round/>
+                      <a:headEnd type="none" w="med" len="med"/>
+                      <a:tailEnd type="none" w="med" len="med"/>
+                    </a:lnT>
+                    <a:lnB w="9525" cap="flat" cmpd="sng" algn="ctr">
+                      <a:solidFill>
+                        <a:srgbClr val="D9D9D9"/>
+                      </a:solidFill>
+                      <a:prstDash val="solid"/>
+                      <a:round/>
+                      <a:headEnd type="none" w="med" len="med"/>
+                      <a:tailEnd type="none" w="med" len="med"/>
+                    </a:lnB>
+                    <a:solidFill>
+                      <a:srgbClr val="00358F"/>
+                    </a:solidFill>
+                  </a:tcPr>
+                </a:tc>
               </a:tr>
-              <a:tr h="347472">
+              <a:tr h="411480">
                 <a:tc>
                   <a:txBody>
                     <a:bodyPr/>
@@ -27789,7 +28231,7 @@
                           <a:ea typeface="Pretendard" pitchFamily="34" charset="-122"/>
                           <a:cs typeface="Pretendard" pitchFamily="34" charset="-120"/>
                         </a:rPr>
-                        <a:t>대회</a:t>
+                        <a:t>0번</a:t>
                       </a:r>
                       <a:endParaRPr lang="en-US" sz="1100" dirty="0">
                         <a:latin typeface="Pretendard" charset="0"/>
@@ -27857,7 +28299,7 @@
                           <a:ea typeface="Pretendard" pitchFamily="34" charset="-122"/>
                           <a:cs typeface="Pretendard" pitchFamily="34" charset="-120"/>
                         </a:rPr>
-                        <a:t>해커그라운드 공식 페이지(hackersground.kr), 참가 신청 접수 메일(2026.10.25)</a:t>
+                        <a:t>청도터미널 ↔ 팔조령 ↔ 가창 ↔ 대구(가창중학교)</a:t>
                       </a:r>
                       <a:endParaRPr lang="en-US" sz="1100" dirty="0">
                         <a:latin typeface="Pretendard" charset="0"/>
@@ -27922,7 +28364,7 @@
                           <a:ea typeface="Pretendard" pitchFamily="34" charset="-122"/>
                           <a:cs typeface="Pretendard" pitchFamily="34" charset="-120"/>
                         </a:rPr>
-                        <a:t>일정·제출물·심사 기준·셔틀</a:t>
+                        <a:t>대구 시내 연계</a:t>
                       </a:r>
                       <a:endParaRPr lang="en-US" sz="1100" dirty="0">
                         <a:latin typeface="Pretendard" charset="0"/>
@@ -27970,8 +28412,73 @@
                     </a:lnB>
                   </a:tcPr>
                 </a:tc>
+                <a:tc>
+                  <a:txBody>
+                    <a:bodyPr/>
+                    <a:lstStyle/>
+                    <a:p>
+                      <a:pPr indent="0" marL="0">
+                        <a:buNone/>
+                      </a:pPr>
+                      <a:r>
+                        <a:rPr lang="en-US" sz="1100" dirty="0">
+                          <a:solidFill>
+                            <a:srgbClr val="222222"/>
+                          </a:solidFill>
+                          <a:latin typeface="Pretendard" pitchFamily="34" charset="0"/>
+                          <a:ea typeface="Pretendard" pitchFamily="34" charset="-122"/>
+                          <a:cs typeface="Pretendard" pitchFamily="34" charset="-120"/>
+                        </a:rPr>
+                        <a:t>⚠️ 노선 존재 확인, 경유지 미확인</a:t>
+                      </a:r>
+                      <a:endParaRPr lang="en-US" sz="1100" dirty="0">
+                        <a:latin typeface="Pretendard" charset="0"/>
+                        <a:ea typeface="Pretendard" charset="0"/>
+                        <a:cs typeface="Pretendard" charset="0"/>
+                      </a:endParaRPr>
+                    </a:p>
+                  </a:txBody>
+                  <a:tcPr marL="73152" marR="73152" marT="36576" marB="36576" anchor="ctr">
+                    <a:lnL w="9525" cap="flat" cmpd="sng" algn="ctr">
+                      <a:solidFill>
+                        <a:srgbClr val="D9D9D9"/>
+                      </a:solidFill>
+                      <a:prstDash val="solid"/>
+                      <a:round/>
+                      <a:headEnd type="none" w="med" len="med"/>
+                      <a:tailEnd type="none" w="med" len="med"/>
+                    </a:lnL>
+                    <a:lnR w="9525" cap="flat" cmpd="sng" algn="ctr">
+                      <a:solidFill>
+                        <a:srgbClr val="D9D9D9"/>
+                      </a:solidFill>
+                      <a:prstDash val="solid"/>
+                      <a:round/>
+                      <a:headEnd type="none" w="med" len="med"/>
+                      <a:tailEnd type="none" w="med" len="med"/>
+                    </a:lnR>
+                    <a:lnT w="9525" cap="flat" cmpd="sng" algn="ctr">
+                      <a:solidFill>
+                        <a:srgbClr val="D9D9D9"/>
+                      </a:solidFill>
+                      <a:prstDash val="solid"/>
+                      <a:round/>
+                      <a:headEnd type="none" w="med" len="med"/>
+                      <a:tailEnd type="none" w="med" len="med"/>
+                    </a:lnT>
+                    <a:lnB w="9525" cap="flat" cmpd="sng" algn="ctr">
+                      <a:solidFill>
+                        <a:srgbClr val="D9D9D9"/>
+                      </a:solidFill>
+                      <a:prstDash val="solid"/>
+                      <a:round/>
+                      <a:headEnd type="none" w="med" len="med"/>
+                      <a:tailEnd type="none" w="med" len="med"/>
+                    </a:lnB>
+                  </a:tcPr>
+                </a:tc>
               </a:tr>
-              <a:tr h="347472">
+              <a:tr h="411480">
                 <a:tc>
                   <a:txBody>
                     <a:bodyPr/>
@@ -27989,7 +28496,7 @@
                           <a:ea typeface="Pretendard" pitchFamily="34" charset="-122"/>
                           <a:cs typeface="Pretendard" pitchFamily="34" charset="-120"/>
                         </a:rPr>
-                        <a:t>대회</a:t>
+                        <a:t>1번</a:t>
                       </a:r>
                       <a:endParaRPr lang="en-US" sz="1100" dirty="0">
                         <a:latin typeface="Pretendard" charset="0"/>
@@ -28057,7 +28564,7 @@
                           <a:ea typeface="Pretendard" pitchFamily="34" charset="-122"/>
                           <a:cs typeface="Pretendard" pitchFamily="34" charset="-120"/>
                         </a:rPr>
-                        <a:t>2023 대상 DEPS 팀 회고(zedy_dev.log), 2024 대상 나누리 팀 회고(김건우 velog)</a:t>
+                        <a:t>청도터미널 ↔ 화양 ↔ 각남 ↔ 풍각버스터미널</a:t>
                       </a:r>
                       <a:endParaRPr lang="en-US" sz="1100" dirty="0">
                         <a:latin typeface="Pretendard" charset="0"/>
@@ -28122,7 +28629,7 @@
                           <a:ea typeface="Pretendard" pitchFamily="34" charset="-122"/>
                           <a:cs typeface="Pretendard" pitchFamily="34" charset="-120"/>
                         </a:rPr>
-                        <a:t>지난 대상작·심사 과정</a:t>
+                        <a:t>서부 권역 핵심</a:t>
                       </a:r>
                       <a:endParaRPr lang="en-US" sz="1100" dirty="0">
                         <a:latin typeface="Pretendard" charset="0"/>
@@ -28170,8 +28677,73 @@
                     </a:lnB>
                   </a:tcPr>
                 </a:tc>
+                <a:tc>
+                  <a:txBody>
+                    <a:bodyPr/>
+                    <a:lstStyle/>
+                    <a:p>
+                      <a:pPr indent="0" marL="0">
+                        <a:buNone/>
+                      </a:pPr>
+                      <a:r>
+                        <a:rPr lang="en-US" sz="1100" dirty="0">
+                          <a:solidFill>
+                            <a:srgbClr val="222222"/>
+                          </a:solidFill>
+                          <a:latin typeface="Pretendard" pitchFamily="34" charset="0"/>
+                          <a:ea typeface="Pretendard" pitchFamily="34" charset="-122"/>
+                          <a:cs typeface="Pretendard" pitchFamily="34" charset="-120"/>
+                        </a:rPr>
+                        <a:t>✅ 하루 약 21회, 15~60분(2016)</a:t>
+                      </a:r>
+                      <a:endParaRPr lang="en-US" sz="1100" dirty="0">
+                        <a:latin typeface="Pretendard" charset="0"/>
+                        <a:ea typeface="Pretendard" charset="0"/>
+                        <a:cs typeface="Pretendard" charset="0"/>
+                      </a:endParaRPr>
+                    </a:p>
+                  </a:txBody>
+                  <a:tcPr marL="73152" marR="73152" marT="36576" marB="36576" anchor="ctr">
+                    <a:lnL w="9525" cap="flat" cmpd="sng" algn="ctr">
+                      <a:solidFill>
+                        <a:srgbClr val="D9D9D9"/>
+                      </a:solidFill>
+                      <a:prstDash val="solid"/>
+                      <a:round/>
+                      <a:headEnd type="none" w="med" len="med"/>
+                      <a:tailEnd type="none" w="med" len="med"/>
+                    </a:lnL>
+                    <a:lnR w="9525" cap="flat" cmpd="sng" algn="ctr">
+                      <a:solidFill>
+                        <a:srgbClr val="D9D9D9"/>
+                      </a:solidFill>
+                      <a:prstDash val="solid"/>
+                      <a:round/>
+                      <a:headEnd type="none" w="med" len="med"/>
+                      <a:tailEnd type="none" w="med" len="med"/>
+                    </a:lnR>
+                    <a:lnT w="9525" cap="flat" cmpd="sng" algn="ctr">
+                      <a:solidFill>
+                        <a:srgbClr val="D9D9D9"/>
+                      </a:solidFill>
+                      <a:prstDash val="solid"/>
+                      <a:round/>
+                      <a:headEnd type="none" w="med" len="med"/>
+                      <a:tailEnd type="none" w="med" len="med"/>
+                    </a:lnT>
+                    <a:lnB w="9525" cap="flat" cmpd="sng" algn="ctr">
+                      <a:solidFill>
+                        <a:srgbClr val="D9D9D9"/>
+                      </a:solidFill>
+                      <a:prstDash val="solid"/>
+                      <a:round/>
+                      <a:headEnd type="none" w="med" len="med"/>
+                      <a:tailEnd type="none" w="med" len="med"/>
+                    </a:lnB>
+                  </a:tcPr>
+                </a:tc>
               </a:tr>
-              <a:tr h="347472">
+              <a:tr h="411480">
                 <a:tc>
                   <a:txBody>
                     <a:bodyPr/>
@@ -28189,7 +28761,7 @@
                           <a:ea typeface="Pretendard" pitchFamily="34" charset="-122"/>
                           <a:cs typeface="Pretendard" pitchFamily="34" charset="-120"/>
                         </a:rPr>
-                        <a:t>대회</a:t>
+                        <a:t>2번</a:t>
                       </a:r>
                       <a:endParaRPr lang="en-US" sz="1100" dirty="0">
                         <a:latin typeface="Pretendard" charset="0"/>
@@ -28257,7 +28829,7 @@
                           <a:ea typeface="Pretendard" pitchFamily="34" charset="-122"/>
                           <a:cs typeface="Pretendard" pitchFamily="34" charset="-120"/>
                         </a:rPr>
-                        <a:t>배포 기회 2번 — 팀 내 공유 정보</a:t>
+                        <a:t>청도터미널 ↔ 유등 ↔ 대곡 ↔ 신촌 ↔ 수야</a:t>
                       </a:r>
                       <a:endParaRPr lang="en-US" sz="1100" dirty="0">
                         <a:latin typeface="Pretendard" charset="0"/>
@@ -28314,15 +28886,15 @@
                         <a:buNone/>
                       </a:pPr>
                       <a:r>
-                        <a:rPr lang="en-US" sz="1100" b="1" dirty="0">
+                        <a:rPr lang="en-US" sz="1100" dirty="0">
                           <a:solidFill>
-                            <a:srgbClr val="FF8200"/>
+                            <a:srgbClr val="222222"/>
                           </a:solidFill>
                           <a:latin typeface="Pretendard" pitchFamily="34" charset="0"/>
                           <a:ea typeface="Pretendard" pitchFamily="34" charset="-122"/>
                           <a:cs typeface="Pretendard" pitchFamily="34" charset="-120"/>
                         </a:rPr>
-                        <a:t>공식 출처 확인 필요</a:t>
+                        <a:t>이서면 마을 연계</a:t>
                       </a:r>
                       <a:endParaRPr lang="en-US" sz="1100" dirty="0">
                         <a:latin typeface="Pretendard" charset="0"/>
@@ -28368,13 +28940,75 @@
                       <a:headEnd type="none" w="med" len="med"/>
                       <a:tailEnd type="none" w="med" len="med"/>
                     </a:lnB>
-                    <a:solidFill>
-                      <a:srgbClr val="FFF3E6"/>
-                    </a:solidFill>
+                  </a:tcPr>
+                </a:tc>
+                <a:tc>
+                  <a:txBody>
+                    <a:bodyPr/>
+                    <a:lstStyle/>
+                    <a:p>
+                      <a:pPr indent="0" marL="0">
+                        <a:buNone/>
+                      </a:pPr>
+                      <a:r>
+                        <a:rPr lang="en-US" sz="1100" dirty="0">
+                          <a:solidFill>
+                            <a:srgbClr val="222222"/>
+                          </a:solidFill>
+                          <a:latin typeface="Pretendard" pitchFamily="34" charset="0"/>
+                          <a:ea typeface="Pretendard" pitchFamily="34" charset="-122"/>
+                          <a:cs typeface="Pretendard" pitchFamily="34" charset="-120"/>
+                        </a:rPr>
+                        <a:t>⚠️ 노선 존재 확인, 경유지 미확인</a:t>
+                      </a:r>
+                      <a:endParaRPr lang="en-US" sz="1100" dirty="0">
+                        <a:latin typeface="Pretendard" charset="0"/>
+                        <a:ea typeface="Pretendard" charset="0"/>
+                        <a:cs typeface="Pretendard" charset="0"/>
+                      </a:endParaRPr>
+                    </a:p>
+                  </a:txBody>
+                  <a:tcPr marL="73152" marR="73152" marT="36576" marB="36576" anchor="ctr">
+                    <a:lnL w="9525" cap="flat" cmpd="sng" algn="ctr">
+                      <a:solidFill>
+                        <a:srgbClr val="D9D9D9"/>
+                      </a:solidFill>
+                      <a:prstDash val="solid"/>
+                      <a:round/>
+                      <a:headEnd type="none" w="med" len="med"/>
+                      <a:tailEnd type="none" w="med" len="med"/>
+                    </a:lnL>
+                    <a:lnR w="9525" cap="flat" cmpd="sng" algn="ctr">
+                      <a:solidFill>
+                        <a:srgbClr val="D9D9D9"/>
+                      </a:solidFill>
+                      <a:prstDash val="solid"/>
+                      <a:round/>
+                      <a:headEnd type="none" w="med" len="med"/>
+                      <a:tailEnd type="none" w="med" len="med"/>
+                    </a:lnR>
+                    <a:lnT w="9525" cap="flat" cmpd="sng" algn="ctr">
+                      <a:solidFill>
+                        <a:srgbClr val="D9D9D9"/>
+                      </a:solidFill>
+                      <a:prstDash val="solid"/>
+                      <a:round/>
+                      <a:headEnd type="none" w="med" len="med"/>
+                      <a:tailEnd type="none" w="med" len="med"/>
+                    </a:lnT>
+                    <a:lnB w="9525" cap="flat" cmpd="sng" algn="ctr">
+                      <a:solidFill>
+                        <a:srgbClr val="D9D9D9"/>
+                      </a:solidFill>
+                      <a:prstDash val="solid"/>
+                      <a:round/>
+                      <a:headEnd type="none" w="med" len="med"/>
+                      <a:tailEnd type="none" w="med" len="med"/>
+                    </a:lnB>
                   </a:tcPr>
                 </a:tc>
               </a:tr>
-              <a:tr h="347472">
+              <a:tr h="411480">
                 <a:tc>
                   <a:txBody>
                     <a:bodyPr/>
@@ -28392,7 +29026,7 @@
                           <a:ea typeface="Pretendard" pitchFamily="34" charset="-122"/>
                           <a:cs typeface="Pretendard" pitchFamily="34" charset="-120"/>
                         </a:rPr>
-                        <a:t>인구</a:t>
+                        <a:t>3번</a:t>
                       </a:r>
                       <a:endParaRPr lang="en-US" sz="1100" dirty="0">
                         <a:latin typeface="Pretendard" charset="0"/>
@@ -28460,7 +29094,7 @@
                           <a:ea typeface="Pretendard" pitchFamily="34" charset="-122"/>
                           <a:cs typeface="Pretendard" pitchFamily="34" charset="-120"/>
                         </a:rPr>
-                        <a:t>행정안전부 주민등록 인구통계(2026.9)</a:t>
+                        <a:t>청도터미널 ↔ 금천동 ↔ 운산 ↔ 운문사</a:t>
                       </a:r>
                       <a:endParaRPr lang="en-US" sz="1100" dirty="0">
                         <a:latin typeface="Pretendard" charset="0"/>
@@ -28525,7 +29159,7 @@
                           <a:ea typeface="Pretendard" pitchFamily="34" charset="-122"/>
                           <a:cs typeface="Pretendard" pitchFamily="34" charset="-120"/>
                         </a:rPr>
-                        <a:t>연령대별 인구, 읍면별 평균 연령</a:t>
+                        <a:t>동부 권역, 운문사</a:t>
                       </a:r>
                       <a:endParaRPr lang="en-US" sz="1100" dirty="0">
                         <a:latin typeface="Pretendard" charset="0"/>
@@ -28573,8 +29207,73 @@
                     </a:lnB>
                   </a:tcPr>
                 </a:tc>
+                <a:tc>
+                  <a:txBody>
+                    <a:bodyPr/>
+                    <a:lstStyle/>
+                    <a:p>
+                      <a:pPr indent="0" marL="0">
+                        <a:buNone/>
+                      </a:pPr>
+                      <a:r>
+                        <a:rPr lang="en-US" sz="1100" dirty="0">
+                          <a:solidFill>
+                            <a:srgbClr val="222222"/>
+                          </a:solidFill>
+                          <a:latin typeface="Pretendard" pitchFamily="34" charset="0"/>
+                          <a:ea typeface="Pretendard" pitchFamily="34" charset="-122"/>
+                          <a:cs typeface="Pretendard" pitchFamily="34" charset="-120"/>
+                        </a:rPr>
+                        <a:t>✅ 3번 노선 정류소 12개 구간 확인</a:t>
+                      </a:r>
+                      <a:endParaRPr lang="en-US" sz="1100" dirty="0">
+                        <a:latin typeface="Pretendard" charset="0"/>
+                        <a:ea typeface="Pretendard" charset="0"/>
+                        <a:cs typeface="Pretendard" charset="0"/>
+                      </a:endParaRPr>
+                    </a:p>
+                  </a:txBody>
+                  <a:tcPr marL="73152" marR="73152" marT="36576" marB="36576" anchor="ctr">
+                    <a:lnL w="9525" cap="flat" cmpd="sng" algn="ctr">
+                      <a:solidFill>
+                        <a:srgbClr val="D9D9D9"/>
+                      </a:solidFill>
+                      <a:prstDash val="solid"/>
+                      <a:round/>
+                      <a:headEnd type="none" w="med" len="med"/>
+                      <a:tailEnd type="none" w="med" len="med"/>
+                    </a:lnL>
+                    <a:lnR w="9525" cap="flat" cmpd="sng" algn="ctr">
+                      <a:solidFill>
+                        <a:srgbClr val="D9D9D9"/>
+                      </a:solidFill>
+                      <a:prstDash val="solid"/>
+                      <a:round/>
+                      <a:headEnd type="none" w="med" len="med"/>
+                      <a:tailEnd type="none" w="med" len="med"/>
+                    </a:lnR>
+                    <a:lnT w="9525" cap="flat" cmpd="sng" algn="ctr">
+                      <a:solidFill>
+                        <a:srgbClr val="D9D9D9"/>
+                      </a:solidFill>
+                      <a:prstDash val="solid"/>
+                      <a:round/>
+                      <a:headEnd type="none" w="med" len="med"/>
+                      <a:tailEnd type="none" w="med" len="med"/>
+                    </a:lnT>
+                    <a:lnB w="9525" cap="flat" cmpd="sng" algn="ctr">
+                      <a:solidFill>
+                        <a:srgbClr val="D9D9D9"/>
+                      </a:solidFill>
+                      <a:prstDash val="solid"/>
+                      <a:round/>
+                      <a:headEnd type="none" w="med" len="med"/>
+                      <a:tailEnd type="none" w="med" len="med"/>
+                    </a:lnB>
+                  </a:tcPr>
+                </a:tc>
               </a:tr>
-              <a:tr h="347472">
+              <a:tr h="411480">
                 <a:tc>
                   <a:txBody>
                     <a:bodyPr/>
@@ -28592,7 +29291,7 @@
                           <a:ea typeface="Pretendard" pitchFamily="34" charset="-122"/>
                           <a:cs typeface="Pretendard" pitchFamily="34" charset="-120"/>
                         </a:rPr>
-                        <a:t>인구·돌봄</a:t>
+                        <a:t>5번</a:t>
                       </a:r>
                       <a:endParaRPr lang="en-US" sz="1100" dirty="0">
                         <a:latin typeface="Pretendard" charset="0"/>
@@ -28660,7 +29359,7 @@
                           <a:ea typeface="Pretendard" pitchFamily="34" charset="-122"/>
                           <a:cs typeface="Pretendard" pitchFamily="34" charset="-120"/>
                         </a:rPr>
-                        <a:t>매일신문 2025.5.8 「행복하고 건강한 노년, 인생 이모작」</a:t>
+                        <a:t>청도터미널 ↔ 유천 ↔ 온막 ↔ 상동역(밀양)</a:t>
                       </a:r>
                       <a:endParaRPr lang="en-US" sz="1100" dirty="0">
                         <a:latin typeface="Pretendard" charset="0"/>
@@ -28725,7 +29424,7 @@
                           <a:ea typeface="Pretendard" pitchFamily="34" charset="-122"/>
                           <a:cs typeface="Pretendard" pitchFamily="34" charset="-120"/>
                         </a:rPr>
-                        <a:t>65세 이상 45.1%, 노인일자리, 비상벨</a:t>
+                        <a:t>밀양 연계</a:t>
                       </a:r>
                       <a:endParaRPr lang="en-US" sz="1100" dirty="0">
                         <a:latin typeface="Pretendard" charset="0"/>
@@ -28773,8 +29472,73 @@
                     </a:lnB>
                   </a:tcPr>
                 </a:tc>
+                <a:tc>
+                  <a:txBody>
+                    <a:bodyPr/>
+                    <a:lstStyle/>
+                    <a:p>
+                      <a:pPr indent="0" marL="0">
+                        <a:buNone/>
+                      </a:pPr>
+                      <a:r>
+                        <a:rPr lang="en-US" sz="1100" dirty="0">
+                          <a:solidFill>
+                            <a:srgbClr val="222222"/>
+                          </a:solidFill>
+                          <a:latin typeface="Pretendard" pitchFamily="34" charset="0"/>
+                          <a:ea typeface="Pretendard" pitchFamily="34" charset="-122"/>
+                          <a:cs typeface="Pretendard" pitchFamily="34" charset="-120"/>
+                        </a:rPr>
+                        <a:t>✅ 동곡행 정류소 40개, 5-2번 상동행</a:t>
+                      </a:r>
+                      <a:endParaRPr lang="en-US" sz="1100" dirty="0">
+                        <a:latin typeface="Pretendard" charset="0"/>
+                        <a:ea typeface="Pretendard" charset="0"/>
+                        <a:cs typeface="Pretendard" charset="0"/>
+                      </a:endParaRPr>
+                    </a:p>
+                  </a:txBody>
+                  <a:tcPr marL="73152" marR="73152" marT="36576" marB="36576" anchor="ctr">
+                    <a:lnL w="9525" cap="flat" cmpd="sng" algn="ctr">
+                      <a:solidFill>
+                        <a:srgbClr val="D9D9D9"/>
+                      </a:solidFill>
+                      <a:prstDash val="solid"/>
+                      <a:round/>
+                      <a:headEnd type="none" w="med" len="med"/>
+                      <a:tailEnd type="none" w="med" len="med"/>
+                    </a:lnL>
+                    <a:lnR w="9525" cap="flat" cmpd="sng" algn="ctr">
+                      <a:solidFill>
+                        <a:srgbClr val="D9D9D9"/>
+                      </a:solidFill>
+                      <a:prstDash val="solid"/>
+                      <a:round/>
+                      <a:headEnd type="none" w="med" len="med"/>
+                      <a:tailEnd type="none" w="med" len="med"/>
+                    </a:lnR>
+                    <a:lnT w="9525" cap="flat" cmpd="sng" algn="ctr">
+                      <a:solidFill>
+                        <a:srgbClr val="D9D9D9"/>
+                      </a:solidFill>
+                      <a:prstDash val="solid"/>
+                      <a:round/>
+                      <a:headEnd type="none" w="med" len="med"/>
+                      <a:tailEnd type="none" w="med" len="med"/>
+                    </a:lnT>
+                    <a:lnB w="9525" cap="flat" cmpd="sng" algn="ctr">
+                      <a:solidFill>
+                        <a:srgbClr val="D9D9D9"/>
+                      </a:solidFill>
+                      <a:prstDash val="solid"/>
+                      <a:round/>
+                      <a:headEnd type="none" w="med" len="med"/>
+                      <a:tailEnd type="none" w="med" len="med"/>
+                    </a:lnB>
+                  </a:tcPr>
+                </a:tc>
               </a:tr>
-              <a:tr h="347472">
+              <a:tr h="411480">
                 <a:tc>
                   <a:txBody>
                     <a:bodyPr/>
@@ -28792,7 +29556,7 @@
                           <a:ea typeface="Pretendard" pitchFamily="34" charset="-122"/>
                           <a:cs typeface="Pretendard" pitchFamily="34" charset="-120"/>
                         </a:rPr>
-                        <a:t>의료</a:t>
+                        <a:t>7번</a:t>
                       </a:r>
                       <a:endParaRPr lang="en-US" sz="1100" dirty="0">
                         <a:latin typeface="Pretendard" charset="0"/>
@@ -28860,7 +29624,7 @@
                           <a:ea typeface="Pretendard" pitchFamily="34" charset="-122"/>
                           <a:cs typeface="Pretendard" pitchFamily="34" charset="-120"/>
                         </a:rPr>
-                        <a:t>뉴스1 2026.8.18(의료취약지 76곳), 경북매일 2026.7.20</a:t>
+                        <a:t>청도터미널 ↔ 남성현 ↔ 와인터널 ↔ 덕암</a:t>
                       </a:r>
                       <a:endParaRPr lang="en-US" sz="1100" dirty="0">
                         <a:latin typeface="Pretendard" charset="0"/>
@@ -28925,142 +29689,7 @@
                           <a:ea typeface="Pretendard" pitchFamily="34" charset="-122"/>
                           <a:cs typeface="Pretendard" pitchFamily="34" charset="-120"/>
                         </a:rPr>
-                        <a:t>의료취약지, 병원 없는 면, 응급실</a:t>
-                      </a:r>
-                      <a:endParaRPr lang="en-US" sz="1100" dirty="0">
-                        <a:latin typeface="Pretendard" charset="0"/>
-                        <a:ea typeface="Pretendard" charset="0"/>
-                        <a:cs typeface="Pretendard" charset="0"/>
-                      </a:endParaRPr>
-                    </a:p>
-                  </a:txBody>
-                  <a:tcPr marL="73152" marR="73152" marT="36576" marB="36576" anchor="ctr">
-                    <a:lnL w="9525" cap="flat" cmpd="sng" algn="ctr">
-                      <a:solidFill>
-                        <a:srgbClr val="D9D9D9"/>
-                      </a:solidFill>
-                      <a:prstDash val="solid"/>
-                      <a:round/>
-                      <a:headEnd type="none" w="med" len="med"/>
-                      <a:tailEnd type="none" w="med" len="med"/>
-                    </a:lnL>
-                    <a:lnR w="9525" cap="flat" cmpd="sng" algn="ctr">
-                      <a:solidFill>
-                        <a:srgbClr val="D9D9D9"/>
-                      </a:solidFill>
-                      <a:prstDash val="solid"/>
-                      <a:round/>
-                      <a:headEnd type="none" w="med" len="med"/>
-                      <a:tailEnd type="none" w="med" len="med"/>
-                    </a:lnR>
-                    <a:lnT w="9525" cap="flat" cmpd="sng" algn="ctr">
-                      <a:solidFill>
-                        <a:srgbClr val="D9D9D9"/>
-                      </a:solidFill>
-                      <a:prstDash val="solid"/>
-                      <a:round/>
-                      <a:headEnd type="none" w="med" len="med"/>
-                      <a:tailEnd type="none" w="med" len="med"/>
-                    </a:lnT>
-                    <a:lnB w="9525" cap="flat" cmpd="sng" algn="ctr">
-                      <a:solidFill>
-                        <a:srgbClr val="D9D9D9"/>
-                      </a:solidFill>
-                      <a:prstDash val="solid"/>
-                      <a:round/>
-                      <a:headEnd type="none" w="med" len="med"/>
-                      <a:tailEnd type="none" w="med" len="med"/>
-                    </a:lnB>
-                  </a:tcPr>
-                </a:tc>
-              </a:tr>
-              <a:tr h="347472">
-                <a:tc>
-                  <a:txBody>
-                    <a:bodyPr/>
-                    <a:lstStyle/>
-                    <a:p>
-                      <a:pPr indent="0" marL="0">
-                        <a:buNone/>
-                      </a:pPr>
-                      <a:r>
-                        <a:rPr lang="en-US" sz="1100" b="1" dirty="0">
-                          <a:solidFill>
-                            <a:srgbClr val="00358F"/>
-                          </a:solidFill>
-                          <a:latin typeface="Pretendard" pitchFamily="34" charset="0"/>
-                          <a:ea typeface="Pretendard" pitchFamily="34" charset="-122"/>
-                          <a:cs typeface="Pretendard" pitchFamily="34" charset="-120"/>
-                        </a:rPr>
-                        <a:t>의료</a:t>
-                      </a:r>
-                      <a:endParaRPr lang="en-US" sz="1100" dirty="0">
-                        <a:latin typeface="Pretendard" charset="0"/>
-                        <a:ea typeface="Pretendard" charset="0"/>
-                        <a:cs typeface="Pretendard" charset="0"/>
-                      </a:endParaRPr>
-                    </a:p>
-                  </a:txBody>
-                  <a:tcPr marL="73152" marR="73152" marT="36576" marB="36576" anchor="ctr">
-                    <a:lnL w="9525" cap="flat" cmpd="sng" algn="ctr">
-                      <a:solidFill>
-                        <a:srgbClr val="D9D9D9"/>
-                      </a:solidFill>
-                      <a:prstDash val="solid"/>
-                      <a:round/>
-                      <a:headEnd type="none" w="med" len="med"/>
-                      <a:tailEnd type="none" w="med" len="med"/>
-                    </a:lnL>
-                    <a:lnR w="9525" cap="flat" cmpd="sng" algn="ctr">
-                      <a:solidFill>
-                        <a:srgbClr val="D9D9D9"/>
-                      </a:solidFill>
-                      <a:prstDash val="solid"/>
-                      <a:round/>
-                      <a:headEnd type="none" w="med" len="med"/>
-                      <a:tailEnd type="none" w="med" len="med"/>
-                    </a:lnR>
-                    <a:lnT w="9525" cap="flat" cmpd="sng" algn="ctr">
-                      <a:solidFill>
-                        <a:srgbClr val="D9D9D9"/>
-                      </a:solidFill>
-                      <a:prstDash val="solid"/>
-                      <a:round/>
-                      <a:headEnd type="none" w="med" len="med"/>
-                      <a:tailEnd type="none" w="med" len="med"/>
-                    </a:lnT>
-                    <a:lnB w="9525" cap="flat" cmpd="sng" algn="ctr">
-                      <a:solidFill>
-                        <a:srgbClr val="D9D9D9"/>
-                      </a:solidFill>
-                      <a:prstDash val="solid"/>
-                      <a:round/>
-                      <a:headEnd type="none" w="med" len="med"/>
-                      <a:tailEnd type="none" w="med" len="med"/>
-                    </a:lnB>
-                    <a:solidFill>
-                      <a:srgbClr val="F5F7FB"/>
-                    </a:solidFill>
-                  </a:tcPr>
-                </a:tc>
-                <a:tc>
-                  <a:txBody>
-                    <a:bodyPr/>
-                    <a:lstStyle/>
-                    <a:p>
-                      <a:pPr indent="0" marL="0">
-                        <a:buNone/>
-                      </a:pPr>
-                      <a:r>
-                        <a:rPr lang="en-US" sz="1100" dirty="0">
-                          <a:solidFill>
-                            <a:srgbClr val="222222"/>
-                          </a:solidFill>
-                          <a:latin typeface="Pretendard" pitchFamily="34" charset="0"/>
-                          <a:ea typeface="Pretendard" pitchFamily="34" charset="-122"/>
-                          <a:cs typeface="Pretendard" pitchFamily="34" charset="-120"/>
-                        </a:rPr>
-                        <a:t>공공데이터포털 「청도군_집단급식소 운영 병원」(2026.6.8)</a:t>
+                        <a:t>관광지 연계</a:t>
                       </a:r>
                       <a:endParaRPr lang="en-US" sz="1100" dirty="0">
                         <a:latin typeface="Pretendard" charset="0"/>
@@ -29117,15 +29746,15 @@
                         <a:buNone/>
                       </a:pPr>
                       <a:r>
-                        <a:rPr lang="en-US" sz="1100" dirty="0">
+                        <a:rPr lang="en-US" sz="1100" b="1" dirty="0">
                           <a:solidFill>
-                            <a:srgbClr val="222222"/>
+                            <a:srgbClr val="FF8200"/>
                           </a:solidFill>
                           <a:latin typeface="Pretendard" pitchFamily="34" charset="0"/>
                           <a:ea typeface="Pretendard" pitchFamily="34" charset="-122"/>
                           <a:cs typeface="Pretendard" pitchFamily="34" charset="-120"/>
                         </a:rPr>
-                        <a:t>병원 현황·응급실 병상</a:t>
+                        <a:t>✅ 방면별 하루 5~7회, 버스 1대(2016)</a:t>
                       </a:r>
                       <a:endParaRPr lang="en-US" sz="1100" dirty="0">
                         <a:latin typeface="Pretendard" charset="0"/>
@@ -29171,1406 +29800,9 @@
                       <a:headEnd type="none" w="med" len="med"/>
                       <a:tailEnd type="none" w="med" len="med"/>
                     </a:lnB>
-                  </a:tcPr>
-                </a:tc>
-              </a:tr>
-              <a:tr h="347472">
-                <a:tc>
-                  <a:txBody>
-                    <a:bodyPr/>
-                    <a:lstStyle/>
-                    <a:p>
-                      <a:pPr indent="0" marL="0">
-                        <a:buNone/>
-                      </a:pPr>
-                      <a:r>
-                        <a:rPr lang="en-US" sz="1100" b="1" dirty="0">
-                          <a:solidFill>
-                            <a:srgbClr val="00358F"/>
-                          </a:solidFill>
-                          <a:latin typeface="Pretendard" pitchFamily="34" charset="0"/>
-                          <a:ea typeface="Pretendard" pitchFamily="34" charset="-122"/>
-                          <a:cs typeface="Pretendard" pitchFamily="34" charset="-120"/>
-                        </a:rPr>
-                        <a:t>관광</a:t>
-                      </a:r>
-                      <a:endParaRPr lang="en-US" sz="1100" dirty="0">
-                        <a:latin typeface="Pretendard" charset="0"/>
-                        <a:ea typeface="Pretendard" charset="0"/>
-                        <a:cs typeface="Pretendard" charset="0"/>
-                      </a:endParaRPr>
-                    </a:p>
-                  </a:txBody>
-                  <a:tcPr marL="73152" marR="73152" marT="36576" marB="36576" anchor="ctr">
-                    <a:lnL w="9525" cap="flat" cmpd="sng" algn="ctr">
-                      <a:solidFill>
-                        <a:srgbClr val="D9D9D9"/>
-                      </a:solidFill>
-                      <a:prstDash val="solid"/>
-                      <a:round/>
-                      <a:headEnd type="none" w="med" len="med"/>
-                      <a:tailEnd type="none" w="med" len="med"/>
-                    </a:lnL>
-                    <a:lnR w="9525" cap="flat" cmpd="sng" algn="ctr">
-                      <a:solidFill>
-                        <a:srgbClr val="D9D9D9"/>
-                      </a:solidFill>
-                      <a:prstDash val="solid"/>
-                      <a:round/>
-                      <a:headEnd type="none" w="med" len="med"/>
-                      <a:tailEnd type="none" w="med" len="med"/>
-                    </a:lnR>
-                    <a:lnT w="9525" cap="flat" cmpd="sng" algn="ctr">
-                      <a:solidFill>
-                        <a:srgbClr val="D9D9D9"/>
-                      </a:solidFill>
-                      <a:prstDash val="solid"/>
-                      <a:round/>
-                      <a:headEnd type="none" w="med" len="med"/>
-                      <a:tailEnd type="none" w="med" len="med"/>
-                    </a:lnT>
-                    <a:lnB w="9525" cap="flat" cmpd="sng" algn="ctr">
-                      <a:solidFill>
-                        <a:srgbClr val="D9D9D9"/>
-                      </a:solidFill>
-                      <a:prstDash val="solid"/>
-                      <a:round/>
-                      <a:headEnd type="none" w="med" len="med"/>
-                      <a:tailEnd type="none" w="med" len="med"/>
-                    </a:lnB>
                     <a:solidFill>
-                      <a:srgbClr val="F5F7FB"/>
+                      <a:srgbClr val="FFF3E6"/>
                     </a:solidFill>
-                  </a:tcPr>
-                </a:tc>
-                <a:tc>
-                  <a:txBody>
-                    <a:bodyPr/>
-                    <a:lstStyle/>
-                    <a:p>
-                      <a:pPr indent="0" marL="0">
-                        <a:buNone/>
-                      </a:pPr>
-                      <a:r>
-                        <a:rPr lang="en-US" sz="1100" dirty="0">
-                          <a:solidFill>
-                            <a:srgbClr val="222222"/>
-                          </a:solidFill>
-                          <a:latin typeface="Pretendard" pitchFamily="34" charset="0"/>
-                          <a:ea typeface="Pretendard" pitchFamily="34" charset="-122"/>
-                          <a:cs typeface="Pretendard" pitchFamily="34" charset="-120"/>
-                        </a:rPr>
-                        <a:t>경북매일 2026.5.26, 청도군 통합예약시스템 관광택시 화면(2026.10.24)</a:t>
-                      </a:r>
-                      <a:endParaRPr lang="en-US" sz="1100" dirty="0">
-                        <a:latin typeface="Pretendard" charset="0"/>
-                        <a:ea typeface="Pretendard" charset="0"/>
-                        <a:cs typeface="Pretendard" charset="0"/>
-                      </a:endParaRPr>
-                    </a:p>
-                  </a:txBody>
-                  <a:tcPr marL="73152" marR="73152" marT="36576" marB="36576" anchor="ctr">
-                    <a:lnL w="9525" cap="flat" cmpd="sng" algn="ctr">
-                      <a:solidFill>
-                        <a:srgbClr val="D9D9D9"/>
-                      </a:solidFill>
-                      <a:prstDash val="solid"/>
-                      <a:round/>
-                      <a:headEnd type="none" w="med" len="med"/>
-                      <a:tailEnd type="none" w="med" len="med"/>
-                    </a:lnL>
-                    <a:lnR w="9525" cap="flat" cmpd="sng" algn="ctr">
-                      <a:solidFill>
-                        <a:srgbClr val="D9D9D9"/>
-                      </a:solidFill>
-                      <a:prstDash val="solid"/>
-                      <a:round/>
-                      <a:headEnd type="none" w="med" len="med"/>
-                      <a:tailEnd type="none" w="med" len="med"/>
-                    </a:lnR>
-                    <a:lnT w="9525" cap="flat" cmpd="sng" algn="ctr">
-                      <a:solidFill>
-                        <a:srgbClr val="D9D9D9"/>
-                      </a:solidFill>
-                      <a:prstDash val="solid"/>
-                      <a:round/>
-                      <a:headEnd type="none" w="med" len="med"/>
-                      <a:tailEnd type="none" w="med" len="med"/>
-                    </a:lnT>
-                    <a:lnB w="9525" cap="flat" cmpd="sng" algn="ctr">
-                      <a:solidFill>
-                        <a:srgbClr val="D9D9D9"/>
-                      </a:solidFill>
-                      <a:prstDash val="solid"/>
-                      <a:round/>
-                      <a:headEnd type="none" w="med" len="med"/>
-                      <a:tailEnd type="none" w="med" len="med"/>
-                    </a:lnB>
-                  </a:tcPr>
-                </a:tc>
-                <a:tc>
-                  <a:txBody>
-                    <a:bodyPr/>
-                    <a:lstStyle/>
-                    <a:p>
-                      <a:pPr indent="0" marL="0">
-                        <a:buNone/>
-                      </a:pPr>
-                      <a:r>
-                        <a:rPr lang="en-US" sz="1100" dirty="0">
-                          <a:solidFill>
-                            <a:srgbClr val="222222"/>
-                          </a:solidFill>
-                          <a:latin typeface="Pretendard" pitchFamily="34" charset="0"/>
-                          <a:ea typeface="Pretendard" pitchFamily="34" charset="-122"/>
-                          <a:cs typeface="Pretendard" pitchFamily="34" charset="-120"/>
-                        </a:rPr>
-                        <a:t>관광주민증, 관광택시</a:t>
-                      </a:r>
-                      <a:endParaRPr lang="en-US" sz="1100" dirty="0">
-                        <a:latin typeface="Pretendard" charset="0"/>
-                        <a:ea typeface="Pretendard" charset="0"/>
-                        <a:cs typeface="Pretendard" charset="0"/>
-                      </a:endParaRPr>
-                    </a:p>
-                  </a:txBody>
-                  <a:tcPr marL="73152" marR="73152" marT="36576" marB="36576" anchor="ctr">
-                    <a:lnL w="9525" cap="flat" cmpd="sng" algn="ctr">
-                      <a:solidFill>
-                        <a:srgbClr val="D9D9D9"/>
-                      </a:solidFill>
-                      <a:prstDash val="solid"/>
-                      <a:round/>
-                      <a:headEnd type="none" w="med" len="med"/>
-                      <a:tailEnd type="none" w="med" len="med"/>
-                    </a:lnL>
-                    <a:lnR w="9525" cap="flat" cmpd="sng" algn="ctr">
-                      <a:solidFill>
-                        <a:srgbClr val="D9D9D9"/>
-                      </a:solidFill>
-                      <a:prstDash val="solid"/>
-                      <a:round/>
-                      <a:headEnd type="none" w="med" len="med"/>
-                      <a:tailEnd type="none" w="med" len="med"/>
-                    </a:lnR>
-                    <a:lnT w="9525" cap="flat" cmpd="sng" algn="ctr">
-                      <a:solidFill>
-                        <a:srgbClr val="D9D9D9"/>
-                      </a:solidFill>
-                      <a:prstDash val="solid"/>
-                      <a:round/>
-                      <a:headEnd type="none" w="med" len="med"/>
-                      <a:tailEnd type="none" w="med" len="med"/>
-                    </a:lnT>
-                    <a:lnB w="9525" cap="flat" cmpd="sng" algn="ctr">
-                      <a:solidFill>
-                        <a:srgbClr val="D9D9D9"/>
-                      </a:solidFill>
-                      <a:prstDash val="solid"/>
-                      <a:round/>
-                      <a:headEnd type="none" w="med" len="med"/>
-                      <a:tailEnd type="none" w="med" len="med"/>
-                    </a:lnB>
-                  </a:tcPr>
-                </a:tc>
-              </a:tr>
-              <a:tr h="347472">
-                <a:tc>
-                  <a:txBody>
-                    <a:bodyPr/>
-                    <a:lstStyle/>
-                    <a:p>
-                      <a:pPr indent="0" marL="0">
-                        <a:buNone/>
-                      </a:pPr>
-                      <a:r>
-                        <a:rPr lang="en-US" sz="1100" b="1" dirty="0">
-                          <a:solidFill>
-                            <a:srgbClr val="00358F"/>
-                          </a:solidFill>
-                          <a:latin typeface="Pretendard" pitchFamily="34" charset="0"/>
-                          <a:ea typeface="Pretendard" pitchFamily="34" charset="-122"/>
-                          <a:cs typeface="Pretendard" pitchFamily="34" charset="-120"/>
-                        </a:rPr>
-                        <a:t>관광</a:t>
-                      </a:r>
-                      <a:endParaRPr lang="en-US" sz="1100" dirty="0">
-                        <a:latin typeface="Pretendard" charset="0"/>
-                        <a:ea typeface="Pretendard" charset="0"/>
-                        <a:cs typeface="Pretendard" charset="0"/>
-                      </a:endParaRPr>
-                    </a:p>
-                  </a:txBody>
-                  <a:tcPr marL="73152" marR="73152" marT="36576" marB="36576" anchor="ctr">
-                    <a:lnL w="9525" cap="flat" cmpd="sng" algn="ctr">
-                      <a:solidFill>
-                        <a:srgbClr val="D9D9D9"/>
-                      </a:solidFill>
-                      <a:prstDash val="solid"/>
-                      <a:round/>
-                      <a:headEnd type="none" w="med" len="med"/>
-                      <a:tailEnd type="none" w="med" len="med"/>
-                    </a:lnL>
-                    <a:lnR w="9525" cap="flat" cmpd="sng" algn="ctr">
-                      <a:solidFill>
-                        <a:srgbClr val="D9D9D9"/>
-                      </a:solidFill>
-                      <a:prstDash val="solid"/>
-                      <a:round/>
-                      <a:headEnd type="none" w="med" len="med"/>
-                      <a:tailEnd type="none" w="med" len="med"/>
-                    </a:lnR>
-                    <a:lnT w="9525" cap="flat" cmpd="sng" algn="ctr">
-                      <a:solidFill>
-                        <a:srgbClr val="D9D9D9"/>
-                      </a:solidFill>
-                      <a:prstDash val="solid"/>
-                      <a:round/>
-                      <a:headEnd type="none" w="med" len="med"/>
-                      <a:tailEnd type="none" w="med" len="med"/>
-                    </a:lnT>
-                    <a:lnB w="9525" cap="flat" cmpd="sng" algn="ctr">
-                      <a:solidFill>
-                        <a:srgbClr val="D9D9D9"/>
-                      </a:solidFill>
-                      <a:prstDash val="solid"/>
-                      <a:round/>
-                      <a:headEnd type="none" w="med" len="med"/>
-                      <a:tailEnd type="none" w="med" len="med"/>
-                    </a:lnB>
-                    <a:solidFill>
-                      <a:srgbClr val="F5F7FB"/>
-                    </a:solidFill>
-                  </a:tcPr>
-                </a:tc>
-                <a:tc>
-                  <a:txBody>
-                    <a:bodyPr/>
-                    <a:lstStyle/>
-                    <a:p>
-                      <a:pPr indent="0" marL="0">
-                        <a:buNone/>
-                      </a:pPr>
-                      <a:r>
-                        <a:rPr lang="en-US" sz="1100" dirty="0">
-                          <a:solidFill>
-                            <a:srgbClr val="222222"/>
-                          </a:solidFill>
-                          <a:latin typeface="Pretendard" pitchFamily="34" charset="0"/>
-                          <a:ea typeface="Pretendard" pitchFamily="34" charset="-122"/>
-                          <a:cs typeface="Pretendard" pitchFamily="34" charset="-120"/>
-                        </a:rPr>
-                        <a:t>경북매일 2026.10.7(생활인구) — 원문 링크 재확인 필요</a:t>
-                      </a:r>
-                      <a:endParaRPr lang="en-US" sz="1100" dirty="0">
-                        <a:latin typeface="Pretendard" charset="0"/>
-                        <a:ea typeface="Pretendard" charset="0"/>
-                        <a:cs typeface="Pretendard" charset="0"/>
-                      </a:endParaRPr>
-                    </a:p>
-                  </a:txBody>
-                  <a:tcPr marL="73152" marR="73152" marT="36576" marB="36576" anchor="ctr">
-                    <a:lnL w="9525" cap="flat" cmpd="sng" algn="ctr">
-                      <a:solidFill>
-                        <a:srgbClr val="D9D9D9"/>
-                      </a:solidFill>
-                      <a:prstDash val="solid"/>
-                      <a:round/>
-                      <a:headEnd type="none" w="med" len="med"/>
-                      <a:tailEnd type="none" w="med" len="med"/>
-                    </a:lnL>
-                    <a:lnR w="9525" cap="flat" cmpd="sng" algn="ctr">
-                      <a:solidFill>
-                        <a:srgbClr val="D9D9D9"/>
-                      </a:solidFill>
-                      <a:prstDash val="solid"/>
-                      <a:round/>
-                      <a:headEnd type="none" w="med" len="med"/>
-                      <a:tailEnd type="none" w="med" len="med"/>
-                    </a:lnR>
-                    <a:lnT w="9525" cap="flat" cmpd="sng" algn="ctr">
-                      <a:solidFill>
-                        <a:srgbClr val="D9D9D9"/>
-                      </a:solidFill>
-                      <a:prstDash val="solid"/>
-                      <a:round/>
-                      <a:headEnd type="none" w="med" len="med"/>
-                      <a:tailEnd type="none" w="med" len="med"/>
-                    </a:lnT>
-                    <a:lnB w="9525" cap="flat" cmpd="sng" algn="ctr">
-                      <a:solidFill>
-                        <a:srgbClr val="D9D9D9"/>
-                      </a:solidFill>
-                      <a:prstDash val="solid"/>
-                      <a:round/>
-                      <a:headEnd type="none" w="med" len="med"/>
-                      <a:tailEnd type="none" w="med" len="med"/>
-                    </a:lnB>
-                  </a:tcPr>
-                </a:tc>
-                <a:tc>
-                  <a:txBody>
-                    <a:bodyPr/>
-                    <a:lstStyle/>
-                    <a:p>
-                      <a:pPr indent="0" marL="0">
-                        <a:buNone/>
-                      </a:pPr>
-                      <a:r>
-                        <a:rPr lang="en-US" sz="1100" dirty="0">
-                          <a:solidFill>
-                            <a:srgbClr val="222222"/>
-                          </a:solidFill>
-                          <a:latin typeface="Pretendard" pitchFamily="34" charset="0"/>
-                          <a:ea typeface="Pretendard" pitchFamily="34" charset="-122"/>
-                          <a:cs typeface="Pretendard" pitchFamily="34" charset="-120"/>
-                        </a:rPr>
-                        <a:t>생활인구 34.4만</a:t>
-                      </a:r>
-                      <a:endParaRPr lang="en-US" sz="1100" dirty="0">
-                        <a:latin typeface="Pretendard" charset="0"/>
-                        <a:ea typeface="Pretendard" charset="0"/>
-                        <a:cs typeface="Pretendard" charset="0"/>
-                      </a:endParaRPr>
-                    </a:p>
-                  </a:txBody>
-                  <a:tcPr marL="73152" marR="73152" marT="36576" marB="36576" anchor="ctr">
-                    <a:lnL w="9525" cap="flat" cmpd="sng" algn="ctr">
-                      <a:solidFill>
-                        <a:srgbClr val="D9D9D9"/>
-                      </a:solidFill>
-                      <a:prstDash val="solid"/>
-                      <a:round/>
-                      <a:headEnd type="none" w="med" len="med"/>
-                      <a:tailEnd type="none" w="med" len="med"/>
-                    </a:lnL>
-                    <a:lnR w="9525" cap="flat" cmpd="sng" algn="ctr">
-                      <a:solidFill>
-                        <a:srgbClr val="D9D9D9"/>
-                      </a:solidFill>
-                      <a:prstDash val="solid"/>
-                      <a:round/>
-                      <a:headEnd type="none" w="med" len="med"/>
-                      <a:tailEnd type="none" w="med" len="med"/>
-                    </a:lnR>
-                    <a:lnT w="9525" cap="flat" cmpd="sng" algn="ctr">
-                      <a:solidFill>
-                        <a:srgbClr val="D9D9D9"/>
-                      </a:solidFill>
-                      <a:prstDash val="solid"/>
-                      <a:round/>
-                      <a:headEnd type="none" w="med" len="med"/>
-                      <a:tailEnd type="none" w="med" len="med"/>
-                    </a:lnT>
-                    <a:lnB w="9525" cap="flat" cmpd="sng" algn="ctr">
-                      <a:solidFill>
-                        <a:srgbClr val="D9D9D9"/>
-                      </a:solidFill>
-                      <a:prstDash val="solid"/>
-                      <a:round/>
-                      <a:headEnd type="none" w="med" len="med"/>
-                      <a:tailEnd type="none" w="med" len="med"/>
-                    </a:lnB>
-                  </a:tcPr>
-                </a:tc>
-              </a:tr>
-              <a:tr h="347472">
-                <a:tc>
-                  <a:txBody>
-                    <a:bodyPr/>
-                    <a:lstStyle/>
-                    <a:p>
-                      <a:pPr indent="0" marL="0">
-                        <a:buNone/>
-                      </a:pPr>
-                      <a:r>
-                        <a:rPr lang="en-US" sz="1100" b="1" dirty="0">
-                          <a:solidFill>
-                            <a:srgbClr val="00358F"/>
-                          </a:solidFill>
-                          <a:latin typeface="Pretendard" pitchFamily="34" charset="0"/>
-                          <a:ea typeface="Pretendard" pitchFamily="34" charset="-122"/>
-                          <a:cs typeface="Pretendard" pitchFamily="34" charset="-120"/>
-                        </a:rPr>
-                        <a:t>교통</a:t>
-                      </a:r>
-                      <a:endParaRPr lang="en-US" sz="1100" dirty="0">
-                        <a:latin typeface="Pretendard" charset="0"/>
-                        <a:ea typeface="Pretendard" charset="0"/>
-                        <a:cs typeface="Pretendard" charset="0"/>
-                      </a:endParaRPr>
-                    </a:p>
-                  </a:txBody>
-                  <a:tcPr marL="73152" marR="73152" marT="36576" marB="36576" anchor="ctr">
-                    <a:lnL w="9525" cap="flat" cmpd="sng" algn="ctr">
-                      <a:solidFill>
-                        <a:srgbClr val="D9D9D9"/>
-                      </a:solidFill>
-                      <a:prstDash val="solid"/>
-                      <a:round/>
-                      <a:headEnd type="none" w="med" len="med"/>
-                      <a:tailEnd type="none" w="med" len="med"/>
-                    </a:lnL>
-                    <a:lnR w="9525" cap="flat" cmpd="sng" algn="ctr">
-                      <a:solidFill>
-                        <a:srgbClr val="D9D9D9"/>
-                      </a:solidFill>
-                      <a:prstDash val="solid"/>
-                      <a:round/>
-                      <a:headEnd type="none" w="med" len="med"/>
-                      <a:tailEnd type="none" w="med" len="med"/>
-                    </a:lnR>
-                    <a:lnT w="9525" cap="flat" cmpd="sng" algn="ctr">
-                      <a:solidFill>
-                        <a:srgbClr val="D9D9D9"/>
-                      </a:solidFill>
-                      <a:prstDash val="solid"/>
-                      <a:round/>
-                      <a:headEnd type="none" w="med" len="med"/>
-                      <a:tailEnd type="none" w="med" len="med"/>
-                    </a:lnT>
-                    <a:lnB w="9525" cap="flat" cmpd="sng" algn="ctr">
-                      <a:solidFill>
-                        <a:srgbClr val="D9D9D9"/>
-                      </a:solidFill>
-                      <a:prstDash val="solid"/>
-                      <a:round/>
-                      <a:headEnd type="none" w="med" len="med"/>
-                      <a:tailEnd type="none" w="med" len="med"/>
-                    </a:lnB>
-                    <a:solidFill>
-                      <a:srgbClr val="F5F7FB"/>
-                    </a:solidFill>
-                  </a:tcPr>
-                </a:tc>
-                <a:tc>
-                  <a:txBody>
-                    <a:bodyPr/>
-                    <a:lstStyle/>
-                    <a:p>
-                      <a:pPr indent="0" marL="0">
-                        <a:buNone/>
-                      </a:pPr>
-                      <a:r>
-                        <a:rPr lang="en-US" sz="1100" dirty="0">
-                          <a:solidFill>
-                            <a:srgbClr val="222222"/>
-                          </a:solidFill>
-                          <a:latin typeface="Pretendard" pitchFamily="34" charset="0"/>
-                          <a:ea typeface="Pretendard" pitchFamily="34" charset="-122"/>
-                          <a:cs typeface="Pretendard" pitchFamily="34" charset="-120"/>
-                        </a:rPr>
-                        <a:t>공공데이터포털 「청도군_버스정류장 현황」(2025.8.28), 헤럴드경제 2026.8.2, 한국관광공사 관광정보</a:t>
-                      </a:r>
-                      <a:endParaRPr lang="en-US" sz="1100" dirty="0">
-                        <a:latin typeface="Pretendard" charset="0"/>
-                        <a:ea typeface="Pretendard" charset="0"/>
-                        <a:cs typeface="Pretendard" charset="0"/>
-                      </a:endParaRPr>
-                    </a:p>
-                  </a:txBody>
-                  <a:tcPr marL="73152" marR="73152" marT="36576" marB="36576" anchor="ctr">
-                    <a:lnL w="9525" cap="flat" cmpd="sng" algn="ctr">
-                      <a:solidFill>
-                        <a:srgbClr val="D9D9D9"/>
-                      </a:solidFill>
-                      <a:prstDash val="solid"/>
-                      <a:round/>
-                      <a:headEnd type="none" w="med" len="med"/>
-                      <a:tailEnd type="none" w="med" len="med"/>
-                    </a:lnL>
-                    <a:lnR w="9525" cap="flat" cmpd="sng" algn="ctr">
-                      <a:solidFill>
-                        <a:srgbClr val="D9D9D9"/>
-                      </a:solidFill>
-                      <a:prstDash val="solid"/>
-                      <a:round/>
-                      <a:headEnd type="none" w="med" len="med"/>
-                      <a:tailEnd type="none" w="med" len="med"/>
-                    </a:lnR>
-                    <a:lnT w="9525" cap="flat" cmpd="sng" algn="ctr">
-                      <a:solidFill>
-                        <a:srgbClr val="D9D9D9"/>
-                      </a:solidFill>
-                      <a:prstDash val="solid"/>
-                      <a:round/>
-                      <a:headEnd type="none" w="med" len="med"/>
-                      <a:tailEnd type="none" w="med" len="med"/>
-                    </a:lnT>
-                    <a:lnB w="9525" cap="flat" cmpd="sng" algn="ctr">
-                      <a:solidFill>
-                        <a:srgbClr val="D9D9D9"/>
-                      </a:solidFill>
-                      <a:prstDash val="solid"/>
-                      <a:round/>
-                      <a:headEnd type="none" w="med" len="med"/>
-                      <a:tailEnd type="none" w="med" len="med"/>
-                    </a:lnB>
-                  </a:tcPr>
-                </a:tc>
-                <a:tc>
-                  <a:txBody>
-                    <a:bodyPr/>
-                    <a:lstStyle/>
-                    <a:p>
-                      <a:pPr indent="0" marL="0">
-                        <a:buNone/>
-                      </a:pPr>
-                      <a:r>
-                        <a:rPr lang="en-US" sz="1100" dirty="0">
-                          <a:solidFill>
-                            <a:srgbClr val="222222"/>
-                          </a:solidFill>
-                          <a:latin typeface="Pretendard" pitchFamily="34" charset="0"/>
-                          <a:ea typeface="Pretendard" pitchFamily="34" charset="-122"/>
-                          <a:cs typeface="Pretendard" pitchFamily="34" charset="-120"/>
-                        </a:rPr>
-                        <a:t>정류장 수, 병원까지 시간(추정), 호출 앱, 행사장</a:t>
-                      </a:r>
-                      <a:endParaRPr lang="en-US" sz="1100" dirty="0">
-                        <a:latin typeface="Pretendard" charset="0"/>
-                        <a:ea typeface="Pretendard" charset="0"/>
-                        <a:cs typeface="Pretendard" charset="0"/>
-                      </a:endParaRPr>
-                    </a:p>
-                  </a:txBody>
-                  <a:tcPr marL="73152" marR="73152" marT="36576" marB="36576" anchor="ctr">
-                    <a:lnL w="9525" cap="flat" cmpd="sng" algn="ctr">
-                      <a:solidFill>
-                        <a:srgbClr val="D9D9D9"/>
-                      </a:solidFill>
-                      <a:prstDash val="solid"/>
-                      <a:round/>
-                      <a:headEnd type="none" w="med" len="med"/>
-                      <a:tailEnd type="none" w="med" len="med"/>
-                    </a:lnL>
-                    <a:lnR w="9525" cap="flat" cmpd="sng" algn="ctr">
-                      <a:solidFill>
-                        <a:srgbClr val="D9D9D9"/>
-                      </a:solidFill>
-                      <a:prstDash val="solid"/>
-                      <a:round/>
-                      <a:headEnd type="none" w="med" len="med"/>
-                      <a:tailEnd type="none" w="med" len="med"/>
-                    </a:lnR>
-                    <a:lnT w="9525" cap="flat" cmpd="sng" algn="ctr">
-                      <a:solidFill>
-                        <a:srgbClr val="D9D9D9"/>
-                      </a:solidFill>
-                      <a:prstDash val="solid"/>
-                      <a:round/>
-                      <a:headEnd type="none" w="med" len="med"/>
-                      <a:tailEnd type="none" w="med" len="med"/>
-                    </a:lnT>
-                    <a:lnB w="9525" cap="flat" cmpd="sng" algn="ctr">
-                      <a:solidFill>
-                        <a:srgbClr val="D9D9D9"/>
-                      </a:solidFill>
-                      <a:prstDash val="solid"/>
-                      <a:round/>
-                      <a:headEnd type="none" w="med" len="med"/>
-                      <a:tailEnd type="none" w="med" len="med"/>
-                    </a:lnB>
-                  </a:tcPr>
-                </a:tc>
-              </a:tr>
-              <a:tr h="347472">
-                <a:tc>
-                  <a:txBody>
-                    <a:bodyPr/>
-                    <a:lstStyle/>
-                    <a:p>
-                      <a:pPr indent="0" marL="0">
-                        <a:buNone/>
-                      </a:pPr>
-                      <a:r>
-                        <a:rPr lang="en-US" sz="1100" b="1" dirty="0">
-                          <a:solidFill>
-                            <a:srgbClr val="00358F"/>
-                          </a:solidFill>
-                          <a:latin typeface="Pretendard" pitchFamily="34" charset="0"/>
-                          <a:ea typeface="Pretendard" pitchFamily="34" charset="-122"/>
-                          <a:cs typeface="Pretendard" pitchFamily="34" charset="-120"/>
-                        </a:rPr>
-                        <a:t>예비 1</a:t>
-                      </a:r>
-                      <a:endParaRPr lang="en-US" sz="1100" dirty="0">
-                        <a:latin typeface="Pretendard" charset="0"/>
-                        <a:ea typeface="Pretendard" charset="0"/>
-                        <a:cs typeface="Pretendard" charset="0"/>
-                      </a:endParaRPr>
-                    </a:p>
-                  </a:txBody>
-                  <a:tcPr marL="73152" marR="73152" marT="36576" marB="36576" anchor="ctr">
-                    <a:lnL w="9525" cap="flat" cmpd="sng" algn="ctr">
-                      <a:solidFill>
-                        <a:srgbClr val="D9D9D9"/>
-                      </a:solidFill>
-                      <a:prstDash val="solid"/>
-                      <a:round/>
-                      <a:headEnd type="none" w="med" len="med"/>
-                      <a:tailEnd type="none" w="med" len="med"/>
-                    </a:lnL>
-                    <a:lnR w="9525" cap="flat" cmpd="sng" algn="ctr">
-                      <a:solidFill>
-                        <a:srgbClr val="D9D9D9"/>
-                      </a:solidFill>
-                      <a:prstDash val="solid"/>
-                      <a:round/>
-                      <a:headEnd type="none" w="med" len="med"/>
-                      <a:tailEnd type="none" w="med" len="med"/>
-                    </a:lnR>
-                    <a:lnT w="9525" cap="flat" cmpd="sng" algn="ctr">
-                      <a:solidFill>
-                        <a:srgbClr val="D9D9D9"/>
-                      </a:solidFill>
-                      <a:prstDash val="solid"/>
-                      <a:round/>
-                      <a:headEnd type="none" w="med" len="med"/>
-                      <a:tailEnd type="none" w="med" len="med"/>
-                    </a:lnT>
-                    <a:lnB w="9525" cap="flat" cmpd="sng" algn="ctr">
-                      <a:solidFill>
-                        <a:srgbClr val="D9D9D9"/>
-                      </a:solidFill>
-                      <a:prstDash val="solid"/>
-                      <a:round/>
-                      <a:headEnd type="none" w="med" len="med"/>
-                      <a:tailEnd type="none" w="med" len="med"/>
-                    </a:lnB>
-                    <a:solidFill>
-                      <a:srgbClr val="F5F7FB"/>
-                    </a:solidFill>
-                  </a:tcPr>
-                </a:tc>
-                <a:tc>
-                  <a:txBody>
-                    <a:bodyPr/>
-                    <a:lstStyle/>
-                    <a:p>
-                      <a:pPr indent="0" marL="0">
-                        <a:buNone/>
-                      </a:pPr>
-                      <a:r>
-                        <a:rPr lang="en-US" sz="1100" dirty="0">
-                          <a:solidFill>
-                            <a:srgbClr val="222222"/>
-                          </a:solidFill>
-                          <a:latin typeface="Pretendard" pitchFamily="34" charset="0"/>
-                          <a:ea typeface="Pretendard" pitchFamily="34" charset="-122"/>
-                          <a:cs typeface="Pretendard" pitchFamily="34" charset="-120"/>
-                        </a:rPr>
-                        <a:t>행정안전부 외국인주민 현황(청도군, 2026.9 집계), 매일신문 2026.10.8, 경북매일 2026.10.1</a:t>
-                      </a:r>
-                      <a:endParaRPr lang="en-US" sz="1100" dirty="0">
-                        <a:latin typeface="Pretendard" charset="0"/>
-                        <a:ea typeface="Pretendard" charset="0"/>
-                        <a:cs typeface="Pretendard" charset="0"/>
-                      </a:endParaRPr>
-                    </a:p>
-                  </a:txBody>
-                  <a:tcPr marL="73152" marR="73152" marT="36576" marB="36576" anchor="ctr">
-                    <a:lnL w="9525" cap="flat" cmpd="sng" algn="ctr">
-                      <a:solidFill>
-                        <a:srgbClr val="D9D9D9"/>
-                      </a:solidFill>
-                      <a:prstDash val="solid"/>
-                      <a:round/>
-                      <a:headEnd type="none" w="med" len="med"/>
-                      <a:tailEnd type="none" w="med" len="med"/>
-                    </a:lnL>
-                    <a:lnR w="9525" cap="flat" cmpd="sng" algn="ctr">
-                      <a:solidFill>
-                        <a:srgbClr val="D9D9D9"/>
-                      </a:solidFill>
-                      <a:prstDash val="solid"/>
-                      <a:round/>
-                      <a:headEnd type="none" w="med" len="med"/>
-                      <a:tailEnd type="none" w="med" len="med"/>
-                    </a:lnR>
-                    <a:lnT w="9525" cap="flat" cmpd="sng" algn="ctr">
-                      <a:solidFill>
-                        <a:srgbClr val="D9D9D9"/>
-                      </a:solidFill>
-                      <a:prstDash val="solid"/>
-                      <a:round/>
-                      <a:headEnd type="none" w="med" len="med"/>
-                      <a:tailEnd type="none" w="med" len="med"/>
-                    </a:lnT>
-                    <a:lnB w="9525" cap="flat" cmpd="sng" algn="ctr">
-                      <a:solidFill>
-                        <a:srgbClr val="D9D9D9"/>
-                      </a:solidFill>
-                      <a:prstDash val="solid"/>
-                      <a:round/>
-                      <a:headEnd type="none" w="med" len="med"/>
-                      <a:tailEnd type="none" w="med" len="med"/>
-                    </a:lnB>
-                  </a:tcPr>
-                </a:tc>
-                <a:tc>
-                  <a:txBody>
-                    <a:bodyPr/>
-                    <a:lstStyle/>
-                    <a:p>
-                      <a:pPr indent="0" marL="0">
-                        <a:buNone/>
-                      </a:pPr>
-                      <a:r>
-                        <a:rPr lang="en-US" sz="1100" dirty="0">
-                          <a:solidFill>
-                            <a:srgbClr val="222222"/>
-                          </a:solidFill>
-                          <a:latin typeface="Pretendard" pitchFamily="34" charset="0"/>
-                          <a:ea typeface="Pretendard" pitchFamily="34" charset="-122"/>
-                          <a:cs typeface="Pretendard" pitchFamily="34" charset="-120"/>
-                        </a:rPr>
-                        <a:t>외국인 주민·근로자, 계절근로자</a:t>
-                      </a:r>
-                      <a:endParaRPr lang="en-US" sz="1100" dirty="0">
-                        <a:latin typeface="Pretendard" charset="0"/>
-                        <a:ea typeface="Pretendard" charset="0"/>
-                        <a:cs typeface="Pretendard" charset="0"/>
-                      </a:endParaRPr>
-                    </a:p>
-                  </a:txBody>
-                  <a:tcPr marL="73152" marR="73152" marT="36576" marB="36576" anchor="ctr">
-                    <a:lnL w="9525" cap="flat" cmpd="sng" algn="ctr">
-                      <a:solidFill>
-                        <a:srgbClr val="D9D9D9"/>
-                      </a:solidFill>
-                      <a:prstDash val="solid"/>
-                      <a:round/>
-                      <a:headEnd type="none" w="med" len="med"/>
-                      <a:tailEnd type="none" w="med" len="med"/>
-                    </a:lnL>
-                    <a:lnR w="9525" cap="flat" cmpd="sng" algn="ctr">
-                      <a:solidFill>
-                        <a:srgbClr val="D9D9D9"/>
-                      </a:solidFill>
-                      <a:prstDash val="solid"/>
-                      <a:round/>
-                      <a:headEnd type="none" w="med" len="med"/>
-                      <a:tailEnd type="none" w="med" len="med"/>
-                    </a:lnR>
-                    <a:lnT w="9525" cap="flat" cmpd="sng" algn="ctr">
-                      <a:solidFill>
-                        <a:srgbClr val="D9D9D9"/>
-                      </a:solidFill>
-                      <a:prstDash val="solid"/>
-                      <a:round/>
-                      <a:headEnd type="none" w="med" len="med"/>
-                      <a:tailEnd type="none" w="med" len="med"/>
-                    </a:lnT>
-                    <a:lnB w="9525" cap="flat" cmpd="sng" algn="ctr">
-                      <a:solidFill>
-                        <a:srgbClr val="D9D9D9"/>
-                      </a:solidFill>
-                      <a:prstDash val="solid"/>
-                      <a:round/>
-                      <a:headEnd type="none" w="med" len="med"/>
-                      <a:tailEnd type="none" w="med" len="med"/>
-                    </a:lnB>
-                  </a:tcPr>
-                </a:tc>
-              </a:tr>
-              <a:tr h="347472">
-                <a:tc>
-                  <a:txBody>
-                    <a:bodyPr/>
-                    <a:lstStyle/>
-                    <a:p>
-                      <a:pPr indent="0" marL="0">
-                        <a:buNone/>
-                      </a:pPr>
-                      <a:r>
-                        <a:rPr lang="en-US" sz="1100" b="1" dirty="0">
-                          <a:solidFill>
-                            <a:srgbClr val="00358F"/>
-                          </a:solidFill>
-                          <a:latin typeface="Pretendard" pitchFamily="34" charset="0"/>
-                          <a:ea typeface="Pretendard" pitchFamily="34" charset="-122"/>
-                          <a:cs typeface="Pretendard" pitchFamily="34" charset="-120"/>
-                        </a:rPr>
-                        <a:t>예비 2</a:t>
-                      </a:r>
-                      <a:endParaRPr lang="en-US" sz="1100" dirty="0">
-                        <a:latin typeface="Pretendard" charset="0"/>
-                        <a:ea typeface="Pretendard" charset="0"/>
-                        <a:cs typeface="Pretendard" charset="0"/>
-                      </a:endParaRPr>
-                    </a:p>
-                  </a:txBody>
-                  <a:tcPr marL="73152" marR="73152" marT="36576" marB="36576" anchor="ctr">
-                    <a:lnL w="9525" cap="flat" cmpd="sng" algn="ctr">
-                      <a:solidFill>
-                        <a:srgbClr val="D9D9D9"/>
-                      </a:solidFill>
-                      <a:prstDash val="solid"/>
-                      <a:round/>
-                      <a:headEnd type="none" w="med" len="med"/>
-                      <a:tailEnd type="none" w="med" len="med"/>
-                    </a:lnL>
-                    <a:lnR w="9525" cap="flat" cmpd="sng" algn="ctr">
-                      <a:solidFill>
-                        <a:srgbClr val="D9D9D9"/>
-                      </a:solidFill>
-                      <a:prstDash val="solid"/>
-                      <a:round/>
-                      <a:headEnd type="none" w="med" len="med"/>
-                      <a:tailEnd type="none" w="med" len="med"/>
-                    </a:lnR>
-                    <a:lnT w="9525" cap="flat" cmpd="sng" algn="ctr">
-                      <a:solidFill>
-                        <a:srgbClr val="D9D9D9"/>
-                      </a:solidFill>
-                      <a:prstDash val="solid"/>
-                      <a:round/>
-                      <a:headEnd type="none" w="med" len="med"/>
-                      <a:tailEnd type="none" w="med" len="med"/>
-                    </a:lnT>
-                    <a:lnB w="9525" cap="flat" cmpd="sng" algn="ctr">
-                      <a:solidFill>
-                        <a:srgbClr val="D9D9D9"/>
-                      </a:solidFill>
-                      <a:prstDash val="solid"/>
-                      <a:round/>
-                      <a:headEnd type="none" w="med" len="med"/>
-                      <a:tailEnd type="none" w="med" len="med"/>
-                    </a:lnB>
-                    <a:solidFill>
-                      <a:srgbClr val="F5F7FB"/>
-                    </a:solidFill>
-                  </a:tcPr>
-                </a:tc>
-                <a:tc>
-                  <a:txBody>
-                    <a:bodyPr/>
-                    <a:lstStyle/>
-                    <a:p>
-                      <a:pPr indent="0" marL="0">
-                        <a:buNone/>
-                      </a:pPr>
-                      <a:r>
-                        <a:rPr lang="en-US" sz="1100" dirty="0">
-                          <a:solidFill>
-                            <a:srgbClr val="222222"/>
-                          </a:solidFill>
-                          <a:latin typeface="Pretendard" pitchFamily="34" charset="0"/>
-                          <a:ea typeface="Pretendard" pitchFamily="34" charset="-122"/>
-                          <a:cs typeface="Pretendard" pitchFamily="34" charset="-120"/>
-                        </a:rPr>
-                        <a:t>경북매일 2025.5.6(경로당), 아주경제 2026.8.4(양양 택배), 강원일보 2025.9.22(홍천)</a:t>
-                      </a:r>
-                      <a:endParaRPr lang="en-US" sz="1100" dirty="0">
-                        <a:latin typeface="Pretendard" charset="0"/>
-                        <a:ea typeface="Pretendard" charset="0"/>
-                        <a:cs typeface="Pretendard" charset="0"/>
-                      </a:endParaRPr>
-                    </a:p>
-                  </a:txBody>
-                  <a:tcPr marL="73152" marR="73152" marT="36576" marB="36576" anchor="ctr">
-                    <a:lnL w="9525" cap="flat" cmpd="sng" algn="ctr">
-                      <a:solidFill>
-                        <a:srgbClr val="D9D9D9"/>
-                      </a:solidFill>
-                      <a:prstDash val="solid"/>
-                      <a:round/>
-                      <a:headEnd type="none" w="med" len="med"/>
-                      <a:tailEnd type="none" w="med" len="med"/>
-                    </a:lnL>
-                    <a:lnR w="9525" cap="flat" cmpd="sng" algn="ctr">
-                      <a:solidFill>
-                        <a:srgbClr val="D9D9D9"/>
-                      </a:solidFill>
-                      <a:prstDash val="solid"/>
-                      <a:round/>
-                      <a:headEnd type="none" w="med" len="med"/>
-                      <a:tailEnd type="none" w="med" len="med"/>
-                    </a:lnR>
-                    <a:lnT w="9525" cap="flat" cmpd="sng" algn="ctr">
-                      <a:solidFill>
-                        <a:srgbClr val="D9D9D9"/>
-                      </a:solidFill>
-                      <a:prstDash val="solid"/>
-                      <a:round/>
-                      <a:headEnd type="none" w="med" len="med"/>
-                      <a:tailEnd type="none" w="med" len="med"/>
-                    </a:lnT>
-                    <a:lnB w="9525" cap="flat" cmpd="sng" algn="ctr">
-                      <a:solidFill>
-                        <a:srgbClr val="D9D9D9"/>
-                      </a:solidFill>
-                      <a:prstDash val="solid"/>
-                      <a:round/>
-                      <a:headEnd type="none" w="med" len="med"/>
-                      <a:tailEnd type="none" w="med" len="med"/>
-                    </a:lnB>
-                  </a:tcPr>
-                </a:tc>
-                <a:tc>
-                  <a:txBody>
-                    <a:bodyPr/>
-                    <a:lstStyle/>
-                    <a:p>
-                      <a:pPr indent="0" marL="0">
-                        <a:buNone/>
-                      </a:pPr>
-                      <a:r>
-                        <a:rPr lang="en-US" sz="1100" dirty="0">
-                          <a:solidFill>
-                            <a:srgbClr val="222222"/>
-                          </a:solidFill>
-                          <a:latin typeface="Pretendard" pitchFamily="34" charset="0"/>
-                          <a:ea typeface="Pretendard" pitchFamily="34" charset="-122"/>
-                          <a:cs typeface="Pretendard" pitchFamily="34" charset="-120"/>
-                        </a:rPr>
-                        <a:t>경로당 319곳, 산간 택배 사례</a:t>
-                      </a:r>
-                      <a:endParaRPr lang="en-US" sz="1100" dirty="0">
-                        <a:latin typeface="Pretendard" charset="0"/>
-                        <a:ea typeface="Pretendard" charset="0"/>
-                        <a:cs typeface="Pretendard" charset="0"/>
-                      </a:endParaRPr>
-                    </a:p>
-                  </a:txBody>
-                  <a:tcPr marL="73152" marR="73152" marT="36576" marB="36576" anchor="ctr">
-                    <a:lnL w="9525" cap="flat" cmpd="sng" algn="ctr">
-                      <a:solidFill>
-                        <a:srgbClr val="D9D9D9"/>
-                      </a:solidFill>
-                      <a:prstDash val="solid"/>
-                      <a:round/>
-                      <a:headEnd type="none" w="med" len="med"/>
-                      <a:tailEnd type="none" w="med" len="med"/>
-                    </a:lnL>
-                    <a:lnR w="9525" cap="flat" cmpd="sng" algn="ctr">
-                      <a:solidFill>
-                        <a:srgbClr val="D9D9D9"/>
-                      </a:solidFill>
-                      <a:prstDash val="solid"/>
-                      <a:round/>
-                      <a:headEnd type="none" w="med" len="med"/>
-                      <a:tailEnd type="none" w="med" len="med"/>
-                    </a:lnR>
-                    <a:lnT w="9525" cap="flat" cmpd="sng" algn="ctr">
-                      <a:solidFill>
-                        <a:srgbClr val="D9D9D9"/>
-                      </a:solidFill>
-                      <a:prstDash val="solid"/>
-                      <a:round/>
-                      <a:headEnd type="none" w="med" len="med"/>
-                      <a:tailEnd type="none" w="med" len="med"/>
-                    </a:lnT>
-                    <a:lnB w="9525" cap="flat" cmpd="sng" algn="ctr">
-                      <a:solidFill>
-                        <a:srgbClr val="D9D9D9"/>
-                      </a:solidFill>
-                      <a:prstDash val="solid"/>
-                      <a:round/>
-                      <a:headEnd type="none" w="med" len="med"/>
-                      <a:tailEnd type="none" w="med" len="med"/>
-                    </a:lnB>
-                  </a:tcPr>
-                </a:tc>
-              </a:tr>
-              <a:tr h="347472">
-                <a:tc>
-                  <a:txBody>
-                    <a:bodyPr/>
-                    <a:lstStyle/>
-                    <a:p>
-                      <a:pPr indent="0" marL="0">
-                        <a:buNone/>
-                      </a:pPr>
-                      <a:r>
-                        <a:rPr lang="en-US" sz="1100" b="1" dirty="0">
-                          <a:solidFill>
-                            <a:srgbClr val="00358F"/>
-                          </a:solidFill>
-                          <a:latin typeface="Pretendard" pitchFamily="34" charset="0"/>
-                          <a:ea typeface="Pretendard" pitchFamily="34" charset="-122"/>
-                          <a:cs typeface="Pretendard" pitchFamily="34" charset="-120"/>
-                        </a:rPr>
-                        <a:t>예비 3~6</a:t>
-                      </a:r>
-                      <a:endParaRPr lang="en-US" sz="1100" dirty="0">
-                        <a:latin typeface="Pretendard" charset="0"/>
-                        <a:ea typeface="Pretendard" charset="0"/>
-                        <a:cs typeface="Pretendard" charset="0"/>
-                      </a:endParaRPr>
-                    </a:p>
-                  </a:txBody>
-                  <a:tcPr marL="73152" marR="73152" marT="36576" marB="36576" anchor="ctr">
-                    <a:lnL w="9525" cap="flat" cmpd="sng" algn="ctr">
-                      <a:solidFill>
-                        <a:srgbClr val="D9D9D9"/>
-                      </a:solidFill>
-                      <a:prstDash val="solid"/>
-                      <a:round/>
-                      <a:headEnd type="none" w="med" len="med"/>
-                      <a:tailEnd type="none" w="med" len="med"/>
-                    </a:lnL>
-                    <a:lnR w="9525" cap="flat" cmpd="sng" algn="ctr">
-                      <a:solidFill>
-                        <a:srgbClr val="D9D9D9"/>
-                      </a:solidFill>
-                      <a:prstDash val="solid"/>
-                      <a:round/>
-                      <a:headEnd type="none" w="med" len="med"/>
-                      <a:tailEnd type="none" w="med" len="med"/>
-                    </a:lnR>
-                    <a:lnT w="9525" cap="flat" cmpd="sng" algn="ctr">
-                      <a:solidFill>
-                        <a:srgbClr val="D9D9D9"/>
-                      </a:solidFill>
-                      <a:prstDash val="solid"/>
-                      <a:round/>
-                      <a:headEnd type="none" w="med" len="med"/>
-                      <a:tailEnd type="none" w="med" len="med"/>
-                    </a:lnT>
-                    <a:lnB w="9525" cap="flat" cmpd="sng" algn="ctr">
-                      <a:solidFill>
-                        <a:srgbClr val="D9D9D9"/>
-                      </a:solidFill>
-                      <a:prstDash val="solid"/>
-                      <a:round/>
-                      <a:headEnd type="none" w="med" len="med"/>
-                      <a:tailEnd type="none" w="med" len="med"/>
-                    </a:lnB>
-                    <a:solidFill>
-                      <a:srgbClr val="F5F7FB"/>
-                    </a:solidFill>
-                  </a:tcPr>
-                </a:tc>
-                <a:tc>
-                  <a:txBody>
-                    <a:bodyPr/>
-                    <a:lstStyle/>
-                    <a:p>
-                      <a:pPr indent="0" marL="0">
-                        <a:buNone/>
-                      </a:pPr>
-                      <a:r>
-                        <a:rPr lang="en-US" sz="1100" dirty="0">
-                          <a:solidFill>
-                            <a:srgbClr val="222222"/>
-                          </a:solidFill>
-                          <a:latin typeface="Pretendard" pitchFamily="34" charset="0"/>
-                          <a:ea typeface="Pretendard" pitchFamily="34" charset="-122"/>
-                          <a:cs typeface="Pretendard" pitchFamily="34" charset="-120"/>
-                        </a:rPr>
-                        <a:t>한국관광공사 여행코스(와인터널), 뉴스서울 2024.7.17(농기계), 경북매일 2026.10.20(금천고)</a:t>
-                      </a:r>
-                      <a:endParaRPr lang="en-US" sz="1100" dirty="0">
-                        <a:latin typeface="Pretendard" charset="0"/>
-                        <a:ea typeface="Pretendard" charset="0"/>
-                        <a:cs typeface="Pretendard" charset="0"/>
-                      </a:endParaRPr>
-                    </a:p>
-                  </a:txBody>
-                  <a:tcPr marL="73152" marR="73152" marT="36576" marB="36576" anchor="ctr">
-                    <a:lnL w="9525" cap="flat" cmpd="sng" algn="ctr">
-                      <a:solidFill>
-                        <a:srgbClr val="D9D9D9"/>
-                      </a:solidFill>
-                      <a:prstDash val="solid"/>
-                      <a:round/>
-                      <a:headEnd type="none" w="med" len="med"/>
-                      <a:tailEnd type="none" w="med" len="med"/>
-                    </a:lnL>
-                    <a:lnR w="9525" cap="flat" cmpd="sng" algn="ctr">
-                      <a:solidFill>
-                        <a:srgbClr val="D9D9D9"/>
-                      </a:solidFill>
-                      <a:prstDash val="solid"/>
-                      <a:round/>
-                      <a:headEnd type="none" w="med" len="med"/>
-                      <a:tailEnd type="none" w="med" len="med"/>
-                    </a:lnR>
-                    <a:lnT w="9525" cap="flat" cmpd="sng" algn="ctr">
-                      <a:solidFill>
-                        <a:srgbClr val="D9D9D9"/>
-                      </a:solidFill>
-                      <a:prstDash val="solid"/>
-                      <a:round/>
-                      <a:headEnd type="none" w="med" len="med"/>
-                      <a:tailEnd type="none" w="med" len="med"/>
-                    </a:lnT>
-                    <a:lnB w="9525" cap="flat" cmpd="sng" algn="ctr">
-                      <a:solidFill>
-                        <a:srgbClr val="D9D9D9"/>
-                      </a:solidFill>
-                      <a:prstDash val="solid"/>
-                      <a:round/>
-                      <a:headEnd type="none" w="med" len="med"/>
-                      <a:tailEnd type="none" w="med" len="med"/>
-                    </a:lnB>
-                  </a:tcPr>
-                </a:tc>
-                <a:tc>
-                  <a:txBody>
-                    <a:bodyPr/>
-                    <a:lstStyle/>
-                    <a:p>
-                      <a:pPr indent="0" marL="0">
-                        <a:buNone/>
-                      </a:pPr>
-                      <a:r>
-                        <a:rPr lang="en-US" sz="1100" dirty="0">
-                          <a:solidFill>
-                            <a:srgbClr val="222222"/>
-                          </a:solidFill>
-                          <a:latin typeface="Pretendard" pitchFamily="34" charset="0"/>
-                          <a:ea typeface="Pretendard" pitchFamily="34" charset="-122"/>
-                          <a:cs typeface="Pretendard" pitchFamily="34" charset="-120"/>
-                        </a:rPr>
-                        <a:t>터널 규모, 임대 실적, 폐교</a:t>
-                      </a:r>
-                      <a:endParaRPr lang="en-US" sz="1100" dirty="0">
-                        <a:latin typeface="Pretendard" charset="0"/>
-                        <a:ea typeface="Pretendard" charset="0"/>
-                        <a:cs typeface="Pretendard" charset="0"/>
-                      </a:endParaRPr>
-                    </a:p>
-                  </a:txBody>
-                  <a:tcPr marL="73152" marR="73152" marT="36576" marB="36576" anchor="ctr">
-                    <a:lnL w="9525" cap="flat" cmpd="sng" algn="ctr">
-                      <a:solidFill>
-                        <a:srgbClr val="D9D9D9"/>
-                      </a:solidFill>
-                      <a:prstDash val="solid"/>
-                      <a:round/>
-                      <a:headEnd type="none" w="med" len="med"/>
-                      <a:tailEnd type="none" w="med" len="med"/>
-                    </a:lnL>
-                    <a:lnR w="9525" cap="flat" cmpd="sng" algn="ctr">
-                      <a:solidFill>
-                        <a:srgbClr val="D9D9D9"/>
-                      </a:solidFill>
-                      <a:prstDash val="solid"/>
-                      <a:round/>
-                      <a:headEnd type="none" w="med" len="med"/>
-                      <a:tailEnd type="none" w="med" len="med"/>
-                    </a:lnR>
-                    <a:lnT w="9525" cap="flat" cmpd="sng" algn="ctr">
-                      <a:solidFill>
-                        <a:srgbClr val="D9D9D9"/>
-                      </a:solidFill>
-                      <a:prstDash val="solid"/>
-                      <a:round/>
-                      <a:headEnd type="none" w="med" len="med"/>
-                      <a:tailEnd type="none" w="med" len="med"/>
-                    </a:lnT>
-                    <a:lnB w="9525" cap="flat" cmpd="sng" algn="ctr">
-                      <a:solidFill>
-                        <a:srgbClr val="D9D9D9"/>
-                      </a:solidFill>
-                      <a:prstDash val="solid"/>
-                      <a:round/>
-                      <a:headEnd type="none" w="med" len="med"/>
-                      <a:tailEnd type="none" w="med" len="med"/>
-                    </a:lnB>
-                  </a:tcPr>
-                </a:tc>
-              </a:tr>
-              <a:tr h="347472">
-                <a:tc>
-                  <a:txBody>
-                    <a:bodyPr/>
-                    <a:lstStyle/>
-                    <a:p>
-                      <a:pPr indent="0" marL="0">
-                        <a:buNone/>
-                      </a:pPr>
-                      <a:r>
-                        <a:rPr lang="en-US" sz="1100" b="1" dirty="0">
-                          <a:solidFill>
-                            <a:srgbClr val="00358F"/>
-                          </a:solidFill>
-                          <a:latin typeface="Pretendard" pitchFamily="34" charset="0"/>
-                          <a:ea typeface="Pretendard" pitchFamily="34" charset="-122"/>
-                          <a:cs typeface="Pretendard" pitchFamily="34" charset="-120"/>
-                        </a:rPr>
-                        <a:t>버스</a:t>
-                      </a:r>
-                      <a:endParaRPr lang="en-US" sz="1100" dirty="0">
-                        <a:latin typeface="Pretendard" charset="0"/>
-                        <a:ea typeface="Pretendard" charset="0"/>
-                        <a:cs typeface="Pretendard" charset="0"/>
-                      </a:endParaRPr>
-                    </a:p>
-                  </a:txBody>
-                  <a:tcPr marL="73152" marR="73152" marT="36576" marB="36576" anchor="ctr">
-                    <a:lnL w="9525" cap="flat" cmpd="sng" algn="ctr">
-                      <a:solidFill>
-                        <a:srgbClr val="D9D9D9"/>
-                      </a:solidFill>
-                      <a:prstDash val="solid"/>
-                      <a:round/>
-                      <a:headEnd type="none" w="med" len="med"/>
-                      <a:tailEnd type="none" w="med" len="med"/>
-                    </a:lnL>
-                    <a:lnR w="9525" cap="flat" cmpd="sng" algn="ctr">
-                      <a:solidFill>
-                        <a:srgbClr val="D9D9D9"/>
-                      </a:solidFill>
-                      <a:prstDash val="solid"/>
-                      <a:round/>
-                      <a:headEnd type="none" w="med" len="med"/>
-                      <a:tailEnd type="none" w="med" len="med"/>
-                    </a:lnR>
-                    <a:lnT w="9525" cap="flat" cmpd="sng" algn="ctr">
-                      <a:solidFill>
-                        <a:srgbClr val="D9D9D9"/>
-                      </a:solidFill>
-                      <a:prstDash val="solid"/>
-                      <a:round/>
-                      <a:headEnd type="none" w="med" len="med"/>
-                      <a:tailEnd type="none" w="med" len="med"/>
-                    </a:lnT>
-                    <a:lnB w="9525" cap="flat" cmpd="sng" algn="ctr">
-                      <a:solidFill>
-                        <a:srgbClr val="D9D9D9"/>
-                      </a:solidFill>
-                      <a:prstDash val="solid"/>
-                      <a:round/>
-                      <a:headEnd type="none" w="med" len="med"/>
-                      <a:tailEnd type="none" w="med" len="med"/>
-                    </a:lnB>
-                    <a:solidFill>
-                      <a:srgbClr val="F5F7FB"/>
-                    </a:solidFill>
-                  </a:tcPr>
-                </a:tc>
-                <a:tc>
-                  <a:txBody>
-                    <a:bodyPr/>
-                    <a:lstStyle/>
-                    <a:p>
-                      <a:pPr indent="0" marL="0">
-                        <a:buNone/>
-                      </a:pPr>
-                      <a:r>
-                        <a:rPr lang="en-US" sz="1100" dirty="0">
-                          <a:solidFill>
-                            <a:srgbClr val="222222"/>
-                          </a:solidFill>
-                          <a:latin typeface="Pretendard" pitchFamily="34" charset="0"/>
-                          <a:ea typeface="Pretendard" pitchFamily="34" charset="-122"/>
-                          <a:cs typeface="Pretendard" pitchFamily="34" charset="-120"/>
-                        </a:rPr>
-                        <a:t>나무위키 청도 버스 1·7번(2016.5), 주간경향 2026.4.27(국토부 현황조사 2022·농림어업총조사 2020)</a:t>
-                      </a:r>
-                      <a:endParaRPr lang="en-US" sz="1100" dirty="0">
-                        <a:latin typeface="Pretendard" charset="0"/>
-                        <a:ea typeface="Pretendard" charset="0"/>
-                        <a:cs typeface="Pretendard" charset="0"/>
-                      </a:endParaRPr>
-                    </a:p>
-                  </a:txBody>
-                  <a:tcPr marL="73152" marR="73152" marT="36576" marB="36576" anchor="ctr">
-                    <a:lnL w="9525" cap="flat" cmpd="sng" algn="ctr">
-                      <a:solidFill>
-                        <a:srgbClr val="D9D9D9"/>
-                      </a:solidFill>
-                      <a:prstDash val="solid"/>
-                      <a:round/>
-                      <a:headEnd type="none" w="med" len="med"/>
-                      <a:tailEnd type="none" w="med" len="med"/>
-                    </a:lnL>
-                    <a:lnR w="9525" cap="flat" cmpd="sng" algn="ctr">
-                      <a:solidFill>
-                        <a:srgbClr val="D9D9D9"/>
-                      </a:solidFill>
-                      <a:prstDash val="solid"/>
-                      <a:round/>
-                      <a:headEnd type="none" w="med" len="med"/>
-                      <a:tailEnd type="none" w="med" len="med"/>
-                    </a:lnR>
-                    <a:lnT w="9525" cap="flat" cmpd="sng" algn="ctr">
-                      <a:solidFill>
-                        <a:srgbClr val="D9D9D9"/>
-                      </a:solidFill>
-                      <a:prstDash val="solid"/>
-                      <a:round/>
-                      <a:headEnd type="none" w="med" len="med"/>
-                      <a:tailEnd type="none" w="med" len="med"/>
-                    </a:lnT>
-                    <a:lnB w="9525" cap="flat" cmpd="sng" algn="ctr">
-                      <a:solidFill>
-                        <a:srgbClr val="D9D9D9"/>
-                      </a:solidFill>
-                      <a:prstDash val="solid"/>
-                      <a:round/>
-                      <a:headEnd type="none" w="med" len="med"/>
-                      <a:tailEnd type="none" w="med" len="med"/>
-                    </a:lnB>
-                  </a:tcPr>
-                </a:tc>
-                <a:tc>
-                  <a:txBody>
-                    <a:bodyPr/>
-                    <a:lstStyle/>
-                    <a:p>
-                      <a:pPr indent="0" marL="0">
-                        <a:buNone/>
-                      </a:pPr>
-                      <a:r>
-                        <a:rPr lang="en-US" sz="1100" dirty="0">
-                          <a:solidFill>
-                            <a:srgbClr val="222222"/>
-                          </a:solidFill>
-                          <a:latin typeface="Pretendard" pitchFamily="34" charset="0"/>
-                          <a:ea typeface="Pretendard" pitchFamily="34" charset="-122"/>
-                          <a:cs typeface="Pretendard" pitchFamily="34" charset="-120"/>
-                        </a:rPr>
-                        <a:t>노선별 운행 횟수, 경북 배차간격</a:t>
-                      </a:r>
-                      <a:endParaRPr lang="en-US" sz="1100" dirty="0">
-                        <a:latin typeface="Pretendard" charset="0"/>
-                        <a:ea typeface="Pretendard" charset="0"/>
-                        <a:cs typeface="Pretendard" charset="0"/>
-                      </a:endParaRPr>
-                    </a:p>
-                  </a:txBody>
-                  <a:tcPr marL="73152" marR="73152" marT="36576" marB="36576" anchor="ctr">
-                    <a:lnL w="9525" cap="flat" cmpd="sng" algn="ctr">
-                      <a:solidFill>
-                        <a:srgbClr val="D9D9D9"/>
-                      </a:solidFill>
-                      <a:prstDash val="solid"/>
-                      <a:round/>
-                      <a:headEnd type="none" w="med" len="med"/>
-                      <a:tailEnd type="none" w="med" len="med"/>
-                    </a:lnL>
-                    <a:lnR w="9525" cap="flat" cmpd="sng" algn="ctr">
-                      <a:solidFill>
-                        <a:srgbClr val="D9D9D9"/>
-                      </a:solidFill>
-                      <a:prstDash val="solid"/>
-                      <a:round/>
-                      <a:headEnd type="none" w="med" len="med"/>
-                      <a:tailEnd type="none" w="med" len="med"/>
-                    </a:lnR>
-                    <a:lnT w="9525" cap="flat" cmpd="sng" algn="ctr">
-                      <a:solidFill>
-                        <a:srgbClr val="D9D9D9"/>
-                      </a:solidFill>
-                      <a:prstDash val="solid"/>
-                      <a:round/>
-                      <a:headEnd type="none" w="med" len="med"/>
-                      <a:tailEnd type="none" w="med" len="med"/>
-                    </a:lnT>
-                    <a:lnB w="9525" cap="flat" cmpd="sng" algn="ctr">
-                      <a:solidFill>
-                        <a:srgbClr val="D9D9D9"/>
-                      </a:solidFill>
-                      <a:prstDash val="solid"/>
-                      <a:round/>
-                      <a:headEnd type="none" w="med" len="med"/>
-                      <a:tailEnd type="none" w="med" len="med"/>
-                    </a:lnB>
                   </a:tcPr>
                 </a:tc>
               </a:tr>
@@ -30634,6 +29866,3165 @@
 <file path=ppt/slides/slide23.xml><?xml version="1.0" encoding="utf-8"?>
 <p:sld xmlns:a="http://schemas.openxmlformats.org/drawingml/2006/main" xmlns:r="http://schemas.openxmlformats.org/officeDocument/2006/relationships" xmlns:p="http://schemas.openxmlformats.org/presentationml/2006/main">
   <p:cSld name="Slide 23">
+    <p:spTree>
+      <p:nvGrpSpPr>
+        <p:cNvPr id="1" name=""/>
+        <p:cNvGrpSpPr/>
+        <p:nvPr/>
+      </p:nvGrpSpPr>
+      <p:grpSpPr>
+        <a:xfrm>
+          <a:off x="0" y="0"/>
+          <a:ext cx="0" cy="0"/>
+          <a:chOff x="0" y="0"/>
+          <a:chExt cx="0" cy="0"/>
+        </a:xfrm>
+      </p:grpSpPr>
+      <p:sp>
+        <p:nvSpPr>
+          <p:cNvPr id="2" name="Text 4"/>
+          <p:cNvSpPr/>
+          <p:nvPr>
+            <p:ph idx="104" type="title" hasCustomPrompt="1"/>
+          </p:nvPr>
+        </p:nvSpPr>
+        <p:spPr>
+          <a:xfrm>
+            <a:off x="457200" y="274320"/>
+            <a:ext cx="11274552" cy="566928"/>
+          </a:xfrm>
+          <a:prstGeom prst="rect">
+            <a:avLst/>
+          </a:prstGeom>
+          <a:noFill/>
+          <a:ln/>
+        </p:spPr>
+        <p:txBody>
+          <a:bodyPr wrap="square" lIns="0" tIns="0" rIns="0" bIns="0" rtlCol="0" anchor="ctr"/>
+          <a:lstStyle/>
+          <a:p>
+            <a:pPr algn="l" indent="0" marL="0">
+              <a:buNone/>
+            </a:pPr>
+            <a:r>
+              <a:rPr lang="en-US" sz="2400" b="1" dirty="0">
+                <a:solidFill>
+                  <a:srgbClr val="222222"/>
+                </a:solidFill>
+              </a:rPr>
+              <a:t>[부록 3] </a:t>
+            </a:r>
+            <a:pPr algn="l" indent="0" marL="0">
+              <a:buNone/>
+            </a:pPr>
+            <a:r>
+              <a:rPr lang="en-US" sz="2400" b="1" dirty="0">
+                <a:solidFill>
+                  <a:srgbClr val="222222"/>
+                </a:solidFill>
+              </a:rPr>
+              <a:t>출처</a:t>
+            </a:r>
+            <a:endParaRPr lang="en-US" sz="2400" dirty="0"/>
+          </a:p>
+        </p:txBody>
+      </p:sp>
+      <p:graphicFrame>
+        <p:nvGraphicFramePr>
+          <p:cNvPr id="24" name="Table 0"/>
+          <p:cNvGraphicFramePr>
+            <a:graphicFrameLocks noGrp="1"/>
+          </p:cNvGraphicFramePr>
+          <p:nvPr>
+            <p:extLst>
+              <p:ext uri="{D42A27DB-BD31-4B8C-83A1-F6EECF244321}">
+                <p14:modId xmlns:p14="http://schemas.microsoft.com/office/powerpoint/2010/main" val="1579011935"/>
+              </p:ext>
+            </p:extLst>
+          </p:nvPr>
+        </p:nvGraphicFramePr>
+        <p:xfrm>
+          <a:off x="457200" y="1097280"/>
+          <a:ext cx="11274552" cy="914400"/>
+        </p:xfrm>
+        <a:graphic>
+          <a:graphicData uri="http://schemas.openxmlformats.org/drawingml/2006/table">
+            <a:tbl>
+              <a:tblPr/>
+              <a:tblGrid>
+                <a:gridCol w="1188720"/>
+                <a:gridCol w="6675120"/>
+                <a:gridCol w="3410712"/>
+              </a:tblGrid>
+              <a:tr h="347472">
+                <a:tc>
+                  <a:txBody>
+                    <a:bodyPr/>
+                    <a:lstStyle/>
+                    <a:p>
+                      <a:pPr algn="ctr" indent="0" marL="0">
+                        <a:buNone/>
+                      </a:pPr>
+                      <a:r>
+                        <a:rPr lang="en-US" sz="1100" b="1" dirty="0">
+                          <a:solidFill>
+                            <a:srgbClr val="FFFFFF"/>
+                          </a:solidFill>
+                          <a:latin typeface="Pretendard" pitchFamily="34" charset="0"/>
+                          <a:ea typeface="Pretendard" pitchFamily="34" charset="-122"/>
+                          <a:cs typeface="Pretendard" pitchFamily="34" charset="-120"/>
+                        </a:rPr>
+                        <a:t>구분</a:t>
+                      </a:r>
+                      <a:endParaRPr lang="en-US" sz="1100" dirty="0">
+                        <a:latin typeface="Pretendard" charset="0"/>
+                        <a:ea typeface="Pretendard" charset="0"/>
+                        <a:cs typeface="Pretendard" charset="0"/>
+                      </a:endParaRPr>
+                    </a:p>
+                  </a:txBody>
+                  <a:tcPr marL="73152" marR="73152" marT="36576" marB="36576" anchor="ctr">
+                    <a:lnL w="9525" cap="flat" cmpd="sng" algn="ctr">
+                      <a:solidFill>
+                        <a:srgbClr val="D9D9D9"/>
+                      </a:solidFill>
+                      <a:prstDash val="solid"/>
+                      <a:round/>
+                      <a:headEnd type="none" w="med" len="med"/>
+                      <a:tailEnd type="none" w="med" len="med"/>
+                    </a:lnL>
+                    <a:lnR w="9525" cap="flat" cmpd="sng" algn="ctr">
+                      <a:solidFill>
+                        <a:srgbClr val="D9D9D9"/>
+                      </a:solidFill>
+                      <a:prstDash val="solid"/>
+                      <a:round/>
+                      <a:headEnd type="none" w="med" len="med"/>
+                      <a:tailEnd type="none" w="med" len="med"/>
+                    </a:lnR>
+                    <a:lnT w="9525" cap="flat" cmpd="sng" algn="ctr">
+                      <a:solidFill>
+                        <a:srgbClr val="D9D9D9"/>
+                      </a:solidFill>
+                      <a:prstDash val="solid"/>
+                      <a:round/>
+                      <a:headEnd type="none" w="med" len="med"/>
+                      <a:tailEnd type="none" w="med" len="med"/>
+                    </a:lnT>
+                    <a:lnB w="9525" cap="flat" cmpd="sng" algn="ctr">
+                      <a:solidFill>
+                        <a:srgbClr val="D9D9D9"/>
+                      </a:solidFill>
+                      <a:prstDash val="solid"/>
+                      <a:round/>
+                      <a:headEnd type="none" w="med" len="med"/>
+                      <a:tailEnd type="none" w="med" len="med"/>
+                    </a:lnB>
+                    <a:solidFill>
+                      <a:srgbClr val="00358F"/>
+                    </a:solidFill>
+                  </a:tcPr>
+                </a:tc>
+                <a:tc>
+                  <a:txBody>
+                    <a:bodyPr/>
+                    <a:lstStyle/>
+                    <a:p>
+                      <a:pPr algn="ctr" indent="0" marL="0">
+                        <a:buNone/>
+                      </a:pPr>
+                      <a:r>
+                        <a:rPr lang="en-US" sz="1100" b="1" dirty="0">
+                          <a:solidFill>
+                            <a:srgbClr val="FFFFFF"/>
+                          </a:solidFill>
+                          <a:latin typeface="Pretendard" pitchFamily="34" charset="0"/>
+                          <a:ea typeface="Pretendard" pitchFamily="34" charset="-122"/>
+                          <a:cs typeface="Pretendard" pitchFamily="34" charset="-120"/>
+                        </a:rPr>
+                        <a:t>자료</a:t>
+                      </a:r>
+                      <a:endParaRPr lang="en-US" sz="1100" dirty="0">
+                        <a:latin typeface="Pretendard" charset="0"/>
+                        <a:ea typeface="Pretendard" charset="0"/>
+                        <a:cs typeface="Pretendard" charset="0"/>
+                      </a:endParaRPr>
+                    </a:p>
+                  </a:txBody>
+                  <a:tcPr marL="73152" marR="73152" marT="36576" marB="36576" anchor="ctr">
+                    <a:lnL w="9525" cap="flat" cmpd="sng" algn="ctr">
+                      <a:solidFill>
+                        <a:srgbClr val="D9D9D9"/>
+                      </a:solidFill>
+                      <a:prstDash val="solid"/>
+                      <a:round/>
+                      <a:headEnd type="none" w="med" len="med"/>
+                      <a:tailEnd type="none" w="med" len="med"/>
+                    </a:lnL>
+                    <a:lnR w="9525" cap="flat" cmpd="sng" algn="ctr">
+                      <a:solidFill>
+                        <a:srgbClr val="D9D9D9"/>
+                      </a:solidFill>
+                      <a:prstDash val="solid"/>
+                      <a:round/>
+                      <a:headEnd type="none" w="med" len="med"/>
+                      <a:tailEnd type="none" w="med" len="med"/>
+                    </a:lnR>
+                    <a:lnT w="9525" cap="flat" cmpd="sng" algn="ctr">
+                      <a:solidFill>
+                        <a:srgbClr val="D9D9D9"/>
+                      </a:solidFill>
+                      <a:prstDash val="solid"/>
+                      <a:round/>
+                      <a:headEnd type="none" w="med" len="med"/>
+                      <a:tailEnd type="none" w="med" len="med"/>
+                    </a:lnT>
+                    <a:lnB w="9525" cap="flat" cmpd="sng" algn="ctr">
+                      <a:solidFill>
+                        <a:srgbClr val="D9D9D9"/>
+                      </a:solidFill>
+                      <a:prstDash val="solid"/>
+                      <a:round/>
+                      <a:headEnd type="none" w="med" len="med"/>
+                      <a:tailEnd type="none" w="med" len="med"/>
+                    </a:lnB>
+                    <a:solidFill>
+                      <a:srgbClr val="00358F"/>
+                    </a:solidFill>
+                  </a:tcPr>
+                </a:tc>
+                <a:tc>
+                  <a:txBody>
+                    <a:bodyPr/>
+                    <a:lstStyle/>
+                    <a:p>
+                      <a:pPr algn="ctr" indent="0" marL="0">
+                        <a:buNone/>
+                      </a:pPr>
+                      <a:r>
+                        <a:rPr lang="en-US" sz="1100" b="1" dirty="0">
+                          <a:solidFill>
+                            <a:srgbClr val="FFFFFF"/>
+                          </a:solidFill>
+                          <a:latin typeface="Pretendard" pitchFamily="34" charset="0"/>
+                          <a:ea typeface="Pretendard" pitchFamily="34" charset="-122"/>
+                          <a:cs typeface="Pretendard" pitchFamily="34" charset="-120"/>
+                        </a:rPr>
+                        <a:t>쓰인 곳</a:t>
+                      </a:r>
+                      <a:endParaRPr lang="en-US" sz="1100" dirty="0">
+                        <a:latin typeface="Pretendard" charset="0"/>
+                        <a:ea typeface="Pretendard" charset="0"/>
+                        <a:cs typeface="Pretendard" charset="0"/>
+                      </a:endParaRPr>
+                    </a:p>
+                  </a:txBody>
+                  <a:tcPr marL="73152" marR="73152" marT="36576" marB="36576" anchor="ctr">
+                    <a:lnL w="9525" cap="flat" cmpd="sng" algn="ctr">
+                      <a:solidFill>
+                        <a:srgbClr val="D9D9D9"/>
+                      </a:solidFill>
+                      <a:prstDash val="solid"/>
+                      <a:round/>
+                      <a:headEnd type="none" w="med" len="med"/>
+                      <a:tailEnd type="none" w="med" len="med"/>
+                    </a:lnL>
+                    <a:lnR w="9525" cap="flat" cmpd="sng" algn="ctr">
+                      <a:solidFill>
+                        <a:srgbClr val="D9D9D9"/>
+                      </a:solidFill>
+                      <a:prstDash val="solid"/>
+                      <a:round/>
+                      <a:headEnd type="none" w="med" len="med"/>
+                      <a:tailEnd type="none" w="med" len="med"/>
+                    </a:lnR>
+                    <a:lnT w="9525" cap="flat" cmpd="sng" algn="ctr">
+                      <a:solidFill>
+                        <a:srgbClr val="D9D9D9"/>
+                      </a:solidFill>
+                      <a:prstDash val="solid"/>
+                      <a:round/>
+                      <a:headEnd type="none" w="med" len="med"/>
+                      <a:tailEnd type="none" w="med" len="med"/>
+                    </a:lnT>
+                    <a:lnB w="9525" cap="flat" cmpd="sng" algn="ctr">
+                      <a:solidFill>
+                        <a:srgbClr val="D9D9D9"/>
+                      </a:solidFill>
+                      <a:prstDash val="solid"/>
+                      <a:round/>
+                      <a:headEnd type="none" w="med" len="med"/>
+                      <a:tailEnd type="none" w="med" len="med"/>
+                    </a:lnB>
+                    <a:solidFill>
+                      <a:srgbClr val="00358F"/>
+                    </a:solidFill>
+                  </a:tcPr>
+                </a:tc>
+              </a:tr>
+              <a:tr h="347472">
+                <a:tc>
+                  <a:txBody>
+                    <a:bodyPr/>
+                    <a:lstStyle/>
+                    <a:p>
+                      <a:pPr indent="0" marL="0">
+                        <a:buNone/>
+                      </a:pPr>
+                      <a:r>
+                        <a:rPr lang="en-US" sz="1100" b="1" dirty="0">
+                          <a:solidFill>
+                            <a:srgbClr val="00358F"/>
+                          </a:solidFill>
+                          <a:latin typeface="Pretendard" pitchFamily="34" charset="0"/>
+                          <a:ea typeface="Pretendard" pitchFamily="34" charset="-122"/>
+                          <a:cs typeface="Pretendard" pitchFamily="34" charset="-120"/>
+                        </a:rPr>
+                        <a:t>대회</a:t>
+                      </a:r>
+                      <a:endParaRPr lang="en-US" sz="1100" dirty="0">
+                        <a:latin typeface="Pretendard" charset="0"/>
+                        <a:ea typeface="Pretendard" charset="0"/>
+                        <a:cs typeface="Pretendard" charset="0"/>
+                      </a:endParaRPr>
+                    </a:p>
+                  </a:txBody>
+                  <a:tcPr marL="73152" marR="73152" marT="36576" marB="36576" anchor="ctr">
+                    <a:lnL w="9525" cap="flat" cmpd="sng" algn="ctr">
+                      <a:solidFill>
+                        <a:srgbClr val="D9D9D9"/>
+                      </a:solidFill>
+                      <a:prstDash val="solid"/>
+                      <a:round/>
+                      <a:headEnd type="none" w="med" len="med"/>
+                      <a:tailEnd type="none" w="med" len="med"/>
+                    </a:lnL>
+                    <a:lnR w="9525" cap="flat" cmpd="sng" algn="ctr">
+                      <a:solidFill>
+                        <a:srgbClr val="D9D9D9"/>
+                      </a:solidFill>
+                      <a:prstDash val="solid"/>
+                      <a:round/>
+                      <a:headEnd type="none" w="med" len="med"/>
+                      <a:tailEnd type="none" w="med" len="med"/>
+                    </a:lnR>
+                    <a:lnT w="9525" cap="flat" cmpd="sng" algn="ctr">
+                      <a:solidFill>
+                        <a:srgbClr val="D9D9D9"/>
+                      </a:solidFill>
+                      <a:prstDash val="solid"/>
+                      <a:round/>
+                      <a:headEnd type="none" w="med" len="med"/>
+                      <a:tailEnd type="none" w="med" len="med"/>
+                    </a:lnT>
+                    <a:lnB w="9525" cap="flat" cmpd="sng" algn="ctr">
+                      <a:solidFill>
+                        <a:srgbClr val="D9D9D9"/>
+                      </a:solidFill>
+                      <a:prstDash val="solid"/>
+                      <a:round/>
+                      <a:headEnd type="none" w="med" len="med"/>
+                      <a:tailEnd type="none" w="med" len="med"/>
+                    </a:lnB>
+                    <a:solidFill>
+                      <a:srgbClr val="F5F7FB"/>
+                    </a:solidFill>
+                  </a:tcPr>
+                </a:tc>
+                <a:tc>
+                  <a:txBody>
+                    <a:bodyPr/>
+                    <a:lstStyle/>
+                    <a:p>
+                      <a:pPr indent="0" marL="0">
+                        <a:buNone/>
+                      </a:pPr>
+                      <a:r>
+                        <a:rPr lang="en-US" sz="1100" dirty="0">
+                          <a:solidFill>
+                            <a:srgbClr val="222222"/>
+                          </a:solidFill>
+                          <a:latin typeface="Pretendard" pitchFamily="34" charset="0"/>
+                          <a:ea typeface="Pretendard" pitchFamily="34" charset="-122"/>
+                          <a:cs typeface="Pretendard" pitchFamily="34" charset="-120"/>
+                        </a:rPr>
+                        <a:t>해커그라운드 공식 페이지(hackersground.kr), 참가 신청 접수 메일(2026.10.25)</a:t>
+                      </a:r>
+                      <a:endParaRPr lang="en-US" sz="1100" dirty="0">
+                        <a:latin typeface="Pretendard" charset="0"/>
+                        <a:ea typeface="Pretendard" charset="0"/>
+                        <a:cs typeface="Pretendard" charset="0"/>
+                      </a:endParaRPr>
+                    </a:p>
+                  </a:txBody>
+                  <a:tcPr marL="73152" marR="73152" marT="36576" marB="36576" anchor="ctr">
+                    <a:lnL w="9525" cap="flat" cmpd="sng" algn="ctr">
+                      <a:solidFill>
+                        <a:srgbClr val="D9D9D9"/>
+                      </a:solidFill>
+                      <a:prstDash val="solid"/>
+                      <a:round/>
+                      <a:headEnd type="none" w="med" len="med"/>
+                      <a:tailEnd type="none" w="med" len="med"/>
+                    </a:lnL>
+                    <a:lnR w="9525" cap="flat" cmpd="sng" algn="ctr">
+                      <a:solidFill>
+                        <a:srgbClr val="D9D9D9"/>
+                      </a:solidFill>
+                      <a:prstDash val="solid"/>
+                      <a:round/>
+                      <a:headEnd type="none" w="med" len="med"/>
+                      <a:tailEnd type="none" w="med" len="med"/>
+                    </a:lnR>
+                    <a:lnT w="9525" cap="flat" cmpd="sng" algn="ctr">
+                      <a:solidFill>
+                        <a:srgbClr val="D9D9D9"/>
+                      </a:solidFill>
+                      <a:prstDash val="solid"/>
+                      <a:round/>
+                      <a:headEnd type="none" w="med" len="med"/>
+                      <a:tailEnd type="none" w="med" len="med"/>
+                    </a:lnT>
+                    <a:lnB w="9525" cap="flat" cmpd="sng" algn="ctr">
+                      <a:solidFill>
+                        <a:srgbClr val="D9D9D9"/>
+                      </a:solidFill>
+                      <a:prstDash val="solid"/>
+                      <a:round/>
+                      <a:headEnd type="none" w="med" len="med"/>
+                      <a:tailEnd type="none" w="med" len="med"/>
+                    </a:lnB>
+                  </a:tcPr>
+                </a:tc>
+                <a:tc>
+                  <a:txBody>
+                    <a:bodyPr/>
+                    <a:lstStyle/>
+                    <a:p>
+                      <a:pPr indent="0" marL="0">
+                        <a:buNone/>
+                      </a:pPr>
+                      <a:r>
+                        <a:rPr lang="en-US" sz="1100" dirty="0">
+                          <a:solidFill>
+                            <a:srgbClr val="222222"/>
+                          </a:solidFill>
+                          <a:latin typeface="Pretendard" pitchFamily="34" charset="0"/>
+                          <a:ea typeface="Pretendard" pitchFamily="34" charset="-122"/>
+                          <a:cs typeface="Pretendard" pitchFamily="34" charset="-120"/>
+                        </a:rPr>
+                        <a:t>일정·제출물·심사 기준·셔틀</a:t>
+                      </a:r>
+                      <a:endParaRPr lang="en-US" sz="1100" dirty="0">
+                        <a:latin typeface="Pretendard" charset="0"/>
+                        <a:ea typeface="Pretendard" charset="0"/>
+                        <a:cs typeface="Pretendard" charset="0"/>
+                      </a:endParaRPr>
+                    </a:p>
+                  </a:txBody>
+                  <a:tcPr marL="73152" marR="73152" marT="36576" marB="36576" anchor="ctr">
+                    <a:lnL w="9525" cap="flat" cmpd="sng" algn="ctr">
+                      <a:solidFill>
+                        <a:srgbClr val="D9D9D9"/>
+                      </a:solidFill>
+                      <a:prstDash val="solid"/>
+                      <a:round/>
+                      <a:headEnd type="none" w="med" len="med"/>
+                      <a:tailEnd type="none" w="med" len="med"/>
+                    </a:lnL>
+                    <a:lnR w="9525" cap="flat" cmpd="sng" algn="ctr">
+                      <a:solidFill>
+                        <a:srgbClr val="D9D9D9"/>
+                      </a:solidFill>
+                      <a:prstDash val="solid"/>
+                      <a:round/>
+                      <a:headEnd type="none" w="med" len="med"/>
+                      <a:tailEnd type="none" w="med" len="med"/>
+                    </a:lnR>
+                    <a:lnT w="9525" cap="flat" cmpd="sng" algn="ctr">
+                      <a:solidFill>
+                        <a:srgbClr val="D9D9D9"/>
+                      </a:solidFill>
+                      <a:prstDash val="solid"/>
+                      <a:round/>
+                      <a:headEnd type="none" w="med" len="med"/>
+                      <a:tailEnd type="none" w="med" len="med"/>
+                    </a:lnT>
+                    <a:lnB w="9525" cap="flat" cmpd="sng" algn="ctr">
+                      <a:solidFill>
+                        <a:srgbClr val="D9D9D9"/>
+                      </a:solidFill>
+                      <a:prstDash val="solid"/>
+                      <a:round/>
+                      <a:headEnd type="none" w="med" len="med"/>
+                      <a:tailEnd type="none" w="med" len="med"/>
+                    </a:lnB>
+                  </a:tcPr>
+                </a:tc>
+              </a:tr>
+              <a:tr h="347472">
+                <a:tc>
+                  <a:txBody>
+                    <a:bodyPr/>
+                    <a:lstStyle/>
+                    <a:p>
+                      <a:pPr indent="0" marL="0">
+                        <a:buNone/>
+                      </a:pPr>
+                      <a:r>
+                        <a:rPr lang="en-US" sz="1100" b="1" dirty="0">
+                          <a:solidFill>
+                            <a:srgbClr val="00358F"/>
+                          </a:solidFill>
+                          <a:latin typeface="Pretendard" pitchFamily="34" charset="0"/>
+                          <a:ea typeface="Pretendard" pitchFamily="34" charset="-122"/>
+                          <a:cs typeface="Pretendard" pitchFamily="34" charset="-120"/>
+                        </a:rPr>
+                        <a:t>대회</a:t>
+                      </a:r>
+                      <a:endParaRPr lang="en-US" sz="1100" dirty="0">
+                        <a:latin typeface="Pretendard" charset="0"/>
+                        <a:ea typeface="Pretendard" charset="0"/>
+                        <a:cs typeface="Pretendard" charset="0"/>
+                      </a:endParaRPr>
+                    </a:p>
+                  </a:txBody>
+                  <a:tcPr marL="73152" marR="73152" marT="36576" marB="36576" anchor="ctr">
+                    <a:lnL w="9525" cap="flat" cmpd="sng" algn="ctr">
+                      <a:solidFill>
+                        <a:srgbClr val="D9D9D9"/>
+                      </a:solidFill>
+                      <a:prstDash val="solid"/>
+                      <a:round/>
+                      <a:headEnd type="none" w="med" len="med"/>
+                      <a:tailEnd type="none" w="med" len="med"/>
+                    </a:lnL>
+                    <a:lnR w="9525" cap="flat" cmpd="sng" algn="ctr">
+                      <a:solidFill>
+                        <a:srgbClr val="D9D9D9"/>
+                      </a:solidFill>
+                      <a:prstDash val="solid"/>
+                      <a:round/>
+                      <a:headEnd type="none" w="med" len="med"/>
+                      <a:tailEnd type="none" w="med" len="med"/>
+                    </a:lnR>
+                    <a:lnT w="9525" cap="flat" cmpd="sng" algn="ctr">
+                      <a:solidFill>
+                        <a:srgbClr val="D9D9D9"/>
+                      </a:solidFill>
+                      <a:prstDash val="solid"/>
+                      <a:round/>
+                      <a:headEnd type="none" w="med" len="med"/>
+                      <a:tailEnd type="none" w="med" len="med"/>
+                    </a:lnT>
+                    <a:lnB w="9525" cap="flat" cmpd="sng" algn="ctr">
+                      <a:solidFill>
+                        <a:srgbClr val="D9D9D9"/>
+                      </a:solidFill>
+                      <a:prstDash val="solid"/>
+                      <a:round/>
+                      <a:headEnd type="none" w="med" len="med"/>
+                      <a:tailEnd type="none" w="med" len="med"/>
+                    </a:lnB>
+                    <a:solidFill>
+                      <a:srgbClr val="F5F7FB"/>
+                    </a:solidFill>
+                  </a:tcPr>
+                </a:tc>
+                <a:tc>
+                  <a:txBody>
+                    <a:bodyPr/>
+                    <a:lstStyle/>
+                    <a:p>
+                      <a:pPr indent="0" marL="0">
+                        <a:buNone/>
+                      </a:pPr>
+                      <a:r>
+                        <a:rPr lang="en-US" sz="1100" dirty="0">
+                          <a:solidFill>
+                            <a:srgbClr val="222222"/>
+                          </a:solidFill>
+                          <a:latin typeface="Pretendard" pitchFamily="34" charset="0"/>
+                          <a:ea typeface="Pretendard" pitchFamily="34" charset="-122"/>
+                          <a:cs typeface="Pretendard" pitchFamily="34" charset="-120"/>
+                        </a:rPr>
+                        <a:t>2023 대상 DEPS 팀 회고(zedy_dev.log), 2024 대상 나누리 팀 회고(김건우 velog)</a:t>
+                      </a:r>
+                      <a:endParaRPr lang="en-US" sz="1100" dirty="0">
+                        <a:latin typeface="Pretendard" charset="0"/>
+                        <a:ea typeface="Pretendard" charset="0"/>
+                        <a:cs typeface="Pretendard" charset="0"/>
+                      </a:endParaRPr>
+                    </a:p>
+                  </a:txBody>
+                  <a:tcPr marL="73152" marR="73152" marT="36576" marB="36576" anchor="ctr">
+                    <a:lnL w="9525" cap="flat" cmpd="sng" algn="ctr">
+                      <a:solidFill>
+                        <a:srgbClr val="D9D9D9"/>
+                      </a:solidFill>
+                      <a:prstDash val="solid"/>
+                      <a:round/>
+                      <a:headEnd type="none" w="med" len="med"/>
+                      <a:tailEnd type="none" w="med" len="med"/>
+                    </a:lnL>
+                    <a:lnR w="9525" cap="flat" cmpd="sng" algn="ctr">
+                      <a:solidFill>
+                        <a:srgbClr val="D9D9D9"/>
+                      </a:solidFill>
+                      <a:prstDash val="solid"/>
+                      <a:round/>
+                      <a:headEnd type="none" w="med" len="med"/>
+                      <a:tailEnd type="none" w="med" len="med"/>
+                    </a:lnR>
+                    <a:lnT w="9525" cap="flat" cmpd="sng" algn="ctr">
+                      <a:solidFill>
+                        <a:srgbClr val="D9D9D9"/>
+                      </a:solidFill>
+                      <a:prstDash val="solid"/>
+                      <a:round/>
+                      <a:headEnd type="none" w="med" len="med"/>
+                      <a:tailEnd type="none" w="med" len="med"/>
+                    </a:lnT>
+                    <a:lnB w="9525" cap="flat" cmpd="sng" algn="ctr">
+                      <a:solidFill>
+                        <a:srgbClr val="D9D9D9"/>
+                      </a:solidFill>
+                      <a:prstDash val="solid"/>
+                      <a:round/>
+                      <a:headEnd type="none" w="med" len="med"/>
+                      <a:tailEnd type="none" w="med" len="med"/>
+                    </a:lnB>
+                  </a:tcPr>
+                </a:tc>
+                <a:tc>
+                  <a:txBody>
+                    <a:bodyPr/>
+                    <a:lstStyle/>
+                    <a:p>
+                      <a:pPr indent="0" marL="0">
+                        <a:buNone/>
+                      </a:pPr>
+                      <a:r>
+                        <a:rPr lang="en-US" sz="1100" dirty="0">
+                          <a:solidFill>
+                            <a:srgbClr val="222222"/>
+                          </a:solidFill>
+                          <a:latin typeface="Pretendard" pitchFamily="34" charset="0"/>
+                          <a:ea typeface="Pretendard" pitchFamily="34" charset="-122"/>
+                          <a:cs typeface="Pretendard" pitchFamily="34" charset="-120"/>
+                        </a:rPr>
+                        <a:t>지난 대상작·심사 과정</a:t>
+                      </a:r>
+                      <a:endParaRPr lang="en-US" sz="1100" dirty="0">
+                        <a:latin typeface="Pretendard" charset="0"/>
+                        <a:ea typeface="Pretendard" charset="0"/>
+                        <a:cs typeface="Pretendard" charset="0"/>
+                      </a:endParaRPr>
+                    </a:p>
+                  </a:txBody>
+                  <a:tcPr marL="73152" marR="73152" marT="36576" marB="36576" anchor="ctr">
+                    <a:lnL w="9525" cap="flat" cmpd="sng" algn="ctr">
+                      <a:solidFill>
+                        <a:srgbClr val="D9D9D9"/>
+                      </a:solidFill>
+                      <a:prstDash val="solid"/>
+                      <a:round/>
+                      <a:headEnd type="none" w="med" len="med"/>
+                      <a:tailEnd type="none" w="med" len="med"/>
+                    </a:lnL>
+                    <a:lnR w="9525" cap="flat" cmpd="sng" algn="ctr">
+                      <a:solidFill>
+                        <a:srgbClr val="D9D9D9"/>
+                      </a:solidFill>
+                      <a:prstDash val="solid"/>
+                      <a:round/>
+                      <a:headEnd type="none" w="med" len="med"/>
+                      <a:tailEnd type="none" w="med" len="med"/>
+                    </a:lnR>
+                    <a:lnT w="9525" cap="flat" cmpd="sng" algn="ctr">
+                      <a:solidFill>
+                        <a:srgbClr val="D9D9D9"/>
+                      </a:solidFill>
+                      <a:prstDash val="solid"/>
+                      <a:round/>
+                      <a:headEnd type="none" w="med" len="med"/>
+                      <a:tailEnd type="none" w="med" len="med"/>
+                    </a:lnT>
+                    <a:lnB w="9525" cap="flat" cmpd="sng" algn="ctr">
+                      <a:solidFill>
+                        <a:srgbClr val="D9D9D9"/>
+                      </a:solidFill>
+                      <a:prstDash val="solid"/>
+                      <a:round/>
+                      <a:headEnd type="none" w="med" len="med"/>
+                      <a:tailEnd type="none" w="med" len="med"/>
+                    </a:lnB>
+                  </a:tcPr>
+                </a:tc>
+              </a:tr>
+              <a:tr h="347472">
+                <a:tc>
+                  <a:txBody>
+                    <a:bodyPr/>
+                    <a:lstStyle/>
+                    <a:p>
+                      <a:pPr indent="0" marL="0">
+                        <a:buNone/>
+                      </a:pPr>
+                      <a:r>
+                        <a:rPr lang="en-US" sz="1100" b="1" dirty="0">
+                          <a:solidFill>
+                            <a:srgbClr val="00358F"/>
+                          </a:solidFill>
+                          <a:latin typeface="Pretendard" pitchFamily="34" charset="0"/>
+                          <a:ea typeface="Pretendard" pitchFamily="34" charset="-122"/>
+                          <a:cs typeface="Pretendard" pitchFamily="34" charset="-120"/>
+                        </a:rPr>
+                        <a:t>대회</a:t>
+                      </a:r>
+                      <a:endParaRPr lang="en-US" sz="1100" dirty="0">
+                        <a:latin typeface="Pretendard" charset="0"/>
+                        <a:ea typeface="Pretendard" charset="0"/>
+                        <a:cs typeface="Pretendard" charset="0"/>
+                      </a:endParaRPr>
+                    </a:p>
+                  </a:txBody>
+                  <a:tcPr marL="73152" marR="73152" marT="36576" marB="36576" anchor="ctr">
+                    <a:lnL w="9525" cap="flat" cmpd="sng" algn="ctr">
+                      <a:solidFill>
+                        <a:srgbClr val="D9D9D9"/>
+                      </a:solidFill>
+                      <a:prstDash val="solid"/>
+                      <a:round/>
+                      <a:headEnd type="none" w="med" len="med"/>
+                      <a:tailEnd type="none" w="med" len="med"/>
+                    </a:lnL>
+                    <a:lnR w="9525" cap="flat" cmpd="sng" algn="ctr">
+                      <a:solidFill>
+                        <a:srgbClr val="D9D9D9"/>
+                      </a:solidFill>
+                      <a:prstDash val="solid"/>
+                      <a:round/>
+                      <a:headEnd type="none" w="med" len="med"/>
+                      <a:tailEnd type="none" w="med" len="med"/>
+                    </a:lnR>
+                    <a:lnT w="9525" cap="flat" cmpd="sng" algn="ctr">
+                      <a:solidFill>
+                        <a:srgbClr val="D9D9D9"/>
+                      </a:solidFill>
+                      <a:prstDash val="solid"/>
+                      <a:round/>
+                      <a:headEnd type="none" w="med" len="med"/>
+                      <a:tailEnd type="none" w="med" len="med"/>
+                    </a:lnT>
+                    <a:lnB w="9525" cap="flat" cmpd="sng" algn="ctr">
+                      <a:solidFill>
+                        <a:srgbClr val="D9D9D9"/>
+                      </a:solidFill>
+                      <a:prstDash val="solid"/>
+                      <a:round/>
+                      <a:headEnd type="none" w="med" len="med"/>
+                      <a:tailEnd type="none" w="med" len="med"/>
+                    </a:lnB>
+                    <a:solidFill>
+                      <a:srgbClr val="F5F7FB"/>
+                    </a:solidFill>
+                  </a:tcPr>
+                </a:tc>
+                <a:tc>
+                  <a:txBody>
+                    <a:bodyPr/>
+                    <a:lstStyle/>
+                    <a:p>
+                      <a:pPr indent="0" marL="0">
+                        <a:buNone/>
+                      </a:pPr>
+                      <a:r>
+                        <a:rPr lang="en-US" sz="1100" dirty="0">
+                          <a:solidFill>
+                            <a:srgbClr val="222222"/>
+                          </a:solidFill>
+                          <a:latin typeface="Pretendard" pitchFamily="34" charset="0"/>
+                          <a:ea typeface="Pretendard" pitchFamily="34" charset="-122"/>
+                          <a:cs typeface="Pretendard" pitchFamily="34" charset="-120"/>
+                        </a:rPr>
+                        <a:t>배포 기회 2번 — 팀 내 공유 정보</a:t>
+                      </a:r>
+                      <a:endParaRPr lang="en-US" sz="1100" dirty="0">
+                        <a:latin typeface="Pretendard" charset="0"/>
+                        <a:ea typeface="Pretendard" charset="0"/>
+                        <a:cs typeface="Pretendard" charset="0"/>
+                      </a:endParaRPr>
+                    </a:p>
+                  </a:txBody>
+                  <a:tcPr marL="73152" marR="73152" marT="36576" marB="36576" anchor="ctr">
+                    <a:lnL w="9525" cap="flat" cmpd="sng" algn="ctr">
+                      <a:solidFill>
+                        <a:srgbClr val="D9D9D9"/>
+                      </a:solidFill>
+                      <a:prstDash val="solid"/>
+                      <a:round/>
+                      <a:headEnd type="none" w="med" len="med"/>
+                      <a:tailEnd type="none" w="med" len="med"/>
+                    </a:lnL>
+                    <a:lnR w="9525" cap="flat" cmpd="sng" algn="ctr">
+                      <a:solidFill>
+                        <a:srgbClr val="D9D9D9"/>
+                      </a:solidFill>
+                      <a:prstDash val="solid"/>
+                      <a:round/>
+                      <a:headEnd type="none" w="med" len="med"/>
+                      <a:tailEnd type="none" w="med" len="med"/>
+                    </a:lnR>
+                    <a:lnT w="9525" cap="flat" cmpd="sng" algn="ctr">
+                      <a:solidFill>
+                        <a:srgbClr val="D9D9D9"/>
+                      </a:solidFill>
+                      <a:prstDash val="solid"/>
+                      <a:round/>
+                      <a:headEnd type="none" w="med" len="med"/>
+                      <a:tailEnd type="none" w="med" len="med"/>
+                    </a:lnT>
+                    <a:lnB w="9525" cap="flat" cmpd="sng" algn="ctr">
+                      <a:solidFill>
+                        <a:srgbClr val="D9D9D9"/>
+                      </a:solidFill>
+                      <a:prstDash val="solid"/>
+                      <a:round/>
+                      <a:headEnd type="none" w="med" len="med"/>
+                      <a:tailEnd type="none" w="med" len="med"/>
+                    </a:lnB>
+                  </a:tcPr>
+                </a:tc>
+                <a:tc>
+                  <a:txBody>
+                    <a:bodyPr/>
+                    <a:lstStyle/>
+                    <a:p>
+                      <a:pPr indent="0" marL="0">
+                        <a:buNone/>
+                      </a:pPr>
+                      <a:r>
+                        <a:rPr lang="en-US" sz="1100" b="1" dirty="0">
+                          <a:solidFill>
+                            <a:srgbClr val="FF8200"/>
+                          </a:solidFill>
+                          <a:latin typeface="Pretendard" pitchFamily="34" charset="0"/>
+                          <a:ea typeface="Pretendard" pitchFamily="34" charset="-122"/>
+                          <a:cs typeface="Pretendard" pitchFamily="34" charset="-120"/>
+                        </a:rPr>
+                        <a:t>공식 출처 확인 필요</a:t>
+                      </a:r>
+                      <a:endParaRPr lang="en-US" sz="1100" dirty="0">
+                        <a:latin typeface="Pretendard" charset="0"/>
+                        <a:ea typeface="Pretendard" charset="0"/>
+                        <a:cs typeface="Pretendard" charset="0"/>
+                      </a:endParaRPr>
+                    </a:p>
+                  </a:txBody>
+                  <a:tcPr marL="73152" marR="73152" marT="36576" marB="36576" anchor="ctr">
+                    <a:lnL w="9525" cap="flat" cmpd="sng" algn="ctr">
+                      <a:solidFill>
+                        <a:srgbClr val="D9D9D9"/>
+                      </a:solidFill>
+                      <a:prstDash val="solid"/>
+                      <a:round/>
+                      <a:headEnd type="none" w="med" len="med"/>
+                      <a:tailEnd type="none" w="med" len="med"/>
+                    </a:lnL>
+                    <a:lnR w="9525" cap="flat" cmpd="sng" algn="ctr">
+                      <a:solidFill>
+                        <a:srgbClr val="D9D9D9"/>
+                      </a:solidFill>
+                      <a:prstDash val="solid"/>
+                      <a:round/>
+                      <a:headEnd type="none" w="med" len="med"/>
+                      <a:tailEnd type="none" w="med" len="med"/>
+                    </a:lnR>
+                    <a:lnT w="9525" cap="flat" cmpd="sng" algn="ctr">
+                      <a:solidFill>
+                        <a:srgbClr val="D9D9D9"/>
+                      </a:solidFill>
+                      <a:prstDash val="solid"/>
+                      <a:round/>
+                      <a:headEnd type="none" w="med" len="med"/>
+                      <a:tailEnd type="none" w="med" len="med"/>
+                    </a:lnT>
+                    <a:lnB w="9525" cap="flat" cmpd="sng" algn="ctr">
+                      <a:solidFill>
+                        <a:srgbClr val="D9D9D9"/>
+                      </a:solidFill>
+                      <a:prstDash val="solid"/>
+                      <a:round/>
+                      <a:headEnd type="none" w="med" len="med"/>
+                      <a:tailEnd type="none" w="med" len="med"/>
+                    </a:lnB>
+                    <a:solidFill>
+                      <a:srgbClr val="FFF3E6"/>
+                    </a:solidFill>
+                  </a:tcPr>
+                </a:tc>
+              </a:tr>
+              <a:tr h="347472">
+                <a:tc>
+                  <a:txBody>
+                    <a:bodyPr/>
+                    <a:lstStyle/>
+                    <a:p>
+                      <a:pPr indent="0" marL="0">
+                        <a:buNone/>
+                      </a:pPr>
+                      <a:r>
+                        <a:rPr lang="en-US" sz="1100" b="1" dirty="0">
+                          <a:solidFill>
+                            <a:srgbClr val="00358F"/>
+                          </a:solidFill>
+                          <a:latin typeface="Pretendard" pitchFamily="34" charset="0"/>
+                          <a:ea typeface="Pretendard" pitchFamily="34" charset="-122"/>
+                          <a:cs typeface="Pretendard" pitchFamily="34" charset="-120"/>
+                        </a:rPr>
+                        <a:t>인구</a:t>
+                      </a:r>
+                      <a:endParaRPr lang="en-US" sz="1100" dirty="0">
+                        <a:latin typeface="Pretendard" charset="0"/>
+                        <a:ea typeface="Pretendard" charset="0"/>
+                        <a:cs typeface="Pretendard" charset="0"/>
+                      </a:endParaRPr>
+                    </a:p>
+                  </a:txBody>
+                  <a:tcPr marL="73152" marR="73152" marT="36576" marB="36576" anchor="ctr">
+                    <a:lnL w="9525" cap="flat" cmpd="sng" algn="ctr">
+                      <a:solidFill>
+                        <a:srgbClr val="D9D9D9"/>
+                      </a:solidFill>
+                      <a:prstDash val="solid"/>
+                      <a:round/>
+                      <a:headEnd type="none" w="med" len="med"/>
+                      <a:tailEnd type="none" w="med" len="med"/>
+                    </a:lnL>
+                    <a:lnR w="9525" cap="flat" cmpd="sng" algn="ctr">
+                      <a:solidFill>
+                        <a:srgbClr val="D9D9D9"/>
+                      </a:solidFill>
+                      <a:prstDash val="solid"/>
+                      <a:round/>
+                      <a:headEnd type="none" w="med" len="med"/>
+                      <a:tailEnd type="none" w="med" len="med"/>
+                    </a:lnR>
+                    <a:lnT w="9525" cap="flat" cmpd="sng" algn="ctr">
+                      <a:solidFill>
+                        <a:srgbClr val="D9D9D9"/>
+                      </a:solidFill>
+                      <a:prstDash val="solid"/>
+                      <a:round/>
+                      <a:headEnd type="none" w="med" len="med"/>
+                      <a:tailEnd type="none" w="med" len="med"/>
+                    </a:lnT>
+                    <a:lnB w="9525" cap="flat" cmpd="sng" algn="ctr">
+                      <a:solidFill>
+                        <a:srgbClr val="D9D9D9"/>
+                      </a:solidFill>
+                      <a:prstDash val="solid"/>
+                      <a:round/>
+                      <a:headEnd type="none" w="med" len="med"/>
+                      <a:tailEnd type="none" w="med" len="med"/>
+                    </a:lnB>
+                    <a:solidFill>
+                      <a:srgbClr val="F5F7FB"/>
+                    </a:solidFill>
+                  </a:tcPr>
+                </a:tc>
+                <a:tc>
+                  <a:txBody>
+                    <a:bodyPr/>
+                    <a:lstStyle/>
+                    <a:p>
+                      <a:pPr indent="0" marL="0">
+                        <a:buNone/>
+                      </a:pPr>
+                      <a:r>
+                        <a:rPr lang="en-US" sz="1100" dirty="0">
+                          <a:solidFill>
+                            <a:srgbClr val="222222"/>
+                          </a:solidFill>
+                          <a:latin typeface="Pretendard" pitchFamily="34" charset="0"/>
+                          <a:ea typeface="Pretendard" pitchFamily="34" charset="-122"/>
+                          <a:cs typeface="Pretendard" pitchFamily="34" charset="-120"/>
+                        </a:rPr>
+                        <a:t>행정안전부 주민등록 인구통계(2026.9)</a:t>
+                      </a:r>
+                      <a:endParaRPr lang="en-US" sz="1100" dirty="0">
+                        <a:latin typeface="Pretendard" charset="0"/>
+                        <a:ea typeface="Pretendard" charset="0"/>
+                        <a:cs typeface="Pretendard" charset="0"/>
+                      </a:endParaRPr>
+                    </a:p>
+                  </a:txBody>
+                  <a:tcPr marL="73152" marR="73152" marT="36576" marB="36576" anchor="ctr">
+                    <a:lnL w="9525" cap="flat" cmpd="sng" algn="ctr">
+                      <a:solidFill>
+                        <a:srgbClr val="D9D9D9"/>
+                      </a:solidFill>
+                      <a:prstDash val="solid"/>
+                      <a:round/>
+                      <a:headEnd type="none" w="med" len="med"/>
+                      <a:tailEnd type="none" w="med" len="med"/>
+                    </a:lnL>
+                    <a:lnR w="9525" cap="flat" cmpd="sng" algn="ctr">
+                      <a:solidFill>
+                        <a:srgbClr val="D9D9D9"/>
+                      </a:solidFill>
+                      <a:prstDash val="solid"/>
+                      <a:round/>
+                      <a:headEnd type="none" w="med" len="med"/>
+                      <a:tailEnd type="none" w="med" len="med"/>
+                    </a:lnR>
+                    <a:lnT w="9525" cap="flat" cmpd="sng" algn="ctr">
+                      <a:solidFill>
+                        <a:srgbClr val="D9D9D9"/>
+                      </a:solidFill>
+                      <a:prstDash val="solid"/>
+                      <a:round/>
+                      <a:headEnd type="none" w="med" len="med"/>
+                      <a:tailEnd type="none" w="med" len="med"/>
+                    </a:lnT>
+                    <a:lnB w="9525" cap="flat" cmpd="sng" algn="ctr">
+                      <a:solidFill>
+                        <a:srgbClr val="D9D9D9"/>
+                      </a:solidFill>
+                      <a:prstDash val="solid"/>
+                      <a:round/>
+                      <a:headEnd type="none" w="med" len="med"/>
+                      <a:tailEnd type="none" w="med" len="med"/>
+                    </a:lnB>
+                  </a:tcPr>
+                </a:tc>
+                <a:tc>
+                  <a:txBody>
+                    <a:bodyPr/>
+                    <a:lstStyle/>
+                    <a:p>
+                      <a:pPr indent="0" marL="0">
+                        <a:buNone/>
+                      </a:pPr>
+                      <a:r>
+                        <a:rPr lang="en-US" sz="1100" dirty="0">
+                          <a:solidFill>
+                            <a:srgbClr val="222222"/>
+                          </a:solidFill>
+                          <a:latin typeface="Pretendard" pitchFamily="34" charset="0"/>
+                          <a:ea typeface="Pretendard" pitchFamily="34" charset="-122"/>
+                          <a:cs typeface="Pretendard" pitchFamily="34" charset="-120"/>
+                        </a:rPr>
+                        <a:t>연령대별 인구, 읍면별 평균 연령</a:t>
+                      </a:r>
+                      <a:endParaRPr lang="en-US" sz="1100" dirty="0">
+                        <a:latin typeface="Pretendard" charset="0"/>
+                        <a:ea typeface="Pretendard" charset="0"/>
+                        <a:cs typeface="Pretendard" charset="0"/>
+                      </a:endParaRPr>
+                    </a:p>
+                  </a:txBody>
+                  <a:tcPr marL="73152" marR="73152" marT="36576" marB="36576" anchor="ctr">
+                    <a:lnL w="9525" cap="flat" cmpd="sng" algn="ctr">
+                      <a:solidFill>
+                        <a:srgbClr val="D9D9D9"/>
+                      </a:solidFill>
+                      <a:prstDash val="solid"/>
+                      <a:round/>
+                      <a:headEnd type="none" w="med" len="med"/>
+                      <a:tailEnd type="none" w="med" len="med"/>
+                    </a:lnL>
+                    <a:lnR w="9525" cap="flat" cmpd="sng" algn="ctr">
+                      <a:solidFill>
+                        <a:srgbClr val="D9D9D9"/>
+                      </a:solidFill>
+                      <a:prstDash val="solid"/>
+                      <a:round/>
+                      <a:headEnd type="none" w="med" len="med"/>
+                      <a:tailEnd type="none" w="med" len="med"/>
+                    </a:lnR>
+                    <a:lnT w="9525" cap="flat" cmpd="sng" algn="ctr">
+                      <a:solidFill>
+                        <a:srgbClr val="D9D9D9"/>
+                      </a:solidFill>
+                      <a:prstDash val="solid"/>
+                      <a:round/>
+                      <a:headEnd type="none" w="med" len="med"/>
+                      <a:tailEnd type="none" w="med" len="med"/>
+                    </a:lnT>
+                    <a:lnB w="9525" cap="flat" cmpd="sng" algn="ctr">
+                      <a:solidFill>
+                        <a:srgbClr val="D9D9D9"/>
+                      </a:solidFill>
+                      <a:prstDash val="solid"/>
+                      <a:round/>
+                      <a:headEnd type="none" w="med" len="med"/>
+                      <a:tailEnd type="none" w="med" len="med"/>
+                    </a:lnB>
+                  </a:tcPr>
+                </a:tc>
+              </a:tr>
+              <a:tr h="347472">
+                <a:tc>
+                  <a:txBody>
+                    <a:bodyPr/>
+                    <a:lstStyle/>
+                    <a:p>
+                      <a:pPr indent="0" marL="0">
+                        <a:buNone/>
+                      </a:pPr>
+                      <a:r>
+                        <a:rPr lang="en-US" sz="1100" b="1" dirty="0">
+                          <a:solidFill>
+                            <a:srgbClr val="00358F"/>
+                          </a:solidFill>
+                          <a:latin typeface="Pretendard" pitchFamily="34" charset="0"/>
+                          <a:ea typeface="Pretendard" pitchFamily="34" charset="-122"/>
+                          <a:cs typeface="Pretendard" pitchFamily="34" charset="-120"/>
+                        </a:rPr>
+                        <a:t>인구·돌봄</a:t>
+                      </a:r>
+                      <a:endParaRPr lang="en-US" sz="1100" dirty="0">
+                        <a:latin typeface="Pretendard" charset="0"/>
+                        <a:ea typeface="Pretendard" charset="0"/>
+                        <a:cs typeface="Pretendard" charset="0"/>
+                      </a:endParaRPr>
+                    </a:p>
+                  </a:txBody>
+                  <a:tcPr marL="73152" marR="73152" marT="36576" marB="36576" anchor="ctr">
+                    <a:lnL w="9525" cap="flat" cmpd="sng" algn="ctr">
+                      <a:solidFill>
+                        <a:srgbClr val="D9D9D9"/>
+                      </a:solidFill>
+                      <a:prstDash val="solid"/>
+                      <a:round/>
+                      <a:headEnd type="none" w="med" len="med"/>
+                      <a:tailEnd type="none" w="med" len="med"/>
+                    </a:lnL>
+                    <a:lnR w="9525" cap="flat" cmpd="sng" algn="ctr">
+                      <a:solidFill>
+                        <a:srgbClr val="D9D9D9"/>
+                      </a:solidFill>
+                      <a:prstDash val="solid"/>
+                      <a:round/>
+                      <a:headEnd type="none" w="med" len="med"/>
+                      <a:tailEnd type="none" w="med" len="med"/>
+                    </a:lnR>
+                    <a:lnT w="9525" cap="flat" cmpd="sng" algn="ctr">
+                      <a:solidFill>
+                        <a:srgbClr val="D9D9D9"/>
+                      </a:solidFill>
+                      <a:prstDash val="solid"/>
+                      <a:round/>
+                      <a:headEnd type="none" w="med" len="med"/>
+                      <a:tailEnd type="none" w="med" len="med"/>
+                    </a:lnT>
+                    <a:lnB w="9525" cap="flat" cmpd="sng" algn="ctr">
+                      <a:solidFill>
+                        <a:srgbClr val="D9D9D9"/>
+                      </a:solidFill>
+                      <a:prstDash val="solid"/>
+                      <a:round/>
+                      <a:headEnd type="none" w="med" len="med"/>
+                      <a:tailEnd type="none" w="med" len="med"/>
+                    </a:lnB>
+                    <a:solidFill>
+                      <a:srgbClr val="F5F7FB"/>
+                    </a:solidFill>
+                  </a:tcPr>
+                </a:tc>
+                <a:tc>
+                  <a:txBody>
+                    <a:bodyPr/>
+                    <a:lstStyle/>
+                    <a:p>
+                      <a:pPr indent="0" marL="0">
+                        <a:buNone/>
+                      </a:pPr>
+                      <a:r>
+                        <a:rPr lang="en-US" sz="1100" dirty="0">
+                          <a:solidFill>
+                            <a:srgbClr val="222222"/>
+                          </a:solidFill>
+                          <a:latin typeface="Pretendard" pitchFamily="34" charset="0"/>
+                          <a:ea typeface="Pretendard" pitchFamily="34" charset="-122"/>
+                          <a:cs typeface="Pretendard" pitchFamily="34" charset="-120"/>
+                        </a:rPr>
+                        <a:t>매일신문 2025.5.8 「행복하고 건강한 노년, 인생 이모작」</a:t>
+                      </a:r>
+                      <a:endParaRPr lang="en-US" sz="1100" dirty="0">
+                        <a:latin typeface="Pretendard" charset="0"/>
+                        <a:ea typeface="Pretendard" charset="0"/>
+                        <a:cs typeface="Pretendard" charset="0"/>
+                      </a:endParaRPr>
+                    </a:p>
+                  </a:txBody>
+                  <a:tcPr marL="73152" marR="73152" marT="36576" marB="36576" anchor="ctr">
+                    <a:lnL w="9525" cap="flat" cmpd="sng" algn="ctr">
+                      <a:solidFill>
+                        <a:srgbClr val="D9D9D9"/>
+                      </a:solidFill>
+                      <a:prstDash val="solid"/>
+                      <a:round/>
+                      <a:headEnd type="none" w="med" len="med"/>
+                      <a:tailEnd type="none" w="med" len="med"/>
+                    </a:lnL>
+                    <a:lnR w="9525" cap="flat" cmpd="sng" algn="ctr">
+                      <a:solidFill>
+                        <a:srgbClr val="D9D9D9"/>
+                      </a:solidFill>
+                      <a:prstDash val="solid"/>
+                      <a:round/>
+                      <a:headEnd type="none" w="med" len="med"/>
+                      <a:tailEnd type="none" w="med" len="med"/>
+                    </a:lnR>
+                    <a:lnT w="9525" cap="flat" cmpd="sng" algn="ctr">
+                      <a:solidFill>
+                        <a:srgbClr val="D9D9D9"/>
+                      </a:solidFill>
+                      <a:prstDash val="solid"/>
+                      <a:round/>
+                      <a:headEnd type="none" w="med" len="med"/>
+                      <a:tailEnd type="none" w="med" len="med"/>
+                    </a:lnT>
+                    <a:lnB w="9525" cap="flat" cmpd="sng" algn="ctr">
+                      <a:solidFill>
+                        <a:srgbClr val="D9D9D9"/>
+                      </a:solidFill>
+                      <a:prstDash val="solid"/>
+                      <a:round/>
+                      <a:headEnd type="none" w="med" len="med"/>
+                      <a:tailEnd type="none" w="med" len="med"/>
+                    </a:lnB>
+                  </a:tcPr>
+                </a:tc>
+                <a:tc>
+                  <a:txBody>
+                    <a:bodyPr/>
+                    <a:lstStyle/>
+                    <a:p>
+                      <a:pPr indent="0" marL="0">
+                        <a:buNone/>
+                      </a:pPr>
+                      <a:r>
+                        <a:rPr lang="en-US" sz="1100" dirty="0">
+                          <a:solidFill>
+                            <a:srgbClr val="222222"/>
+                          </a:solidFill>
+                          <a:latin typeface="Pretendard" pitchFamily="34" charset="0"/>
+                          <a:ea typeface="Pretendard" pitchFamily="34" charset="-122"/>
+                          <a:cs typeface="Pretendard" pitchFamily="34" charset="-120"/>
+                        </a:rPr>
+                        <a:t>65세 이상 45.1%, 노인일자리, 비상벨</a:t>
+                      </a:r>
+                      <a:endParaRPr lang="en-US" sz="1100" dirty="0">
+                        <a:latin typeface="Pretendard" charset="0"/>
+                        <a:ea typeface="Pretendard" charset="0"/>
+                        <a:cs typeface="Pretendard" charset="0"/>
+                      </a:endParaRPr>
+                    </a:p>
+                  </a:txBody>
+                  <a:tcPr marL="73152" marR="73152" marT="36576" marB="36576" anchor="ctr">
+                    <a:lnL w="9525" cap="flat" cmpd="sng" algn="ctr">
+                      <a:solidFill>
+                        <a:srgbClr val="D9D9D9"/>
+                      </a:solidFill>
+                      <a:prstDash val="solid"/>
+                      <a:round/>
+                      <a:headEnd type="none" w="med" len="med"/>
+                      <a:tailEnd type="none" w="med" len="med"/>
+                    </a:lnL>
+                    <a:lnR w="9525" cap="flat" cmpd="sng" algn="ctr">
+                      <a:solidFill>
+                        <a:srgbClr val="D9D9D9"/>
+                      </a:solidFill>
+                      <a:prstDash val="solid"/>
+                      <a:round/>
+                      <a:headEnd type="none" w="med" len="med"/>
+                      <a:tailEnd type="none" w="med" len="med"/>
+                    </a:lnR>
+                    <a:lnT w="9525" cap="flat" cmpd="sng" algn="ctr">
+                      <a:solidFill>
+                        <a:srgbClr val="D9D9D9"/>
+                      </a:solidFill>
+                      <a:prstDash val="solid"/>
+                      <a:round/>
+                      <a:headEnd type="none" w="med" len="med"/>
+                      <a:tailEnd type="none" w="med" len="med"/>
+                    </a:lnT>
+                    <a:lnB w="9525" cap="flat" cmpd="sng" algn="ctr">
+                      <a:solidFill>
+                        <a:srgbClr val="D9D9D9"/>
+                      </a:solidFill>
+                      <a:prstDash val="solid"/>
+                      <a:round/>
+                      <a:headEnd type="none" w="med" len="med"/>
+                      <a:tailEnd type="none" w="med" len="med"/>
+                    </a:lnB>
+                  </a:tcPr>
+                </a:tc>
+              </a:tr>
+              <a:tr h="347472">
+                <a:tc>
+                  <a:txBody>
+                    <a:bodyPr/>
+                    <a:lstStyle/>
+                    <a:p>
+                      <a:pPr indent="0" marL="0">
+                        <a:buNone/>
+                      </a:pPr>
+                      <a:r>
+                        <a:rPr lang="en-US" sz="1100" b="1" dirty="0">
+                          <a:solidFill>
+                            <a:srgbClr val="00358F"/>
+                          </a:solidFill>
+                          <a:latin typeface="Pretendard" pitchFamily="34" charset="0"/>
+                          <a:ea typeface="Pretendard" pitchFamily="34" charset="-122"/>
+                          <a:cs typeface="Pretendard" pitchFamily="34" charset="-120"/>
+                        </a:rPr>
+                        <a:t>의료</a:t>
+                      </a:r>
+                      <a:endParaRPr lang="en-US" sz="1100" dirty="0">
+                        <a:latin typeface="Pretendard" charset="0"/>
+                        <a:ea typeface="Pretendard" charset="0"/>
+                        <a:cs typeface="Pretendard" charset="0"/>
+                      </a:endParaRPr>
+                    </a:p>
+                  </a:txBody>
+                  <a:tcPr marL="73152" marR="73152" marT="36576" marB="36576" anchor="ctr">
+                    <a:lnL w="9525" cap="flat" cmpd="sng" algn="ctr">
+                      <a:solidFill>
+                        <a:srgbClr val="D9D9D9"/>
+                      </a:solidFill>
+                      <a:prstDash val="solid"/>
+                      <a:round/>
+                      <a:headEnd type="none" w="med" len="med"/>
+                      <a:tailEnd type="none" w="med" len="med"/>
+                    </a:lnL>
+                    <a:lnR w="9525" cap="flat" cmpd="sng" algn="ctr">
+                      <a:solidFill>
+                        <a:srgbClr val="D9D9D9"/>
+                      </a:solidFill>
+                      <a:prstDash val="solid"/>
+                      <a:round/>
+                      <a:headEnd type="none" w="med" len="med"/>
+                      <a:tailEnd type="none" w="med" len="med"/>
+                    </a:lnR>
+                    <a:lnT w="9525" cap="flat" cmpd="sng" algn="ctr">
+                      <a:solidFill>
+                        <a:srgbClr val="D9D9D9"/>
+                      </a:solidFill>
+                      <a:prstDash val="solid"/>
+                      <a:round/>
+                      <a:headEnd type="none" w="med" len="med"/>
+                      <a:tailEnd type="none" w="med" len="med"/>
+                    </a:lnT>
+                    <a:lnB w="9525" cap="flat" cmpd="sng" algn="ctr">
+                      <a:solidFill>
+                        <a:srgbClr val="D9D9D9"/>
+                      </a:solidFill>
+                      <a:prstDash val="solid"/>
+                      <a:round/>
+                      <a:headEnd type="none" w="med" len="med"/>
+                      <a:tailEnd type="none" w="med" len="med"/>
+                    </a:lnB>
+                    <a:solidFill>
+                      <a:srgbClr val="F5F7FB"/>
+                    </a:solidFill>
+                  </a:tcPr>
+                </a:tc>
+                <a:tc>
+                  <a:txBody>
+                    <a:bodyPr/>
+                    <a:lstStyle/>
+                    <a:p>
+                      <a:pPr indent="0" marL="0">
+                        <a:buNone/>
+                      </a:pPr>
+                      <a:r>
+                        <a:rPr lang="en-US" sz="1100" dirty="0">
+                          <a:solidFill>
+                            <a:srgbClr val="222222"/>
+                          </a:solidFill>
+                          <a:latin typeface="Pretendard" pitchFamily="34" charset="0"/>
+                          <a:ea typeface="Pretendard" pitchFamily="34" charset="-122"/>
+                          <a:cs typeface="Pretendard" pitchFamily="34" charset="-120"/>
+                        </a:rPr>
+                        <a:t>뉴스1 2026.8.18(의료취약지 76곳), 경북매일 2026.7.20</a:t>
+                      </a:r>
+                      <a:endParaRPr lang="en-US" sz="1100" dirty="0">
+                        <a:latin typeface="Pretendard" charset="0"/>
+                        <a:ea typeface="Pretendard" charset="0"/>
+                        <a:cs typeface="Pretendard" charset="0"/>
+                      </a:endParaRPr>
+                    </a:p>
+                  </a:txBody>
+                  <a:tcPr marL="73152" marR="73152" marT="36576" marB="36576" anchor="ctr">
+                    <a:lnL w="9525" cap="flat" cmpd="sng" algn="ctr">
+                      <a:solidFill>
+                        <a:srgbClr val="D9D9D9"/>
+                      </a:solidFill>
+                      <a:prstDash val="solid"/>
+                      <a:round/>
+                      <a:headEnd type="none" w="med" len="med"/>
+                      <a:tailEnd type="none" w="med" len="med"/>
+                    </a:lnL>
+                    <a:lnR w="9525" cap="flat" cmpd="sng" algn="ctr">
+                      <a:solidFill>
+                        <a:srgbClr val="D9D9D9"/>
+                      </a:solidFill>
+                      <a:prstDash val="solid"/>
+                      <a:round/>
+                      <a:headEnd type="none" w="med" len="med"/>
+                      <a:tailEnd type="none" w="med" len="med"/>
+                    </a:lnR>
+                    <a:lnT w="9525" cap="flat" cmpd="sng" algn="ctr">
+                      <a:solidFill>
+                        <a:srgbClr val="D9D9D9"/>
+                      </a:solidFill>
+                      <a:prstDash val="solid"/>
+                      <a:round/>
+                      <a:headEnd type="none" w="med" len="med"/>
+                      <a:tailEnd type="none" w="med" len="med"/>
+                    </a:lnT>
+                    <a:lnB w="9525" cap="flat" cmpd="sng" algn="ctr">
+                      <a:solidFill>
+                        <a:srgbClr val="D9D9D9"/>
+                      </a:solidFill>
+                      <a:prstDash val="solid"/>
+                      <a:round/>
+                      <a:headEnd type="none" w="med" len="med"/>
+                      <a:tailEnd type="none" w="med" len="med"/>
+                    </a:lnB>
+                  </a:tcPr>
+                </a:tc>
+                <a:tc>
+                  <a:txBody>
+                    <a:bodyPr/>
+                    <a:lstStyle/>
+                    <a:p>
+                      <a:pPr indent="0" marL="0">
+                        <a:buNone/>
+                      </a:pPr>
+                      <a:r>
+                        <a:rPr lang="en-US" sz="1100" dirty="0">
+                          <a:solidFill>
+                            <a:srgbClr val="222222"/>
+                          </a:solidFill>
+                          <a:latin typeface="Pretendard" pitchFamily="34" charset="0"/>
+                          <a:ea typeface="Pretendard" pitchFamily="34" charset="-122"/>
+                          <a:cs typeface="Pretendard" pitchFamily="34" charset="-120"/>
+                        </a:rPr>
+                        <a:t>의료취약지, 병원 없는 면, 응급실</a:t>
+                      </a:r>
+                      <a:endParaRPr lang="en-US" sz="1100" dirty="0">
+                        <a:latin typeface="Pretendard" charset="0"/>
+                        <a:ea typeface="Pretendard" charset="0"/>
+                        <a:cs typeface="Pretendard" charset="0"/>
+                      </a:endParaRPr>
+                    </a:p>
+                  </a:txBody>
+                  <a:tcPr marL="73152" marR="73152" marT="36576" marB="36576" anchor="ctr">
+                    <a:lnL w="9525" cap="flat" cmpd="sng" algn="ctr">
+                      <a:solidFill>
+                        <a:srgbClr val="D9D9D9"/>
+                      </a:solidFill>
+                      <a:prstDash val="solid"/>
+                      <a:round/>
+                      <a:headEnd type="none" w="med" len="med"/>
+                      <a:tailEnd type="none" w="med" len="med"/>
+                    </a:lnL>
+                    <a:lnR w="9525" cap="flat" cmpd="sng" algn="ctr">
+                      <a:solidFill>
+                        <a:srgbClr val="D9D9D9"/>
+                      </a:solidFill>
+                      <a:prstDash val="solid"/>
+                      <a:round/>
+                      <a:headEnd type="none" w="med" len="med"/>
+                      <a:tailEnd type="none" w="med" len="med"/>
+                    </a:lnR>
+                    <a:lnT w="9525" cap="flat" cmpd="sng" algn="ctr">
+                      <a:solidFill>
+                        <a:srgbClr val="D9D9D9"/>
+                      </a:solidFill>
+                      <a:prstDash val="solid"/>
+                      <a:round/>
+                      <a:headEnd type="none" w="med" len="med"/>
+                      <a:tailEnd type="none" w="med" len="med"/>
+                    </a:lnT>
+                    <a:lnB w="9525" cap="flat" cmpd="sng" algn="ctr">
+                      <a:solidFill>
+                        <a:srgbClr val="D9D9D9"/>
+                      </a:solidFill>
+                      <a:prstDash val="solid"/>
+                      <a:round/>
+                      <a:headEnd type="none" w="med" len="med"/>
+                      <a:tailEnd type="none" w="med" len="med"/>
+                    </a:lnB>
+                  </a:tcPr>
+                </a:tc>
+              </a:tr>
+              <a:tr h="347472">
+                <a:tc>
+                  <a:txBody>
+                    <a:bodyPr/>
+                    <a:lstStyle/>
+                    <a:p>
+                      <a:pPr indent="0" marL="0">
+                        <a:buNone/>
+                      </a:pPr>
+                      <a:r>
+                        <a:rPr lang="en-US" sz="1100" b="1" dirty="0">
+                          <a:solidFill>
+                            <a:srgbClr val="00358F"/>
+                          </a:solidFill>
+                          <a:latin typeface="Pretendard" pitchFamily="34" charset="0"/>
+                          <a:ea typeface="Pretendard" pitchFamily="34" charset="-122"/>
+                          <a:cs typeface="Pretendard" pitchFamily="34" charset="-120"/>
+                        </a:rPr>
+                        <a:t>의료</a:t>
+                      </a:r>
+                      <a:endParaRPr lang="en-US" sz="1100" dirty="0">
+                        <a:latin typeface="Pretendard" charset="0"/>
+                        <a:ea typeface="Pretendard" charset="0"/>
+                        <a:cs typeface="Pretendard" charset="0"/>
+                      </a:endParaRPr>
+                    </a:p>
+                  </a:txBody>
+                  <a:tcPr marL="73152" marR="73152" marT="36576" marB="36576" anchor="ctr">
+                    <a:lnL w="9525" cap="flat" cmpd="sng" algn="ctr">
+                      <a:solidFill>
+                        <a:srgbClr val="D9D9D9"/>
+                      </a:solidFill>
+                      <a:prstDash val="solid"/>
+                      <a:round/>
+                      <a:headEnd type="none" w="med" len="med"/>
+                      <a:tailEnd type="none" w="med" len="med"/>
+                    </a:lnL>
+                    <a:lnR w="9525" cap="flat" cmpd="sng" algn="ctr">
+                      <a:solidFill>
+                        <a:srgbClr val="D9D9D9"/>
+                      </a:solidFill>
+                      <a:prstDash val="solid"/>
+                      <a:round/>
+                      <a:headEnd type="none" w="med" len="med"/>
+                      <a:tailEnd type="none" w="med" len="med"/>
+                    </a:lnR>
+                    <a:lnT w="9525" cap="flat" cmpd="sng" algn="ctr">
+                      <a:solidFill>
+                        <a:srgbClr val="D9D9D9"/>
+                      </a:solidFill>
+                      <a:prstDash val="solid"/>
+                      <a:round/>
+                      <a:headEnd type="none" w="med" len="med"/>
+                      <a:tailEnd type="none" w="med" len="med"/>
+                    </a:lnT>
+                    <a:lnB w="9525" cap="flat" cmpd="sng" algn="ctr">
+                      <a:solidFill>
+                        <a:srgbClr val="D9D9D9"/>
+                      </a:solidFill>
+                      <a:prstDash val="solid"/>
+                      <a:round/>
+                      <a:headEnd type="none" w="med" len="med"/>
+                      <a:tailEnd type="none" w="med" len="med"/>
+                    </a:lnB>
+                    <a:solidFill>
+                      <a:srgbClr val="F5F7FB"/>
+                    </a:solidFill>
+                  </a:tcPr>
+                </a:tc>
+                <a:tc>
+                  <a:txBody>
+                    <a:bodyPr/>
+                    <a:lstStyle/>
+                    <a:p>
+                      <a:pPr indent="0" marL="0">
+                        <a:buNone/>
+                      </a:pPr>
+                      <a:r>
+                        <a:rPr lang="en-US" sz="1100" dirty="0">
+                          <a:solidFill>
+                            <a:srgbClr val="222222"/>
+                          </a:solidFill>
+                          <a:latin typeface="Pretendard" pitchFamily="34" charset="0"/>
+                          <a:ea typeface="Pretendard" pitchFamily="34" charset="-122"/>
+                          <a:cs typeface="Pretendard" pitchFamily="34" charset="-120"/>
+                        </a:rPr>
+                        <a:t>공공데이터포털 「청도군_집단급식소 운영 병원」(2026.6.8)</a:t>
+                      </a:r>
+                      <a:endParaRPr lang="en-US" sz="1100" dirty="0">
+                        <a:latin typeface="Pretendard" charset="0"/>
+                        <a:ea typeface="Pretendard" charset="0"/>
+                        <a:cs typeface="Pretendard" charset="0"/>
+                      </a:endParaRPr>
+                    </a:p>
+                  </a:txBody>
+                  <a:tcPr marL="73152" marR="73152" marT="36576" marB="36576" anchor="ctr">
+                    <a:lnL w="9525" cap="flat" cmpd="sng" algn="ctr">
+                      <a:solidFill>
+                        <a:srgbClr val="D9D9D9"/>
+                      </a:solidFill>
+                      <a:prstDash val="solid"/>
+                      <a:round/>
+                      <a:headEnd type="none" w="med" len="med"/>
+                      <a:tailEnd type="none" w="med" len="med"/>
+                    </a:lnL>
+                    <a:lnR w="9525" cap="flat" cmpd="sng" algn="ctr">
+                      <a:solidFill>
+                        <a:srgbClr val="D9D9D9"/>
+                      </a:solidFill>
+                      <a:prstDash val="solid"/>
+                      <a:round/>
+                      <a:headEnd type="none" w="med" len="med"/>
+                      <a:tailEnd type="none" w="med" len="med"/>
+                    </a:lnR>
+                    <a:lnT w="9525" cap="flat" cmpd="sng" algn="ctr">
+                      <a:solidFill>
+                        <a:srgbClr val="D9D9D9"/>
+                      </a:solidFill>
+                      <a:prstDash val="solid"/>
+                      <a:round/>
+                      <a:headEnd type="none" w="med" len="med"/>
+                      <a:tailEnd type="none" w="med" len="med"/>
+                    </a:lnT>
+                    <a:lnB w="9525" cap="flat" cmpd="sng" algn="ctr">
+                      <a:solidFill>
+                        <a:srgbClr val="D9D9D9"/>
+                      </a:solidFill>
+                      <a:prstDash val="solid"/>
+                      <a:round/>
+                      <a:headEnd type="none" w="med" len="med"/>
+                      <a:tailEnd type="none" w="med" len="med"/>
+                    </a:lnB>
+                  </a:tcPr>
+                </a:tc>
+                <a:tc>
+                  <a:txBody>
+                    <a:bodyPr/>
+                    <a:lstStyle/>
+                    <a:p>
+                      <a:pPr indent="0" marL="0">
+                        <a:buNone/>
+                      </a:pPr>
+                      <a:r>
+                        <a:rPr lang="en-US" sz="1100" dirty="0">
+                          <a:solidFill>
+                            <a:srgbClr val="222222"/>
+                          </a:solidFill>
+                          <a:latin typeface="Pretendard" pitchFamily="34" charset="0"/>
+                          <a:ea typeface="Pretendard" pitchFamily="34" charset="-122"/>
+                          <a:cs typeface="Pretendard" pitchFamily="34" charset="-120"/>
+                        </a:rPr>
+                        <a:t>병원 현황·응급실 병상</a:t>
+                      </a:r>
+                      <a:endParaRPr lang="en-US" sz="1100" dirty="0">
+                        <a:latin typeface="Pretendard" charset="0"/>
+                        <a:ea typeface="Pretendard" charset="0"/>
+                        <a:cs typeface="Pretendard" charset="0"/>
+                      </a:endParaRPr>
+                    </a:p>
+                  </a:txBody>
+                  <a:tcPr marL="73152" marR="73152" marT="36576" marB="36576" anchor="ctr">
+                    <a:lnL w="9525" cap="flat" cmpd="sng" algn="ctr">
+                      <a:solidFill>
+                        <a:srgbClr val="D9D9D9"/>
+                      </a:solidFill>
+                      <a:prstDash val="solid"/>
+                      <a:round/>
+                      <a:headEnd type="none" w="med" len="med"/>
+                      <a:tailEnd type="none" w="med" len="med"/>
+                    </a:lnL>
+                    <a:lnR w="9525" cap="flat" cmpd="sng" algn="ctr">
+                      <a:solidFill>
+                        <a:srgbClr val="D9D9D9"/>
+                      </a:solidFill>
+                      <a:prstDash val="solid"/>
+                      <a:round/>
+                      <a:headEnd type="none" w="med" len="med"/>
+                      <a:tailEnd type="none" w="med" len="med"/>
+                    </a:lnR>
+                    <a:lnT w="9525" cap="flat" cmpd="sng" algn="ctr">
+                      <a:solidFill>
+                        <a:srgbClr val="D9D9D9"/>
+                      </a:solidFill>
+                      <a:prstDash val="solid"/>
+                      <a:round/>
+                      <a:headEnd type="none" w="med" len="med"/>
+                      <a:tailEnd type="none" w="med" len="med"/>
+                    </a:lnT>
+                    <a:lnB w="9525" cap="flat" cmpd="sng" algn="ctr">
+                      <a:solidFill>
+                        <a:srgbClr val="D9D9D9"/>
+                      </a:solidFill>
+                      <a:prstDash val="solid"/>
+                      <a:round/>
+                      <a:headEnd type="none" w="med" len="med"/>
+                      <a:tailEnd type="none" w="med" len="med"/>
+                    </a:lnB>
+                  </a:tcPr>
+                </a:tc>
+              </a:tr>
+              <a:tr h="347472">
+                <a:tc>
+                  <a:txBody>
+                    <a:bodyPr/>
+                    <a:lstStyle/>
+                    <a:p>
+                      <a:pPr indent="0" marL="0">
+                        <a:buNone/>
+                      </a:pPr>
+                      <a:r>
+                        <a:rPr lang="en-US" sz="1100" b="1" dirty="0">
+                          <a:solidFill>
+                            <a:srgbClr val="00358F"/>
+                          </a:solidFill>
+                          <a:latin typeface="Pretendard" pitchFamily="34" charset="0"/>
+                          <a:ea typeface="Pretendard" pitchFamily="34" charset="-122"/>
+                          <a:cs typeface="Pretendard" pitchFamily="34" charset="-120"/>
+                        </a:rPr>
+                        <a:t>관광</a:t>
+                      </a:r>
+                      <a:endParaRPr lang="en-US" sz="1100" dirty="0">
+                        <a:latin typeface="Pretendard" charset="0"/>
+                        <a:ea typeface="Pretendard" charset="0"/>
+                        <a:cs typeface="Pretendard" charset="0"/>
+                      </a:endParaRPr>
+                    </a:p>
+                  </a:txBody>
+                  <a:tcPr marL="73152" marR="73152" marT="36576" marB="36576" anchor="ctr">
+                    <a:lnL w="9525" cap="flat" cmpd="sng" algn="ctr">
+                      <a:solidFill>
+                        <a:srgbClr val="D9D9D9"/>
+                      </a:solidFill>
+                      <a:prstDash val="solid"/>
+                      <a:round/>
+                      <a:headEnd type="none" w="med" len="med"/>
+                      <a:tailEnd type="none" w="med" len="med"/>
+                    </a:lnL>
+                    <a:lnR w="9525" cap="flat" cmpd="sng" algn="ctr">
+                      <a:solidFill>
+                        <a:srgbClr val="D9D9D9"/>
+                      </a:solidFill>
+                      <a:prstDash val="solid"/>
+                      <a:round/>
+                      <a:headEnd type="none" w="med" len="med"/>
+                      <a:tailEnd type="none" w="med" len="med"/>
+                    </a:lnR>
+                    <a:lnT w="9525" cap="flat" cmpd="sng" algn="ctr">
+                      <a:solidFill>
+                        <a:srgbClr val="D9D9D9"/>
+                      </a:solidFill>
+                      <a:prstDash val="solid"/>
+                      <a:round/>
+                      <a:headEnd type="none" w="med" len="med"/>
+                      <a:tailEnd type="none" w="med" len="med"/>
+                    </a:lnT>
+                    <a:lnB w="9525" cap="flat" cmpd="sng" algn="ctr">
+                      <a:solidFill>
+                        <a:srgbClr val="D9D9D9"/>
+                      </a:solidFill>
+                      <a:prstDash val="solid"/>
+                      <a:round/>
+                      <a:headEnd type="none" w="med" len="med"/>
+                      <a:tailEnd type="none" w="med" len="med"/>
+                    </a:lnB>
+                    <a:solidFill>
+                      <a:srgbClr val="F5F7FB"/>
+                    </a:solidFill>
+                  </a:tcPr>
+                </a:tc>
+                <a:tc>
+                  <a:txBody>
+                    <a:bodyPr/>
+                    <a:lstStyle/>
+                    <a:p>
+                      <a:pPr indent="0" marL="0">
+                        <a:buNone/>
+                      </a:pPr>
+                      <a:r>
+                        <a:rPr lang="en-US" sz="1100" dirty="0">
+                          <a:solidFill>
+                            <a:srgbClr val="222222"/>
+                          </a:solidFill>
+                          <a:latin typeface="Pretendard" pitchFamily="34" charset="0"/>
+                          <a:ea typeface="Pretendard" pitchFamily="34" charset="-122"/>
+                          <a:cs typeface="Pretendard" pitchFamily="34" charset="-120"/>
+                        </a:rPr>
+                        <a:t>경북매일 2026.5.26, 청도군 통합예약시스템 관광택시 화면(2026.10.24)</a:t>
+                      </a:r>
+                      <a:endParaRPr lang="en-US" sz="1100" dirty="0">
+                        <a:latin typeface="Pretendard" charset="0"/>
+                        <a:ea typeface="Pretendard" charset="0"/>
+                        <a:cs typeface="Pretendard" charset="0"/>
+                      </a:endParaRPr>
+                    </a:p>
+                  </a:txBody>
+                  <a:tcPr marL="73152" marR="73152" marT="36576" marB="36576" anchor="ctr">
+                    <a:lnL w="9525" cap="flat" cmpd="sng" algn="ctr">
+                      <a:solidFill>
+                        <a:srgbClr val="D9D9D9"/>
+                      </a:solidFill>
+                      <a:prstDash val="solid"/>
+                      <a:round/>
+                      <a:headEnd type="none" w="med" len="med"/>
+                      <a:tailEnd type="none" w="med" len="med"/>
+                    </a:lnL>
+                    <a:lnR w="9525" cap="flat" cmpd="sng" algn="ctr">
+                      <a:solidFill>
+                        <a:srgbClr val="D9D9D9"/>
+                      </a:solidFill>
+                      <a:prstDash val="solid"/>
+                      <a:round/>
+                      <a:headEnd type="none" w="med" len="med"/>
+                      <a:tailEnd type="none" w="med" len="med"/>
+                    </a:lnR>
+                    <a:lnT w="9525" cap="flat" cmpd="sng" algn="ctr">
+                      <a:solidFill>
+                        <a:srgbClr val="D9D9D9"/>
+                      </a:solidFill>
+                      <a:prstDash val="solid"/>
+                      <a:round/>
+                      <a:headEnd type="none" w="med" len="med"/>
+                      <a:tailEnd type="none" w="med" len="med"/>
+                    </a:lnT>
+                    <a:lnB w="9525" cap="flat" cmpd="sng" algn="ctr">
+                      <a:solidFill>
+                        <a:srgbClr val="D9D9D9"/>
+                      </a:solidFill>
+                      <a:prstDash val="solid"/>
+                      <a:round/>
+                      <a:headEnd type="none" w="med" len="med"/>
+                      <a:tailEnd type="none" w="med" len="med"/>
+                    </a:lnB>
+                  </a:tcPr>
+                </a:tc>
+                <a:tc>
+                  <a:txBody>
+                    <a:bodyPr/>
+                    <a:lstStyle/>
+                    <a:p>
+                      <a:pPr indent="0" marL="0">
+                        <a:buNone/>
+                      </a:pPr>
+                      <a:r>
+                        <a:rPr lang="en-US" sz="1100" dirty="0">
+                          <a:solidFill>
+                            <a:srgbClr val="222222"/>
+                          </a:solidFill>
+                          <a:latin typeface="Pretendard" pitchFamily="34" charset="0"/>
+                          <a:ea typeface="Pretendard" pitchFamily="34" charset="-122"/>
+                          <a:cs typeface="Pretendard" pitchFamily="34" charset="-120"/>
+                        </a:rPr>
+                        <a:t>관광주민증, 관광택시</a:t>
+                      </a:r>
+                      <a:endParaRPr lang="en-US" sz="1100" dirty="0">
+                        <a:latin typeface="Pretendard" charset="0"/>
+                        <a:ea typeface="Pretendard" charset="0"/>
+                        <a:cs typeface="Pretendard" charset="0"/>
+                      </a:endParaRPr>
+                    </a:p>
+                  </a:txBody>
+                  <a:tcPr marL="73152" marR="73152" marT="36576" marB="36576" anchor="ctr">
+                    <a:lnL w="9525" cap="flat" cmpd="sng" algn="ctr">
+                      <a:solidFill>
+                        <a:srgbClr val="D9D9D9"/>
+                      </a:solidFill>
+                      <a:prstDash val="solid"/>
+                      <a:round/>
+                      <a:headEnd type="none" w="med" len="med"/>
+                      <a:tailEnd type="none" w="med" len="med"/>
+                    </a:lnL>
+                    <a:lnR w="9525" cap="flat" cmpd="sng" algn="ctr">
+                      <a:solidFill>
+                        <a:srgbClr val="D9D9D9"/>
+                      </a:solidFill>
+                      <a:prstDash val="solid"/>
+                      <a:round/>
+                      <a:headEnd type="none" w="med" len="med"/>
+                      <a:tailEnd type="none" w="med" len="med"/>
+                    </a:lnR>
+                    <a:lnT w="9525" cap="flat" cmpd="sng" algn="ctr">
+                      <a:solidFill>
+                        <a:srgbClr val="D9D9D9"/>
+                      </a:solidFill>
+                      <a:prstDash val="solid"/>
+                      <a:round/>
+                      <a:headEnd type="none" w="med" len="med"/>
+                      <a:tailEnd type="none" w="med" len="med"/>
+                    </a:lnT>
+                    <a:lnB w="9525" cap="flat" cmpd="sng" algn="ctr">
+                      <a:solidFill>
+                        <a:srgbClr val="D9D9D9"/>
+                      </a:solidFill>
+                      <a:prstDash val="solid"/>
+                      <a:round/>
+                      <a:headEnd type="none" w="med" len="med"/>
+                      <a:tailEnd type="none" w="med" len="med"/>
+                    </a:lnB>
+                  </a:tcPr>
+                </a:tc>
+              </a:tr>
+              <a:tr h="347472">
+                <a:tc>
+                  <a:txBody>
+                    <a:bodyPr/>
+                    <a:lstStyle/>
+                    <a:p>
+                      <a:pPr indent="0" marL="0">
+                        <a:buNone/>
+                      </a:pPr>
+                      <a:r>
+                        <a:rPr lang="en-US" sz="1100" b="1" dirty="0">
+                          <a:solidFill>
+                            <a:srgbClr val="00358F"/>
+                          </a:solidFill>
+                          <a:latin typeface="Pretendard" pitchFamily="34" charset="0"/>
+                          <a:ea typeface="Pretendard" pitchFamily="34" charset="-122"/>
+                          <a:cs typeface="Pretendard" pitchFamily="34" charset="-120"/>
+                        </a:rPr>
+                        <a:t>관광</a:t>
+                      </a:r>
+                      <a:endParaRPr lang="en-US" sz="1100" dirty="0">
+                        <a:latin typeface="Pretendard" charset="0"/>
+                        <a:ea typeface="Pretendard" charset="0"/>
+                        <a:cs typeface="Pretendard" charset="0"/>
+                      </a:endParaRPr>
+                    </a:p>
+                  </a:txBody>
+                  <a:tcPr marL="73152" marR="73152" marT="36576" marB="36576" anchor="ctr">
+                    <a:lnL w="9525" cap="flat" cmpd="sng" algn="ctr">
+                      <a:solidFill>
+                        <a:srgbClr val="D9D9D9"/>
+                      </a:solidFill>
+                      <a:prstDash val="solid"/>
+                      <a:round/>
+                      <a:headEnd type="none" w="med" len="med"/>
+                      <a:tailEnd type="none" w="med" len="med"/>
+                    </a:lnL>
+                    <a:lnR w="9525" cap="flat" cmpd="sng" algn="ctr">
+                      <a:solidFill>
+                        <a:srgbClr val="D9D9D9"/>
+                      </a:solidFill>
+                      <a:prstDash val="solid"/>
+                      <a:round/>
+                      <a:headEnd type="none" w="med" len="med"/>
+                      <a:tailEnd type="none" w="med" len="med"/>
+                    </a:lnR>
+                    <a:lnT w="9525" cap="flat" cmpd="sng" algn="ctr">
+                      <a:solidFill>
+                        <a:srgbClr val="D9D9D9"/>
+                      </a:solidFill>
+                      <a:prstDash val="solid"/>
+                      <a:round/>
+                      <a:headEnd type="none" w="med" len="med"/>
+                      <a:tailEnd type="none" w="med" len="med"/>
+                    </a:lnT>
+                    <a:lnB w="9525" cap="flat" cmpd="sng" algn="ctr">
+                      <a:solidFill>
+                        <a:srgbClr val="D9D9D9"/>
+                      </a:solidFill>
+                      <a:prstDash val="solid"/>
+                      <a:round/>
+                      <a:headEnd type="none" w="med" len="med"/>
+                      <a:tailEnd type="none" w="med" len="med"/>
+                    </a:lnB>
+                    <a:solidFill>
+                      <a:srgbClr val="F5F7FB"/>
+                    </a:solidFill>
+                  </a:tcPr>
+                </a:tc>
+                <a:tc>
+                  <a:txBody>
+                    <a:bodyPr/>
+                    <a:lstStyle/>
+                    <a:p>
+                      <a:pPr indent="0" marL="0">
+                        <a:buNone/>
+                      </a:pPr>
+                      <a:r>
+                        <a:rPr lang="en-US" sz="1100" dirty="0">
+                          <a:solidFill>
+                            <a:srgbClr val="222222"/>
+                          </a:solidFill>
+                          <a:latin typeface="Pretendard" pitchFamily="34" charset="0"/>
+                          <a:ea typeface="Pretendard" pitchFamily="34" charset="-122"/>
+                          <a:cs typeface="Pretendard" pitchFamily="34" charset="-120"/>
+                        </a:rPr>
+                        <a:t>경북매일 2026.10.7(생활인구) — 원문 링크 재확인 필요</a:t>
+                      </a:r>
+                      <a:endParaRPr lang="en-US" sz="1100" dirty="0">
+                        <a:latin typeface="Pretendard" charset="0"/>
+                        <a:ea typeface="Pretendard" charset="0"/>
+                        <a:cs typeface="Pretendard" charset="0"/>
+                      </a:endParaRPr>
+                    </a:p>
+                  </a:txBody>
+                  <a:tcPr marL="73152" marR="73152" marT="36576" marB="36576" anchor="ctr">
+                    <a:lnL w="9525" cap="flat" cmpd="sng" algn="ctr">
+                      <a:solidFill>
+                        <a:srgbClr val="D9D9D9"/>
+                      </a:solidFill>
+                      <a:prstDash val="solid"/>
+                      <a:round/>
+                      <a:headEnd type="none" w="med" len="med"/>
+                      <a:tailEnd type="none" w="med" len="med"/>
+                    </a:lnL>
+                    <a:lnR w="9525" cap="flat" cmpd="sng" algn="ctr">
+                      <a:solidFill>
+                        <a:srgbClr val="D9D9D9"/>
+                      </a:solidFill>
+                      <a:prstDash val="solid"/>
+                      <a:round/>
+                      <a:headEnd type="none" w="med" len="med"/>
+                      <a:tailEnd type="none" w="med" len="med"/>
+                    </a:lnR>
+                    <a:lnT w="9525" cap="flat" cmpd="sng" algn="ctr">
+                      <a:solidFill>
+                        <a:srgbClr val="D9D9D9"/>
+                      </a:solidFill>
+                      <a:prstDash val="solid"/>
+                      <a:round/>
+                      <a:headEnd type="none" w="med" len="med"/>
+                      <a:tailEnd type="none" w="med" len="med"/>
+                    </a:lnT>
+                    <a:lnB w="9525" cap="flat" cmpd="sng" algn="ctr">
+                      <a:solidFill>
+                        <a:srgbClr val="D9D9D9"/>
+                      </a:solidFill>
+                      <a:prstDash val="solid"/>
+                      <a:round/>
+                      <a:headEnd type="none" w="med" len="med"/>
+                      <a:tailEnd type="none" w="med" len="med"/>
+                    </a:lnB>
+                  </a:tcPr>
+                </a:tc>
+                <a:tc>
+                  <a:txBody>
+                    <a:bodyPr/>
+                    <a:lstStyle/>
+                    <a:p>
+                      <a:pPr indent="0" marL="0">
+                        <a:buNone/>
+                      </a:pPr>
+                      <a:r>
+                        <a:rPr lang="en-US" sz="1100" dirty="0">
+                          <a:solidFill>
+                            <a:srgbClr val="222222"/>
+                          </a:solidFill>
+                          <a:latin typeface="Pretendard" pitchFamily="34" charset="0"/>
+                          <a:ea typeface="Pretendard" pitchFamily="34" charset="-122"/>
+                          <a:cs typeface="Pretendard" pitchFamily="34" charset="-120"/>
+                        </a:rPr>
+                        <a:t>생활인구 34.4만</a:t>
+                      </a:r>
+                      <a:endParaRPr lang="en-US" sz="1100" dirty="0">
+                        <a:latin typeface="Pretendard" charset="0"/>
+                        <a:ea typeface="Pretendard" charset="0"/>
+                        <a:cs typeface="Pretendard" charset="0"/>
+                      </a:endParaRPr>
+                    </a:p>
+                  </a:txBody>
+                  <a:tcPr marL="73152" marR="73152" marT="36576" marB="36576" anchor="ctr">
+                    <a:lnL w="9525" cap="flat" cmpd="sng" algn="ctr">
+                      <a:solidFill>
+                        <a:srgbClr val="D9D9D9"/>
+                      </a:solidFill>
+                      <a:prstDash val="solid"/>
+                      <a:round/>
+                      <a:headEnd type="none" w="med" len="med"/>
+                      <a:tailEnd type="none" w="med" len="med"/>
+                    </a:lnL>
+                    <a:lnR w="9525" cap="flat" cmpd="sng" algn="ctr">
+                      <a:solidFill>
+                        <a:srgbClr val="D9D9D9"/>
+                      </a:solidFill>
+                      <a:prstDash val="solid"/>
+                      <a:round/>
+                      <a:headEnd type="none" w="med" len="med"/>
+                      <a:tailEnd type="none" w="med" len="med"/>
+                    </a:lnR>
+                    <a:lnT w="9525" cap="flat" cmpd="sng" algn="ctr">
+                      <a:solidFill>
+                        <a:srgbClr val="D9D9D9"/>
+                      </a:solidFill>
+                      <a:prstDash val="solid"/>
+                      <a:round/>
+                      <a:headEnd type="none" w="med" len="med"/>
+                      <a:tailEnd type="none" w="med" len="med"/>
+                    </a:lnT>
+                    <a:lnB w="9525" cap="flat" cmpd="sng" algn="ctr">
+                      <a:solidFill>
+                        <a:srgbClr val="D9D9D9"/>
+                      </a:solidFill>
+                      <a:prstDash val="solid"/>
+                      <a:round/>
+                      <a:headEnd type="none" w="med" len="med"/>
+                      <a:tailEnd type="none" w="med" len="med"/>
+                    </a:lnB>
+                  </a:tcPr>
+                </a:tc>
+              </a:tr>
+              <a:tr h="347472">
+                <a:tc>
+                  <a:txBody>
+                    <a:bodyPr/>
+                    <a:lstStyle/>
+                    <a:p>
+                      <a:pPr indent="0" marL="0">
+                        <a:buNone/>
+                      </a:pPr>
+                      <a:r>
+                        <a:rPr lang="en-US" sz="1100" b="1" dirty="0">
+                          <a:solidFill>
+                            <a:srgbClr val="00358F"/>
+                          </a:solidFill>
+                          <a:latin typeface="Pretendard" pitchFamily="34" charset="0"/>
+                          <a:ea typeface="Pretendard" pitchFamily="34" charset="-122"/>
+                          <a:cs typeface="Pretendard" pitchFamily="34" charset="-120"/>
+                        </a:rPr>
+                        <a:t>교통</a:t>
+                      </a:r>
+                      <a:endParaRPr lang="en-US" sz="1100" dirty="0">
+                        <a:latin typeface="Pretendard" charset="0"/>
+                        <a:ea typeface="Pretendard" charset="0"/>
+                        <a:cs typeface="Pretendard" charset="0"/>
+                      </a:endParaRPr>
+                    </a:p>
+                  </a:txBody>
+                  <a:tcPr marL="73152" marR="73152" marT="36576" marB="36576" anchor="ctr">
+                    <a:lnL w="9525" cap="flat" cmpd="sng" algn="ctr">
+                      <a:solidFill>
+                        <a:srgbClr val="D9D9D9"/>
+                      </a:solidFill>
+                      <a:prstDash val="solid"/>
+                      <a:round/>
+                      <a:headEnd type="none" w="med" len="med"/>
+                      <a:tailEnd type="none" w="med" len="med"/>
+                    </a:lnL>
+                    <a:lnR w="9525" cap="flat" cmpd="sng" algn="ctr">
+                      <a:solidFill>
+                        <a:srgbClr val="D9D9D9"/>
+                      </a:solidFill>
+                      <a:prstDash val="solid"/>
+                      <a:round/>
+                      <a:headEnd type="none" w="med" len="med"/>
+                      <a:tailEnd type="none" w="med" len="med"/>
+                    </a:lnR>
+                    <a:lnT w="9525" cap="flat" cmpd="sng" algn="ctr">
+                      <a:solidFill>
+                        <a:srgbClr val="D9D9D9"/>
+                      </a:solidFill>
+                      <a:prstDash val="solid"/>
+                      <a:round/>
+                      <a:headEnd type="none" w="med" len="med"/>
+                      <a:tailEnd type="none" w="med" len="med"/>
+                    </a:lnT>
+                    <a:lnB w="9525" cap="flat" cmpd="sng" algn="ctr">
+                      <a:solidFill>
+                        <a:srgbClr val="D9D9D9"/>
+                      </a:solidFill>
+                      <a:prstDash val="solid"/>
+                      <a:round/>
+                      <a:headEnd type="none" w="med" len="med"/>
+                      <a:tailEnd type="none" w="med" len="med"/>
+                    </a:lnB>
+                    <a:solidFill>
+                      <a:srgbClr val="F5F7FB"/>
+                    </a:solidFill>
+                  </a:tcPr>
+                </a:tc>
+                <a:tc>
+                  <a:txBody>
+                    <a:bodyPr/>
+                    <a:lstStyle/>
+                    <a:p>
+                      <a:pPr indent="0" marL="0">
+                        <a:buNone/>
+                      </a:pPr>
+                      <a:r>
+                        <a:rPr lang="en-US" sz="1100" dirty="0">
+                          <a:solidFill>
+                            <a:srgbClr val="222222"/>
+                          </a:solidFill>
+                          <a:latin typeface="Pretendard" pitchFamily="34" charset="0"/>
+                          <a:ea typeface="Pretendard" pitchFamily="34" charset="-122"/>
+                          <a:cs typeface="Pretendard" pitchFamily="34" charset="-120"/>
+                        </a:rPr>
+                        <a:t>공공데이터포털 「청도군_버스정류장 현황」(2025.8.28), 헤럴드경제 2026.8.2, 한국관광공사 관광정보</a:t>
+                      </a:r>
+                      <a:endParaRPr lang="en-US" sz="1100" dirty="0">
+                        <a:latin typeface="Pretendard" charset="0"/>
+                        <a:ea typeface="Pretendard" charset="0"/>
+                        <a:cs typeface="Pretendard" charset="0"/>
+                      </a:endParaRPr>
+                    </a:p>
+                  </a:txBody>
+                  <a:tcPr marL="73152" marR="73152" marT="36576" marB="36576" anchor="ctr">
+                    <a:lnL w="9525" cap="flat" cmpd="sng" algn="ctr">
+                      <a:solidFill>
+                        <a:srgbClr val="D9D9D9"/>
+                      </a:solidFill>
+                      <a:prstDash val="solid"/>
+                      <a:round/>
+                      <a:headEnd type="none" w="med" len="med"/>
+                      <a:tailEnd type="none" w="med" len="med"/>
+                    </a:lnL>
+                    <a:lnR w="9525" cap="flat" cmpd="sng" algn="ctr">
+                      <a:solidFill>
+                        <a:srgbClr val="D9D9D9"/>
+                      </a:solidFill>
+                      <a:prstDash val="solid"/>
+                      <a:round/>
+                      <a:headEnd type="none" w="med" len="med"/>
+                      <a:tailEnd type="none" w="med" len="med"/>
+                    </a:lnR>
+                    <a:lnT w="9525" cap="flat" cmpd="sng" algn="ctr">
+                      <a:solidFill>
+                        <a:srgbClr val="D9D9D9"/>
+                      </a:solidFill>
+                      <a:prstDash val="solid"/>
+                      <a:round/>
+                      <a:headEnd type="none" w="med" len="med"/>
+                      <a:tailEnd type="none" w="med" len="med"/>
+                    </a:lnT>
+                    <a:lnB w="9525" cap="flat" cmpd="sng" algn="ctr">
+                      <a:solidFill>
+                        <a:srgbClr val="D9D9D9"/>
+                      </a:solidFill>
+                      <a:prstDash val="solid"/>
+                      <a:round/>
+                      <a:headEnd type="none" w="med" len="med"/>
+                      <a:tailEnd type="none" w="med" len="med"/>
+                    </a:lnB>
+                  </a:tcPr>
+                </a:tc>
+                <a:tc>
+                  <a:txBody>
+                    <a:bodyPr/>
+                    <a:lstStyle/>
+                    <a:p>
+                      <a:pPr indent="0" marL="0">
+                        <a:buNone/>
+                      </a:pPr>
+                      <a:r>
+                        <a:rPr lang="en-US" sz="1100" dirty="0">
+                          <a:solidFill>
+                            <a:srgbClr val="222222"/>
+                          </a:solidFill>
+                          <a:latin typeface="Pretendard" pitchFamily="34" charset="0"/>
+                          <a:ea typeface="Pretendard" pitchFamily="34" charset="-122"/>
+                          <a:cs typeface="Pretendard" pitchFamily="34" charset="-120"/>
+                        </a:rPr>
+                        <a:t>정류장 수, 병원까지 시간(추정), 호출 앱, 행사장</a:t>
+                      </a:r>
+                      <a:endParaRPr lang="en-US" sz="1100" dirty="0">
+                        <a:latin typeface="Pretendard" charset="0"/>
+                        <a:ea typeface="Pretendard" charset="0"/>
+                        <a:cs typeface="Pretendard" charset="0"/>
+                      </a:endParaRPr>
+                    </a:p>
+                  </a:txBody>
+                  <a:tcPr marL="73152" marR="73152" marT="36576" marB="36576" anchor="ctr">
+                    <a:lnL w="9525" cap="flat" cmpd="sng" algn="ctr">
+                      <a:solidFill>
+                        <a:srgbClr val="D9D9D9"/>
+                      </a:solidFill>
+                      <a:prstDash val="solid"/>
+                      <a:round/>
+                      <a:headEnd type="none" w="med" len="med"/>
+                      <a:tailEnd type="none" w="med" len="med"/>
+                    </a:lnL>
+                    <a:lnR w="9525" cap="flat" cmpd="sng" algn="ctr">
+                      <a:solidFill>
+                        <a:srgbClr val="D9D9D9"/>
+                      </a:solidFill>
+                      <a:prstDash val="solid"/>
+                      <a:round/>
+                      <a:headEnd type="none" w="med" len="med"/>
+                      <a:tailEnd type="none" w="med" len="med"/>
+                    </a:lnR>
+                    <a:lnT w="9525" cap="flat" cmpd="sng" algn="ctr">
+                      <a:solidFill>
+                        <a:srgbClr val="D9D9D9"/>
+                      </a:solidFill>
+                      <a:prstDash val="solid"/>
+                      <a:round/>
+                      <a:headEnd type="none" w="med" len="med"/>
+                      <a:tailEnd type="none" w="med" len="med"/>
+                    </a:lnT>
+                    <a:lnB w="9525" cap="flat" cmpd="sng" algn="ctr">
+                      <a:solidFill>
+                        <a:srgbClr val="D9D9D9"/>
+                      </a:solidFill>
+                      <a:prstDash val="solid"/>
+                      <a:round/>
+                      <a:headEnd type="none" w="med" len="med"/>
+                      <a:tailEnd type="none" w="med" len="med"/>
+                    </a:lnB>
+                  </a:tcPr>
+                </a:tc>
+              </a:tr>
+              <a:tr h="347472">
+                <a:tc>
+                  <a:txBody>
+                    <a:bodyPr/>
+                    <a:lstStyle/>
+                    <a:p>
+                      <a:pPr indent="0" marL="0">
+                        <a:buNone/>
+                      </a:pPr>
+                      <a:r>
+                        <a:rPr lang="en-US" sz="1100" b="1" dirty="0">
+                          <a:solidFill>
+                            <a:srgbClr val="00358F"/>
+                          </a:solidFill>
+                          <a:latin typeface="Pretendard" pitchFamily="34" charset="0"/>
+                          <a:ea typeface="Pretendard" pitchFamily="34" charset="-122"/>
+                          <a:cs typeface="Pretendard" pitchFamily="34" charset="-120"/>
+                        </a:rPr>
+                        <a:t>예비 1</a:t>
+                      </a:r>
+                      <a:endParaRPr lang="en-US" sz="1100" dirty="0">
+                        <a:latin typeface="Pretendard" charset="0"/>
+                        <a:ea typeface="Pretendard" charset="0"/>
+                        <a:cs typeface="Pretendard" charset="0"/>
+                      </a:endParaRPr>
+                    </a:p>
+                  </a:txBody>
+                  <a:tcPr marL="73152" marR="73152" marT="36576" marB="36576" anchor="ctr">
+                    <a:lnL w="9525" cap="flat" cmpd="sng" algn="ctr">
+                      <a:solidFill>
+                        <a:srgbClr val="D9D9D9"/>
+                      </a:solidFill>
+                      <a:prstDash val="solid"/>
+                      <a:round/>
+                      <a:headEnd type="none" w="med" len="med"/>
+                      <a:tailEnd type="none" w="med" len="med"/>
+                    </a:lnL>
+                    <a:lnR w="9525" cap="flat" cmpd="sng" algn="ctr">
+                      <a:solidFill>
+                        <a:srgbClr val="D9D9D9"/>
+                      </a:solidFill>
+                      <a:prstDash val="solid"/>
+                      <a:round/>
+                      <a:headEnd type="none" w="med" len="med"/>
+                      <a:tailEnd type="none" w="med" len="med"/>
+                    </a:lnR>
+                    <a:lnT w="9525" cap="flat" cmpd="sng" algn="ctr">
+                      <a:solidFill>
+                        <a:srgbClr val="D9D9D9"/>
+                      </a:solidFill>
+                      <a:prstDash val="solid"/>
+                      <a:round/>
+                      <a:headEnd type="none" w="med" len="med"/>
+                      <a:tailEnd type="none" w="med" len="med"/>
+                    </a:lnT>
+                    <a:lnB w="9525" cap="flat" cmpd="sng" algn="ctr">
+                      <a:solidFill>
+                        <a:srgbClr val="D9D9D9"/>
+                      </a:solidFill>
+                      <a:prstDash val="solid"/>
+                      <a:round/>
+                      <a:headEnd type="none" w="med" len="med"/>
+                      <a:tailEnd type="none" w="med" len="med"/>
+                    </a:lnB>
+                    <a:solidFill>
+                      <a:srgbClr val="F5F7FB"/>
+                    </a:solidFill>
+                  </a:tcPr>
+                </a:tc>
+                <a:tc>
+                  <a:txBody>
+                    <a:bodyPr/>
+                    <a:lstStyle/>
+                    <a:p>
+                      <a:pPr indent="0" marL="0">
+                        <a:buNone/>
+                      </a:pPr>
+                      <a:r>
+                        <a:rPr lang="en-US" sz="1100" dirty="0">
+                          <a:solidFill>
+                            <a:srgbClr val="222222"/>
+                          </a:solidFill>
+                          <a:latin typeface="Pretendard" pitchFamily="34" charset="0"/>
+                          <a:ea typeface="Pretendard" pitchFamily="34" charset="-122"/>
+                          <a:cs typeface="Pretendard" pitchFamily="34" charset="-120"/>
+                        </a:rPr>
+                        <a:t>행정안전부 외국인주민 현황(청도군, 2026.9 집계), 매일신문 2026.10.8, 경북매일 2026.10.1</a:t>
+                      </a:r>
+                      <a:endParaRPr lang="en-US" sz="1100" dirty="0">
+                        <a:latin typeface="Pretendard" charset="0"/>
+                        <a:ea typeface="Pretendard" charset="0"/>
+                        <a:cs typeface="Pretendard" charset="0"/>
+                      </a:endParaRPr>
+                    </a:p>
+                  </a:txBody>
+                  <a:tcPr marL="73152" marR="73152" marT="36576" marB="36576" anchor="ctr">
+                    <a:lnL w="9525" cap="flat" cmpd="sng" algn="ctr">
+                      <a:solidFill>
+                        <a:srgbClr val="D9D9D9"/>
+                      </a:solidFill>
+                      <a:prstDash val="solid"/>
+                      <a:round/>
+                      <a:headEnd type="none" w="med" len="med"/>
+                      <a:tailEnd type="none" w="med" len="med"/>
+                    </a:lnL>
+                    <a:lnR w="9525" cap="flat" cmpd="sng" algn="ctr">
+                      <a:solidFill>
+                        <a:srgbClr val="D9D9D9"/>
+                      </a:solidFill>
+                      <a:prstDash val="solid"/>
+                      <a:round/>
+                      <a:headEnd type="none" w="med" len="med"/>
+                      <a:tailEnd type="none" w="med" len="med"/>
+                    </a:lnR>
+                    <a:lnT w="9525" cap="flat" cmpd="sng" algn="ctr">
+                      <a:solidFill>
+                        <a:srgbClr val="D9D9D9"/>
+                      </a:solidFill>
+                      <a:prstDash val="solid"/>
+                      <a:round/>
+                      <a:headEnd type="none" w="med" len="med"/>
+                      <a:tailEnd type="none" w="med" len="med"/>
+                    </a:lnT>
+                    <a:lnB w="9525" cap="flat" cmpd="sng" algn="ctr">
+                      <a:solidFill>
+                        <a:srgbClr val="D9D9D9"/>
+                      </a:solidFill>
+                      <a:prstDash val="solid"/>
+                      <a:round/>
+                      <a:headEnd type="none" w="med" len="med"/>
+                      <a:tailEnd type="none" w="med" len="med"/>
+                    </a:lnB>
+                  </a:tcPr>
+                </a:tc>
+                <a:tc>
+                  <a:txBody>
+                    <a:bodyPr/>
+                    <a:lstStyle/>
+                    <a:p>
+                      <a:pPr indent="0" marL="0">
+                        <a:buNone/>
+                      </a:pPr>
+                      <a:r>
+                        <a:rPr lang="en-US" sz="1100" dirty="0">
+                          <a:solidFill>
+                            <a:srgbClr val="222222"/>
+                          </a:solidFill>
+                          <a:latin typeface="Pretendard" pitchFamily="34" charset="0"/>
+                          <a:ea typeface="Pretendard" pitchFamily="34" charset="-122"/>
+                          <a:cs typeface="Pretendard" pitchFamily="34" charset="-120"/>
+                        </a:rPr>
+                        <a:t>외국인 주민·근로자, 계절근로자</a:t>
+                      </a:r>
+                      <a:endParaRPr lang="en-US" sz="1100" dirty="0">
+                        <a:latin typeface="Pretendard" charset="0"/>
+                        <a:ea typeface="Pretendard" charset="0"/>
+                        <a:cs typeface="Pretendard" charset="0"/>
+                      </a:endParaRPr>
+                    </a:p>
+                  </a:txBody>
+                  <a:tcPr marL="73152" marR="73152" marT="36576" marB="36576" anchor="ctr">
+                    <a:lnL w="9525" cap="flat" cmpd="sng" algn="ctr">
+                      <a:solidFill>
+                        <a:srgbClr val="D9D9D9"/>
+                      </a:solidFill>
+                      <a:prstDash val="solid"/>
+                      <a:round/>
+                      <a:headEnd type="none" w="med" len="med"/>
+                      <a:tailEnd type="none" w="med" len="med"/>
+                    </a:lnL>
+                    <a:lnR w="9525" cap="flat" cmpd="sng" algn="ctr">
+                      <a:solidFill>
+                        <a:srgbClr val="D9D9D9"/>
+                      </a:solidFill>
+                      <a:prstDash val="solid"/>
+                      <a:round/>
+                      <a:headEnd type="none" w="med" len="med"/>
+                      <a:tailEnd type="none" w="med" len="med"/>
+                    </a:lnR>
+                    <a:lnT w="9525" cap="flat" cmpd="sng" algn="ctr">
+                      <a:solidFill>
+                        <a:srgbClr val="D9D9D9"/>
+                      </a:solidFill>
+                      <a:prstDash val="solid"/>
+                      <a:round/>
+                      <a:headEnd type="none" w="med" len="med"/>
+                      <a:tailEnd type="none" w="med" len="med"/>
+                    </a:lnT>
+                    <a:lnB w="9525" cap="flat" cmpd="sng" algn="ctr">
+                      <a:solidFill>
+                        <a:srgbClr val="D9D9D9"/>
+                      </a:solidFill>
+                      <a:prstDash val="solid"/>
+                      <a:round/>
+                      <a:headEnd type="none" w="med" len="med"/>
+                      <a:tailEnd type="none" w="med" len="med"/>
+                    </a:lnB>
+                  </a:tcPr>
+                </a:tc>
+              </a:tr>
+              <a:tr h="347472">
+                <a:tc>
+                  <a:txBody>
+                    <a:bodyPr/>
+                    <a:lstStyle/>
+                    <a:p>
+                      <a:pPr indent="0" marL="0">
+                        <a:buNone/>
+                      </a:pPr>
+                      <a:r>
+                        <a:rPr lang="en-US" sz="1100" b="1" dirty="0">
+                          <a:solidFill>
+                            <a:srgbClr val="00358F"/>
+                          </a:solidFill>
+                          <a:latin typeface="Pretendard" pitchFamily="34" charset="0"/>
+                          <a:ea typeface="Pretendard" pitchFamily="34" charset="-122"/>
+                          <a:cs typeface="Pretendard" pitchFamily="34" charset="-120"/>
+                        </a:rPr>
+                        <a:t>예비 2</a:t>
+                      </a:r>
+                      <a:endParaRPr lang="en-US" sz="1100" dirty="0">
+                        <a:latin typeface="Pretendard" charset="0"/>
+                        <a:ea typeface="Pretendard" charset="0"/>
+                        <a:cs typeface="Pretendard" charset="0"/>
+                      </a:endParaRPr>
+                    </a:p>
+                  </a:txBody>
+                  <a:tcPr marL="73152" marR="73152" marT="36576" marB="36576" anchor="ctr">
+                    <a:lnL w="9525" cap="flat" cmpd="sng" algn="ctr">
+                      <a:solidFill>
+                        <a:srgbClr val="D9D9D9"/>
+                      </a:solidFill>
+                      <a:prstDash val="solid"/>
+                      <a:round/>
+                      <a:headEnd type="none" w="med" len="med"/>
+                      <a:tailEnd type="none" w="med" len="med"/>
+                    </a:lnL>
+                    <a:lnR w="9525" cap="flat" cmpd="sng" algn="ctr">
+                      <a:solidFill>
+                        <a:srgbClr val="D9D9D9"/>
+                      </a:solidFill>
+                      <a:prstDash val="solid"/>
+                      <a:round/>
+                      <a:headEnd type="none" w="med" len="med"/>
+                      <a:tailEnd type="none" w="med" len="med"/>
+                    </a:lnR>
+                    <a:lnT w="9525" cap="flat" cmpd="sng" algn="ctr">
+                      <a:solidFill>
+                        <a:srgbClr val="D9D9D9"/>
+                      </a:solidFill>
+                      <a:prstDash val="solid"/>
+                      <a:round/>
+                      <a:headEnd type="none" w="med" len="med"/>
+                      <a:tailEnd type="none" w="med" len="med"/>
+                    </a:lnT>
+                    <a:lnB w="9525" cap="flat" cmpd="sng" algn="ctr">
+                      <a:solidFill>
+                        <a:srgbClr val="D9D9D9"/>
+                      </a:solidFill>
+                      <a:prstDash val="solid"/>
+                      <a:round/>
+                      <a:headEnd type="none" w="med" len="med"/>
+                      <a:tailEnd type="none" w="med" len="med"/>
+                    </a:lnB>
+                    <a:solidFill>
+                      <a:srgbClr val="F5F7FB"/>
+                    </a:solidFill>
+                  </a:tcPr>
+                </a:tc>
+                <a:tc>
+                  <a:txBody>
+                    <a:bodyPr/>
+                    <a:lstStyle/>
+                    <a:p>
+                      <a:pPr indent="0" marL="0">
+                        <a:buNone/>
+                      </a:pPr>
+                      <a:r>
+                        <a:rPr lang="en-US" sz="1100" dirty="0">
+                          <a:solidFill>
+                            <a:srgbClr val="222222"/>
+                          </a:solidFill>
+                          <a:latin typeface="Pretendard" pitchFamily="34" charset="0"/>
+                          <a:ea typeface="Pretendard" pitchFamily="34" charset="-122"/>
+                          <a:cs typeface="Pretendard" pitchFamily="34" charset="-120"/>
+                        </a:rPr>
+                        <a:t>경북매일 2025.5.6(경로당), 아주경제 2026.8.4(양양 택배), 강원일보 2025.9.22(홍천)</a:t>
+                      </a:r>
+                      <a:endParaRPr lang="en-US" sz="1100" dirty="0">
+                        <a:latin typeface="Pretendard" charset="0"/>
+                        <a:ea typeface="Pretendard" charset="0"/>
+                        <a:cs typeface="Pretendard" charset="0"/>
+                      </a:endParaRPr>
+                    </a:p>
+                  </a:txBody>
+                  <a:tcPr marL="73152" marR="73152" marT="36576" marB="36576" anchor="ctr">
+                    <a:lnL w="9525" cap="flat" cmpd="sng" algn="ctr">
+                      <a:solidFill>
+                        <a:srgbClr val="D9D9D9"/>
+                      </a:solidFill>
+                      <a:prstDash val="solid"/>
+                      <a:round/>
+                      <a:headEnd type="none" w="med" len="med"/>
+                      <a:tailEnd type="none" w="med" len="med"/>
+                    </a:lnL>
+                    <a:lnR w="9525" cap="flat" cmpd="sng" algn="ctr">
+                      <a:solidFill>
+                        <a:srgbClr val="D9D9D9"/>
+                      </a:solidFill>
+                      <a:prstDash val="solid"/>
+                      <a:round/>
+                      <a:headEnd type="none" w="med" len="med"/>
+                      <a:tailEnd type="none" w="med" len="med"/>
+                    </a:lnR>
+                    <a:lnT w="9525" cap="flat" cmpd="sng" algn="ctr">
+                      <a:solidFill>
+                        <a:srgbClr val="D9D9D9"/>
+                      </a:solidFill>
+                      <a:prstDash val="solid"/>
+                      <a:round/>
+                      <a:headEnd type="none" w="med" len="med"/>
+                      <a:tailEnd type="none" w="med" len="med"/>
+                    </a:lnT>
+                    <a:lnB w="9525" cap="flat" cmpd="sng" algn="ctr">
+                      <a:solidFill>
+                        <a:srgbClr val="D9D9D9"/>
+                      </a:solidFill>
+                      <a:prstDash val="solid"/>
+                      <a:round/>
+                      <a:headEnd type="none" w="med" len="med"/>
+                      <a:tailEnd type="none" w="med" len="med"/>
+                    </a:lnB>
+                  </a:tcPr>
+                </a:tc>
+                <a:tc>
+                  <a:txBody>
+                    <a:bodyPr/>
+                    <a:lstStyle/>
+                    <a:p>
+                      <a:pPr indent="0" marL="0">
+                        <a:buNone/>
+                      </a:pPr>
+                      <a:r>
+                        <a:rPr lang="en-US" sz="1100" dirty="0">
+                          <a:solidFill>
+                            <a:srgbClr val="222222"/>
+                          </a:solidFill>
+                          <a:latin typeface="Pretendard" pitchFamily="34" charset="0"/>
+                          <a:ea typeface="Pretendard" pitchFamily="34" charset="-122"/>
+                          <a:cs typeface="Pretendard" pitchFamily="34" charset="-120"/>
+                        </a:rPr>
+                        <a:t>경로당 319곳, 산간 택배 사례</a:t>
+                      </a:r>
+                      <a:endParaRPr lang="en-US" sz="1100" dirty="0">
+                        <a:latin typeface="Pretendard" charset="0"/>
+                        <a:ea typeface="Pretendard" charset="0"/>
+                        <a:cs typeface="Pretendard" charset="0"/>
+                      </a:endParaRPr>
+                    </a:p>
+                  </a:txBody>
+                  <a:tcPr marL="73152" marR="73152" marT="36576" marB="36576" anchor="ctr">
+                    <a:lnL w="9525" cap="flat" cmpd="sng" algn="ctr">
+                      <a:solidFill>
+                        <a:srgbClr val="D9D9D9"/>
+                      </a:solidFill>
+                      <a:prstDash val="solid"/>
+                      <a:round/>
+                      <a:headEnd type="none" w="med" len="med"/>
+                      <a:tailEnd type="none" w="med" len="med"/>
+                    </a:lnL>
+                    <a:lnR w="9525" cap="flat" cmpd="sng" algn="ctr">
+                      <a:solidFill>
+                        <a:srgbClr val="D9D9D9"/>
+                      </a:solidFill>
+                      <a:prstDash val="solid"/>
+                      <a:round/>
+                      <a:headEnd type="none" w="med" len="med"/>
+                      <a:tailEnd type="none" w="med" len="med"/>
+                    </a:lnR>
+                    <a:lnT w="9525" cap="flat" cmpd="sng" algn="ctr">
+                      <a:solidFill>
+                        <a:srgbClr val="D9D9D9"/>
+                      </a:solidFill>
+                      <a:prstDash val="solid"/>
+                      <a:round/>
+                      <a:headEnd type="none" w="med" len="med"/>
+                      <a:tailEnd type="none" w="med" len="med"/>
+                    </a:lnT>
+                    <a:lnB w="9525" cap="flat" cmpd="sng" algn="ctr">
+                      <a:solidFill>
+                        <a:srgbClr val="D9D9D9"/>
+                      </a:solidFill>
+                      <a:prstDash val="solid"/>
+                      <a:round/>
+                      <a:headEnd type="none" w="med" len="med"/>
+                      <a:tailEnd type="none" w="med" len="med"/>
+                    </a:lnB>
+                  </a:tcPr>
+                </a:tc>
+              </a:tr>
+              <a:tr h="347472">
+                <a:tc>
+                  <a:txBody>
+                    <a:bodyPr/>
+                    <a:lstStyle/>
+                    <a:p>
+                      <a:pPr indent="0" marL="0">
+                        <a:buNone/>
+                      </a:pPr>
+                      <a:r>
+                        <a:rPr lang="en-US" sz="1100" b="1" dirty="0">
+                          <a:solidFill>
+                            <a:srgbClr val="00358F"/>
+                          </a:solidFill>
+                          <a:latin typeface="Pretendard" pitchFamily="34" charset="0"/>
+                          <a:ea typeface="Pretendard" pitchFamily="34" charset="-122"/>
+                          <a:cs typeface="Pretendard" pitchFamily="34" charset="-120"/>
+                        </a:rPr>
+                        <a:t>예비 3~6</a:t>
+                      </a:r>
+                      <a:endParaRPr lang="en-US" sz="1100" dirty="0">
+                        <a:latin typeface="Pretendard" charset="0"/>
+                        <a:ea typeface="Pretendard" charset="0"/>
+                        <a:cs typeface="Pretendard" charset="0"/>
+                      </a:endParaRPr>
+                    </a:p>
+                  </a:txBody>
+                  <a:tcPr marL="73152" marR="73152" marT="36576" marB="36576" anchor="ctr">
+                    <a:lnL w="9525" cap="flat" cmpd="sng" algn="ctr">
+                      <a:solidFill>
+                        <a:srgbClr val="D9D9D9"/>
+                      </a:solidFill>
+                      <a:prstDash val="solid"/>
+                      <a:round/>
+                      <a:headEnd type="none" w="med" len="med"/>
+                      <a:tailEnd type="none" w="med" len="med"/>
+                    </a:lnL>
+                    <a:lnR w="9525" cap="flat" cmpd="sng" algn="ctr">
+                      <a:solidFill>
+                        <a:srgbClr val="D9D9D9"/>
+                      </a:solidFill>
+                      <a:prstDash val="solid"/>
+                      <a:round/>
+                      <a:headEnd type="none" w="med" len="med"/>
+                      <a:tailEnd type="none" w="med" len="med"/>
+                    </a:lnR>
+                    <a:lnT w="9525" cap="flat" cmpd="sng" algn="ctr">
+                      <a:solidFill>
+                        <a:srgbClr val="D9D9D9"/>
+                      </a:solidFill>
+                      <a:prstDash val="solid"/>
+                      <a:round/>
+                      <a:headEnd type="none" w="med" len="med"/>
+                      <a:tailEnd type="none" w="med" len="med"/>
+                    </a:lnT>
+                    <a:lnB w="9525" cap="flat" cmpd="sng" algn="ctr">
+                      <a:solidFill>
+                        <a:srgbClr val="D9D9D9"/>
+                      </a:solidFill>
+                      <a:prstDash val="solid"/>
+                      <a:round/>
+                      <a:headEnd type="none" w="med" len="med"/>
+                      <a:tailEnd type="none" w="med" len="med"/>
+                    </a:lnB>
+                    <a:solidFill>
+                      <a:srgbClr val="F5F7FB"/>
+                    </a:solidFill>
+                  </a:tcPr>
+                </a:tc>
+                <a:tc>
+                  <a:txBody>
+                    <a:bodyPr/>
+                    <a:lstStyle/>
+                    <a:p>
+                      <a:pPr indent="0" marL="0">
+                        <a:buNone/>
+                      </a:pPr>
+                      <a:r>
+                        <a:rPr lang="en-US" sz="1100" dirty="0">
+                          <a:solidFill>
+                            <a:srgbClr val="222222"/>
+                          </a:solidFill>
+                          <a:latin typeface="Pretendard" pitchFamily="34" charset="0"/>
+                          <a:ea typeface="Pretendard" pitchFamily="34" charset="-122"/>
+                          <a:cs typeface="Pretendard" pitchFamily="34" charset="-120"/>
+                        </a:rPr>
+                        <a:t>한국관광공사 여행코스(와인터널), 뉴스서울 2024.7.17(농기계), 경북매일 2026.10.20(금천고)</a:t>
+                      </a:r>
+                      <a:endParaRPr lang="en-US" sz="1100" dirty="0">
+                        <a:latin typeface="Pretendard" charset="0"/>
+                        <a:ea typeface="Pretendard" charset="0"/>
+                        <a:cs typeface="Pretendard" charset="0"/>
+                      </a:endParaRPr>
+                    </a:p>
+                  </a:txBody>
+                  <a:tcPr marL="73152" marR="73152" marT="36576" marB="36576" anchor="ctr">
+                    <a:lnL w="9525" cap="flat" cmpd="sng" algn="ctr">
+                      <a:solidFill>
+                        <a:srgbClr val="D9D9D9"/>
+                      </a:solidFill>
+                      <a:prstDash val="solid"/>
+                      <a:round/>
+                      <a:headEnd type="none" w="med" len="med"/>
+                      <a:tailEnd type="none" w="med" len="med"/>
+                    </a:lnL>
+                    <a:lnR w="9525" cap="flat" cmpd="sng" algn="ctr">
+                      <a:solidFill>
+                        <a:srgbClr val="D9D9D9"/>
+                      </a:solidFill>
+                      <a:prstDash val="solid"/>
+                      <a:round/>
+                      <a:headEnd type="none" w="med" len="med"/>
+                      <a:tailEnd type="none" w="med" len="med"/>
+                    </a:lnR>
+                    <a:lnT w="9525" cap="flat" cmpd="sng" algn="ctr">
+                      <a:solidFill>
+                        <a:srgbClr val="D9D9D9"/>
+                      </a:solidFill>
+                      <a:prstDash val="solid"/>
+                      <a:round/>
+                      <a:headEnd type="none" w="med" len="med"/>
+                      <a:tailEnd type="none" w="med" len="med"/>
+                    </a:lnT>
+                    <a:lnB w="9525" cap="flat" cmpd="sng" algn="ctr">
+                      <a:solidFill>
+                        <a:srgbClr val="D9D9D9"/>
+                      </a:solidFill>
+                      <a:prstDash val="solid"/>
+                      <a:round/>
+                      <a:headEnd type="none" w="med" len="med"/>
+                      <a:tailEnd type="none" w="med" len="med"/>
+                    </a:lnB>
+                  </a:tcPr>
+                </a:tc>
+                <a:tc>
+                  <a:txBody>
+                    <a:bodyPr/>
+                    <a:lstStyle/>
+                    <a:p>
+                      <a:pPr indent="0" marL="0">
+                        <a:buNone/>
+                      </a:pPr>
+                      <a:r>
+                        <a:rPr lang="en-US" sz="1100" dirty="0">
+                          <a:solidFill>
+                            <a:srgbClr val="222222"/>
+                          </a:solidFill>
+                          <a:latin typeface="Pretendard" pitchFamily="34" charset="0"/>
+                          <a:ea typeface="Pretendard" pitchFamily="34" charset="-122"/>
+                          <a:cs typeface="Pretendard" pitchFamily="34" charset="-120"/>
+                        </a:rPr>
+                        <a:t>터널 규모, 임대 실적, 폐교</a:t>
+                      </a:r>
+                      <a:endParaRPr lang="en-US" sz="1100" dirty="0">
+                        <a:latin typeface="Pretendard" charset="0"/>
+                        <a:ea typeface="Pretendard" charset="0"/>
+                        <a:cs typeface="Pretendard" charset="0"/>
+                      </a:endParaRPr>
+                    </a:p>
+                  </a:txBody>
+                  <a:tcPr marL="73152" marR="73152" marT="36576" marB="36576" anchor="ctr">
+                    <a:lnL w="9525" cap="flat" cmpd="sng" algn="ctr">
+                      <a:solidFill>
+                        <a:srgbClr val="D9D9D9"/>
+                      </a:solidFill>
+                      <a:prstDash val="solid"/>
+                      <a:round/>
+                      <a:headEnd type="none" w="med" len="med"/>
+                      <a:tailEnd type="none" w="med" len="med"/>
+                    </a:lnL>
+                    <a:lnR w="9525" cap="flat" cmpd="sng" algn="ctr">
+                      <a:solidFill>
+                        <a:srgbClr val="D9D9D9"/>
+                      </a:solidFill>
+                      <a:prstDash val="solid"/>
+                      <a:round/>
+                      <a:headEnd type="none" w="med" len="med"/>
+                      <a:tailEnd type="none" w="med" len="med"/>
+                    </a:lnR>
+                    <a:lnT w="9525" cap="flat" cmpd="sng" algn="ctr">
+                      <a:solidFill>
+                        <a:srgbClr val="D9D9D9"/>
+                      </a:solidFill>
+                      <a:prstDash val="solid"/>
+                      <a:round/>
+                      <a:headEnd type="none" w="med" len="med"/>
+                      <a:tailEnd type="none" w="med" len="med"/>
+                    </a:lnT>
+                    <a:lnB w="9525" cap="flat" cmpd="sng" algn="ctr">
+                      <a:solidFill>
+                        <a:srgbClr val="D9D9D9"/>
+                      </a:solidFill>
+                      <a:prstDash val="solid"/>
+                      <a:round/>
+                      <a:headEnd type="none" w="med" len="med"/>
+                      <a:tailEnd type="none" w="med" len="med"/>
+                    </a:lnB>
+                  </a:tcPr>
+                </a:tc>
+              </a:tr>
+              <a:tr h="347472">
+                <a:tc>
+                  <a:txBody>
+                    <a:bodyPr/>
+                    <a:lstStyle/>
+                    <a:p>
+                      <a:pPr indent="0" marL="0">
+                        <a:buNone/>
+                      </a:pPr>
+                      <a:r>
+                        <a:rPr lang="en-US" sz="1100" b="1" dirty="0">
+                          <a:solidFill>
+                            <a:srgbClr val="00358F"/>
+                          </a:solidFill>
+                          <a:latin typeface="Pretendard" pitchFamily="34" charset="0"/>
+                          <a:ea typeface="Pretendard" pitchFamily="34" charset="-122"/>
+                          <a:cs typeface="Pretendard" pitchFamily="34" charset="-120"/>
+                        </a:rPr>
+                        <a:t>버스</a:t>
+                      </a:r>
+                      <a:endParaRPr lang="en-US" sz="1100" dirty="0">
+                        <a:latin typeface="Pretendard" charset="0"/>
+                        <a:ea typeface="Pretendard" charset="0"/>
+                        <a:cs typeface="Pretendard" charset="0"/>
+                      </a:endParaRPr>
+                    </a:p>
+                  </a:txBody>
+                  <a:tcPr marL="73152" marR="73152" marT="36576" marB="36576" anchor="ctr">
+                    <a:lnL w="9525" cap="flat" cmpd="sng" algn="ctr">
+                      <a:solidFill>
+                        <a:srgbClr val="D9D9D9"/>
+                      </a:solidFill>
+                      <a:prstDash val="solid"/>
+                      <a:round/>
+                      <a:headEnd type="none" w="med" len="med"/>
+                      <a:tailEnd type="none" w="med" len="med"/>
+                    </a:lnL>
+                    <a:lnR w="9525" cap="flat" cmpd="sng" algn="ctr">
+                      <a:solidFill>
+                        <a:srgbClr val="D9D9D9"/>
+                      </a:solidFill>
+                      <a:prstDash val="solid"/>
+                      <a:round/>
+                      <a:headEnd type="none" w="med" len="med"/>
+                      <a:tailEnd type="none" w="med" len="med"/>
+                    </a:lnR>
+                    <a:lnT w="9525" cap="flat" cmpd="sng" algn="ctr">
+                      <a:solidFill>
+                        <a:srgbClr val="D9D9D9"/>
+                      </a:solidFill>
+                      <a:prstDash val="solid"/>
+                      <a:round/>
+                      <a:headEnd type="none" w="med" len="med"/>
+                      <a:tailEnd type="none" w="med" len="med"/>
+                    </a:lnT>
+                    <a:lnB w="9525" cap="flat" cmpd="sng" algn="ctr">
+                      <a:solidFill>
+                        <a:srgbClr val="D9D9D9"/>
+                      </a:solidFill>
+                      <a:prstDash val="solid"/>
+                      <a:round/>
+                      <a:headEnd type="none" w="med" len="med"/>
+                      <a:tailEnd type="none" w="med" len="med"/>
+                    </a:lnB>
+                    <a:solidFill>
+                      <a:srgbClr val="F5F7FB"/>
+                    </a:solidFill>
+                  </a:tcPr>
+                </a:tc>
+                <a:tc>
+                  <a:txBody>
+                    <a:bodyPr/>
+                    <a:lstStyle/>
+                    <a:p>
+                      <a:pPr indent="0" marL="0">
+                        <a:buNone/>
+                      </a:pPr>
+                      <a:r>
+                        <a:rPr lang="en-US" sz="1100" dirty="0">
+                          <a:solidFill>
+                            <a:srgbClr val="222222"/>
+                          </a:solidFill>
+                          <a:latin typeface="Pretendard" pitchFamily="34" charset="0"/>
+                          <a:ea typeface="Pretendard" pitchFamily="34" charset="-122"/>
+                          <a:cs typeface="Pretendard" pitchFamily="34" charset="-120"/>
+                        </a:rPr>
+                        <a:t>나무위키 청도 버스 1·7번(2016.5), 노선 정보 사이트, HS 수집 자료(10.26), 주간경향 2026.4.27</a:t>
+                      </a:r>
+                      <a:endParaRPr lang="en-US" sz="1100" dirty="0">
+                        <a:latin typeface="Pretendard" charset="0"/>
+                        <a:ea typeface="Pretendard" charset="0"/>
+                        <a:cs typeface="Pretendard" charset="0"/>
+                      </a:endParaRPr>
+                    </a:p>
+                  </a:txBody>
+                  <a:tcPr marL="73152" marR="73152" marT="36576" marB="36576" anchor="ctr">
+                    <a:lnL w="9525" cap="flat" cmpd="sng" algn="ctr">
+                      <a:solidFill>
+                        <a:srgbClr val="D9D9D9"/>
+                      </a:solidFill>
+                      <a:prstDash val="solid"/>
+                      <a:round/>
+                      <a:headEnd type="none" w="med" len="med"/>
+                      <a:tailEnd type="none" w="med" len="med"/>
+                    </a:lnL>
+                    <a:lnR w="9525" cap="flat" cmpd="sng" algn="ctr">
+                      <a:solidFill>
+                        <a:srgbClr val="D9D9D9"/>
+                      </a:solidFill>
+                      <a:prstDash val="solid"/>
+                      <a:round/>
+                      <a:headEnd type="none" w="med" len="med"/>
+                      <a:tailEnd type="none" w="med" len="med"/>
+                    </a:lnR>
+                    <a:lnT w="9525" cap="flat" cmpd="sng" algn="ctr">
+                      <a:solidFill>
+                        <a:srgbClr val="D9D9D9"/>
+                      </a:solidFill>
+                      <a:prstDash val="solid"/>
+                      <a:round/>
+                      <a:headEnd type="none" w="med" len="med"/>
+                      <a:tailEnd type="none" w="med" len="med"/>
+                    </a:lnT>
+                    <a:lnB w="9525" cap="flat" cmpd="sng" algn="ctr">
+                      <a:solidFill>
+                        <a:srgbClr val="D9D9D9"/>
+                      </a:solidFill>
+                      <a:prstDash val="solid"/>
+                      <a:round/>
+                      <a:headEnd type="none" w="med" len="med"/>
+                      <a:tailEnd type="none" w="med" len="med"/>
+                    </a:lnB>
+                  </a:tcPr>
+                </a:tc>
+                <a:tc>
+                  <a:txBody>
+                    <a:bodyPr/>
+                    <a:lstStyle/>
+                    <a:p>
+                      <a:pPr indent="0" marL="0">
+                        <a:buNone/>
+                      </a:pPr>
+                      <a:r>
+                        <a:rPr lang="en-US" sz="1100" dirty="0">
+                          <a:solidFill>
+                            <a:srgbClr val="222222"/>
+                          </a:solidFill>
+                          <a:latin typeface="Pretendard" pitchFamily="34" charset="0"/>
+                          <a:ea typeface="Pretendard" pitchFamily="34" charset="-122"/>
+                          <a:cs typeface="Pretendard" pitchFamily="34" charset="-120"/>
+                        </a:rPr>
+                        <a:t>노선별 운행 횟수, 경북 배차간격</a:t>
+                      </a:r>
+                      <a:endParaRPr lang="en-US" sz="1100" dirty="0">
+                        <a:latin typeface="Pretendard" charset="0"/>
+                        <a:ea typeface="Pretendard" charset="0"/>
+                        <a:cs typeface="Pretendard" charset="0"/>
+                      </a:endParaRPr>
+                    </a:p>
+                  </a:txBody>
+                  <a:tcPr marL="73152" marR="73152" marT="36576" marB="36576" anchor="ctr">
+                    <a:lnL w="9525" cap="flat" cmpd="sng" algn="ctr">
+                      <a:solidFill>
+                        <a:srgbClr val="D9D9D9"/>
+                      </a:solidFill>
+                      <a:prstDash val="solid"/>
+                      <a:round/>
+                      <a:headEnd type="none" w="med" len="med"/>
+                      <a:tailEnd type="none" w="med" len="med"/>
+                    </a:lnL>
+                    <a:lnR w="9525" cap="flat" cmpd="sng" algn="ctr">
+                      <a:solidFill>
+                        <a:srgbClr val="D9D9D9"/>
+                      </a:solidFill>
+                      <a:prstDash val="solid"/>
+                      <a:round/>
+                      <a:headEnd type="none" w="med" len="med"/>
+                      <a:tailEnd type="none" w="med" len="med"/>
+                    </a:lnR>
+                    <a:lnT w="9525" cap="flat" cmpd="sng" algn="ctr">
+                      <a:solidFill>
+                        <a:srgbClr val="D9D9D9"/>
+                      </a:solidFill>
+                      <a:prstDash val="solid"/>
+                      <a:round/>
+                      <a:headEnd type="none" w="med" len="med"/>
+                      <a:tailEnd type="none" w="med" len="med"/>
+                    </a:lnT>
+                    <a:lnB w="9525" cap="flat" cmpd="sng" algn="ctr">
+                      <a:solidFill>
+                        <a:srgbClr val="D9D9D9"/>
+                      </a:solidFill>
+                      <a:prstDash val="solid"/>
+                      <a:round/>
+                      <a:headEnd type="none" w="med" len="med"/>
+                      <a:tailEnd type="none" w="med" len="med"/>
+                    </a:lnB>
+                  </a:tcPr>
+                </a:tc>
+              </a:tr>
+            </a:tbl>
+          </a:graphicData>
+        </a:graphic>
+      </p:graphicFrame>
+      <p:sp>
+        <p:nvSpPr>
+          <p:cNvPr id="25" name="Slide Number Placeholder 0"/>
+          <p:cNvSpPr>
+            <a:spLocks noGrp="1"/>
+          </p:cNvSpPr>
+          <p:nvPr>
+            <p:ph type="sldNum" sz="quarter" idx="4294967295"/>
+          </p:nvPr>
+        </p:nvSpPr>
+        <p:spPr>
+          <a:xfrm>
+            <a:off x="457200" y="6473952"/>
+            <a:ext cx="457200" cy="256032"/>
+          </a:xfrm>
+          <a:prstGeom prst="rect">
+            <a:avLst/>
+          </a:prstGeom>
+          <a:extLst>
+            <a:ext uri="{C572A759-6A51-4108-AA02-DFA0A04FC94B}">
+              <ma14:wrappingTextBoxFlag xmlns:ma14="http://schemas.microsoft.com/office/mac/drawingml/2011/main" val="0"/>
+            </a:ext>
+          </a:extLst>
+        </p:spPr>
+        <p:txBody>
+          <a:bodyPr/>
+          <a:lstStyle>
+            <a:lvl1pPr>
+              <a:defRPr sz="800">
+                <a:solidFill>
+                  <a:schemeClr val="accent5"/>
+                </a:solidFill>
+              </a:defRPr>
+            </a:lvl1pPr>
+          </a:lstStyle>
+          <a:p>
+            <a:pPr algn="l"/>
+            <a:fld id="{F7021451-1387-4CA6-816F-3879F97B5CBC}" type="slidenum">
+              <a:rPr b="0" lang="en-US"/>
+              <a:t>23</a:t>
+            </a:fld>
+            <a:endParaRPr lang="en-US"/>
+          </a:p>
+        </p:txBody>
+      </p:sp>
+    </p:spTree>
+  </p:cSld>
+  <p:clrMapOvr>
+    <a:masterClrMapping/>
+  </p:clrMapOvr>
+</p:sld>
+</file>
+
+<file path=ppt/slides/slide24.xml><?xml version="1.0" encoding="utf-8"?>
+<p:sld xmlns:a="http://schemas.openxmlformats.org/drawingml/2006/main" xmlns:r="http://schemas.openxmlformats.org/officeDocument/2006/relationships" xmlns:p="http://schemas.openxmlformats.org/presentationml/2006/main">
+  <p:cSld name="Slide 24">
     <p:spTree>
       <p:nvGrpSpPr>
         <p:cNvPr id="1" name=""/>
